--- a/Prezentacija_SIL_HIL_Lift.pptx
+++ b/Prezentacija_SIL_HIL_Lift.pptx
@@ -5,7 +5,7 @@
     <p:sldMasterId id="2147483648" r:id="rId1"/>
   </p:sldMasterIdLst>
   <p:notesMasterIdLst>
-    <p:notesMasterId r:id="rId15"/>
+    <p:notesMasterId r:id="rId16"/>
   </p:notesMasterIdLst>
   <p:sldIdLst>
     <p:sldId id="256" r:id="rId2"/>
@@ -17,10 +17,11 @@
     <p:sldId id="262" r:id="rId8"/>
     <p:sldId id="263" r:id="rId9"/>
     <p:sldId id="264" r:id="rId10"/>
-    <p:sldId id="265" r:id="rId11"/>
-    <p:sldId id="266" r:id="rId12"/>
-    <p:sldId id="267" r:id="rId13"/>
-    <p:sldId id="268" r:id="rId14"/>
+    <p:sldId id="269" r:id="rId11"/>
+    <p:sldId id="265" r:id="rId12"/>
+    <p:sldId id="266" r:id="rId13"/>
+    <p:sldId id="267" r:id="rId14"/>
+    <p:sldId id="268" r:id="rId15"/>
   </p:sldIdLst>
   <p:sldSz cx="9144000" cy="5143500" type="screen16x9"/>
   <p:notesSz cx="6858000" cy="9144000"/>
@@ -121,7 +122,7 @@
   </p:defaultTextStyle>
   <p:extLst>
     <p:ext uri="{EFAFB233-063F-42B5-8137-9DF3F51BA10A}">
-      <p15:sldGuideLst xmlns:p15="http://schemas.microsoft.com/office/powerpoint/2012/main">
+      <p15:sldGuideLst xmlns:p15="http://schemas.microsoft.com/office/powerpoint/2012/main" xmlns="">
         <p15:guide id="1" orient="horz" pos="2160">
           <p15:clr>
             <a:srgbClr val="A4A3A4"/>
@@ -307,9 +308,7 @@
           <a:bodyPr/>
           <a:lstStyle/>
           <a:p>
-            <a:r>
-              <a:t>Naslovni slajd. Projekat: upravljanje liftom, prvo SIL (sve na jednom racunaru) pa HIL (raspodela na dva NI kontrolera preko mreze), u LabVIEW-u.</a:t>
-            </a:r>
+            <a:endParaRPr dirty="0"/>
           </a:p>
         </p:txBody>
       </p:sp>
@@ -378,7 +377,267 @@
           <a:lstStyle/>
           <a:p>
             <a:r>
-              <a:t>Front panel: 6 unutrasnjih dugmadi (0-5) + 10 spoljasnjih poziva. Unutrasnja dugmad aktivna tek nakon poziva spolja i samo u smeru poziva. Grafik prikazuje neprekidnu poziciju (Meter), plus vizuelni indikator za zaokruzenu poziciju. Cetiri LED-a za stanje, uvek tacno jedan aktivan. Mesto za sliku front panela (Slika 1).</a:t>
+              <a:rPr dirty="0" err="1"/>
+              <a:t>Implementacija</a:t>
+            </a:r>
+            <a:r>
+              <a:rPr dirty="0"/>
+              <a:t> automata: </a:t>
+            </a:r>
+            <a:r>
+              <a:rPr dirty="0" err="1"/>
+              <a:t>jedna</a:t>
+            </a:r>
+            <a:r>
+              <a:rPr dirty="0"/>
+              <a:t> While </a:t>
+            </a:r>
+            <a:r>
+              <a:rPr dirty="0" err="1"/>
+              <a:t>petlja</a:t>
+            </a:r>
+            <a:r>
+              <a:rPr dirty="0"/>
+              <a:t>; shift-</a:t>
+            </a:r>
+            <a:r>
+              <a:rPr dirty="0" err="1"/>
+              <a:t>registri</a:t>
+            </a:r>
+            <a:r>
+              <a:rPr dirty="0"/>
+              <a:t> nose </a:t>
+            </a:r>
+            <a:r>
+              <a:rPr dirty="0" err="1"/>
+              <a:t>trenutno</a:t>
+            </a:r>
+            <a:r>
+              <a:rPr dirty="0"/>
+              <a:t> </a:t>
+            </a:r>
+            <a:r>
+              <a:rPr dirty="0" err="1"/>
+              <a:t>stanje</a:t>
+            </a:r>
+            <a:r>
+              <a:rPr dirty="0"/>
+              <a:t> </a:t>
+            </a:r>
+            <a:r>
+              <a:rPr dirty="0" err="1"/>
+              <a:t>i</a:t>
+            </a:r>
+            <a:r>
+              <a:rPr dirty="0"/>
+              <a:t> </a:t>
+            </a:r>
+            <a:r>
+              <a:t>integralnu</a:t>
+            </a:r>
+            <a:r>
+              <a:rPr dirty="0"/>
+              <a:t> </a:t>
+            </a:r>
+            <a:r>
+              <a:rPr dirty="0" err="1"/>
+              <a:t>sumu</a:t>
+            </a:r>
+            <a:r>
+              <a:rPr dirty="0"/>
+              <a:t>; x se u HIL </a:t>
+            </a:r>
+            <a:r>
+              <a:rPr dirty="0" err="1"/>
+              <a:t>verziji</a:t>
+            </a:r>
+            <a:r>
+              <a:rPr dirty="0"/>
+              <a:t> </a:t>
+            </a:r>
+            <a:r>
+              <a:rPr dirty="0" err="1"/>
+              <a:t>cita</a:t>
+            </a:r>
+            <a:r>
+              <a:rPr dirty="0"/>
+              <a:t> </a:t>
+            </a:r>
+            <a:r>
+              <a:rPr dirty="0" err="1"/>
+              <a:t>sa</a:t>
+            </a:r>
+            <a:r>
+              <a:rPr dirty="0"/>
+              <a:t> </a:t>
+            </a:r>
+            <a:r>
+              <a:rPr dirty="0" err="1"/>
+              <a:t>mreze</a:t>
+            </a:r>
+            <a:r>
+              <a:rPr dirty="0"/>
+              <a:t>. </a:t>
+            </a:r>
+            <a:r>
+              <a:rPr dirty="0" err="1"/>
+              <a:t>Svaka</a:t>
+            </a:r>
+            <a:r>
+              <a:rPr dirty="0"/>
+              <a:t> </a:t>
+            </a:r>
+            <a:r>
+              <a:rPr dirty="0" err="1"/>
+              <a:t>iteracija</a:t>
+            </a:r>
+            <a:r>
+              <a:rPr dirty="0"/>
+              <a:t>: </a:t>
+            </a:r>
+            <a:r>
+              <a:rPr dirty="0" err="1"/>
+              <a:t>procita</a:t>
+            </a:r>
+            <a:r>
+              <a:rPr dirty="0"/>
+              <a:t> </a:t>
+            </a:r>
+            <a:r>
+              <a:rPr dirty="0" err="1"/>
+              <a:t>stanje</a:t>
+            </a:r>
+            <a:r>
+              <a:rPr dirty="0"/>
+              <a:t> -&gt; Case </a:t>
+            </a:r>
+            <a:r>
+              <a:rPr dirty="0" err="1"/>
+              <a:t>struktura</a:t>
+            </a:r>
+            <a:r>
+              <a:rPr dirty="0"/>
+              <a:t> </a:t>
+            </a:r>
+            <a:r>
+              <a:rPr dirty="0" err="1"/>
+              <a:t>racuna</a:t>
+            </a:r>
+            <a:r>
+              <a:rPr dirty="0"/>
+              <a:t> u </a:t>
+            </a:r>
+            <a:r>
+              <a:rPr dirty="0" err="1"/>
+              <a:t>i</a:t>
+            </a:r>
+            <a:r>
+              <a:rPr dirty="0"/>
+              <a:t> </a:t>
+            </a:r>
+            <a:r>
+              <a:rPr dirty="0" err="1"/>
+              <a:t>predlaze</a:t>
+            </a:r>
+            <a:r>
+              <a:rPr dirty="0"/>
+              <a:t> </a:t>
+            </a:r>
+            <a:r>
+              <a:rPr dirty="0" err="1"/>
+              <a:t>sledece</a:t>
+            </a:r>
+            <a:r>
+              <a:rPr dirty="0"/>
+              <a:t> </a:t>
+            </a:r>
+            <a:r>
+              <a:rPr dirty="0" err="1"/>
+              <a:t>stanje</a:t>
+            </a:r>
+            <a:r>
+              <a:rPr dirty="0"/>
+              <a:t> -&gt; Guard Clause </a:t>
+            </a:r>
+            <a:r>
+              <a:rPr dirty="0" err="1"/>
+              <a:t>presretne</a:t>
+            </a:r>
+            <a:r>
+              <a:rPr dirty="0"/>
+              <a:t> (Stop/</a:t>
+            </a:r>
+            <a:r>
+              <a:rPr dirty="0" err="1"/>
+              <a:t>greska</a:t>
+            </a:r>
+            <a:r>
+              <a:rPr dirty="0"/>
+              <a:t> -&gt; Shutdown) -&gt; </a:t>
+            </a:r>
+            <a:r>
+              <a:rPr dirty="0" err="1"/>
+              <a:t>stanje</a:t>
+            </a:r>
+            <a:r>
+              <a:rPr dirty="0"/>
+              <a:t> se </a:t>
+            </a:r>
+            <a:r>
+              <a:rPr dirty="0" err="1"/>
+              <a:t>upise</a:t>
+            </a:r>
+            <a:r>
+              <a:rPr dirty="0"/>
+              <a:t> u shift-</a:t>
+            </a:r>
+            <a:r>
+              <a:rPr dirty="0" err="1"/>
+              <a:t>registar</a:t>
+            </a:r>
+            <a:r>
+              <a:rPr dirty="0"/>
+              <a:t>. </a:t>
+            </a:r>
+            <a:r>
+              <a:rPr dirty="0" err="1"/>
+              <a:t>Mesto</a:t>
+            </a:r>
+            <a:r>
+              <a:rPr dirty="0"/>
+              <a:t> </a:t>
+            </a:r>
+            <a:r>
+              <a:rPr dirty="0" err="1"/>
+              <a:t>za</a:t>
+            </a:r>
+            <a:r>
+              <a:rPr dirty="0"/>
+              <a:t> </a:t>
+            </a:r>
+            <a:r>
+              <a:rPr dirty="0" err="1"/>
+              <a:t>sliku</a:t>
+            </a:r>
+            <a:r>
+              <a:rPr dirty="0"/>
+              <a:t> block </a:t>
+            </a:r>
+            <a:r>
+              <a:rPr dirty="0" err="1"/>
+              <a:t>dijagrama</a:t>
+            </a:r>
+            <a:r>
+              <a:rPr dirty="0"/>
+              <a:t> (</a:t>
+            </a:r>
+            <a:r>
+              <a:rPr dirty="0" err="1"/>
+              <a:t>Slika</a:t>
+            </a:r>
+            <a:r>
+              <a:rPr dirty="0"/>
+              <a:t> 4).</a:t>
             </a:r>
           </a:p>
         </p:txBody>
@@ -448,7 +707,7 @@
           <a:lstStyle/>
           <a:p>
             <a:r>
-              <a:t>Panel ima dve nezavisne paralelne petlje: jedna sa Event strukturom hvata klikove i upisuje komande na mrezu; druga neprekidno cita poziciju i stanje i osvezava prikaz. Razdvajanje cini prikaz glatkim i azurnim nezavisno od klikova. Mesto za sliku block dijagrama (Slika 7).</a:t>
+              <a:t>Front panel: 6 unutrasnjih dugmadi (0-5) + 10 spoljasnjih poziva. Unutrasnja dugmad aktivna tek nakon poziva spolja i samo u smeru poziva. Grafik prikazuje neprekidnu poziciju (Meter), plus vizuelni indikator za zaokruzenu poziciju. Cetiri LED-a za stanje, uvek tacno jedan aktivan. Mesto za sliku front panela (Slika 1).</a:t>
             </a:r>
           </a:p>
         </p:txBody>
@@ -518,7 +777,7 @@
           <a:lstStyle/>
           <a:p>
             <a:r>
-              <a:t>Bezbedno gasenje preko Guard Clause -&gt; Shutdown. Kljuc: Shutdown prvo postavi u=0 i zaustavi kretanje, pa se tek onda petlja gasi. Tako na mrezi ne ostanu zaostale vrednosti (npr. u razlicito od nule) koje bi model i automat citali kao protivrecne. Naglo gasenje bi ostavilo takve vrednosti.</a:t>
+              <a:t>Panel ima dve nezavisne paralelne petlje: jedna sa Event strukturom hvata klikove i upisuje komande na mrezu; druga neprekidno cita poziciju i stanje i osvezava prikaz. Razdvajanje cini prikaz glatkim i azurnim nezavisno od klikova. Mesto za sliku block dijagrama (Slika 7).</a:t>
             </a:r>
           </a:p>
         </p:txBody>
@@ -588,6 +847,76 @@
           <a:lstStyle/>
           <a:p>
             <a:r>
+              <a:t>Bezbedno gasenje preko Guard Clause -&gt; Shutdown. Kljuc: Shutdown prvo postavi u=0 i zaustavi kretanje, pa se tek onda petlja gasi. Tako na mrezi ne ostanu zaostale vrednosti (npr. u razlicito od nule) koje bi model i automat citali kao protivrecne. Naglo gasenje bi ostavilo takve vrednosti.</a:t>
+            </a:r>
+          </a:p>
+        </p:txBody>
+      </p:sp>
+      <p:sp>
+        <p:nvSpPr>
+          <p:cNvPr id="4" name="Slide Number Placeholder 3"/>
+          <p:cNvSpPr>
+            <a:spLocks noGrp="1"/>
+          </p:cNvSpPr>
+          <p:nvPr>
+            <p:ph type="sldNum" sz="quarter" idx="5"/>
+          </p:nvPr>
+        </p:nvSpPr>
+        <p:spPr/>
+      </p:sp>
+    </p:spTree>
+  </p:cSld>
+  <p:clrMapOvr>
+    <a:masterClrMapping/>
+  </p:clrMapOvr>
+</p:notes>
+</file>
+
+<file path=ppt/notesSlides/notesSlide14.xml><?xml version="1.0" encoding="utf-8"?>
+<p:notes xmlns:a="http://schemas.openxmlformats.org/drawingml/2006/main" xmlns:r="http://schemas.openxmlformats.org/officeDocument/2006/relationships" xmlns:p="http://schemas.openxmlformats.org/presentationml/2006/main">
+  <p:cSld>
+    <p:spTree>
+      <p:nvGrpSpPr>
+        <p:cNvPr id="1" name=""/>
+        <p:cNvGrpSpPr/>
+        <p:nvPr/>
+      </p:nvGrpSpPr>
+      <p:grpSpPr>
+        <a:xfrm>
+          <a:off x="0" y="0"/>
+          <a:ext cx="0" cy="0"/>
+          <a:chOff x="0" y="0"/>
+          <a:chExt cx="0" cy="0"/>
+        </a:xfrm>
+      </p:grpSpPr>
+      <p:sp>
+        <p:nvSpPr>
+          <p:cNvPr id="2" name="Slide Image Placeholder 1"/>
+          <p:cNvSpPr>
+            <a:spLocks noGrp="1" noRot="1" noChangeAspect="1"/>
+          </p:cNvSpPr>
+          <p:nvPr>
+            <p:ph type="sldImg" idx="2"/>
+          </p:nvPr>
+        </p:nvSpPr>
+        <p:spPr/>
+      </p:sp>
+      <p:sp>
+        <p:nvSpPr>
+          <p:cNvPr id="3" name="Notes Placeholder 2"/>
+          <p:cNvSpPr>
+            <a:spLocks noGrp="1"/>
+          </p:cNvSpPr>
+          <p:nvPr>
+            <p:ph type="body" sz="quarter" idx="3"/>
+          </p:nvPr>
+        </p:nvSpPr>
+        <p:spPr/>
+        <p:txBody>
+          <a:bodyPr/>
+          <a:lstStyle/>
+          <a:p>
+            <a:r>
               <a:t>Zakljucak: put od modela do raspodele na hardver. Tri kljucne zamke i resenja: (1) apsolutna vrednost greske ispravlja asimetriju kretanja; (2) Elapsed Time se nije pouzdano resetovao pri ponovnom ulasku u DoorOpen, pa je zamenjen namenskim Action Engine tajmerom sa metodama Reset/Timecheck; (3) reset integralne sume i default vrednosti deljenih promenljivih pri startu ciste zaostatke. Hvala na paznji.</a:t>
             </a:r>
           </a:p>
@@ -1148,7 +1477,268 @@
           <a:lstStyle/>
           <a:p>
             <a:r>
-              <a:t>Implementacija automata: jedna While petlja; shift-registri nose trenutno stanje i integralnu sumu; x se u HIL verziji cita sa mreze. Svaka iteracija: procita stanje -&gt; Case struktura racuna u i predlaze sledece stanje -&gt; Guard Clause presretne (Stop/greska -&gt; Shutdown) -&gt; stanje se upise u shift-registar. Mesto za sliku block dijagrama (Slika 4).</a:t>
+              <a:rPr dirty="0" err="1"/>
+              <a:t>Implementacija</a:t>
+            </a:r>
+            <a:r>
+              <a:rPr dirty="0"/>
+              <a:t> automata: </a:t>
+            </a:r>
+            <a:r>
+              <a:rPr dirty="0" err="1"/>
+              <a:t>jedna</a:t>
+            </a:r>
+            <a:r>
+              <a:rPr dirty="0"/>
+              <a:t> While </a:t>
+            </a:r>
+            <a:r>
+              <a:rPr dirty="0" err="1"/>
+              <a:t>petlja</a:t>
+            </a:r>
+            <a:r>
+              <a:rPr dirty="0"/>
+              <a:t>; shift-</a:t>
+            </a:r>
+            <a:r>
+              <a:rPr dirty="0" err="1"/>
+              <a:t>registri</a:t>
+            </a:r>
+            <a:r>
+              <a:rPr dirty="0"/>
+              <a:t> nose </a:t>
+            </a:r>
+            <a:r>
+              <a:rPr dirty="0" err="1"/>
+              <a:t>trenutno</a:t>
+            </a:r>
+            <a:r>
+              <a:rPr dirty="0"/>
+              <a:t> </a:t>
+            </a:r>
+            <a:r>
+              <a:rPr dirty="0" err="1"/>
+              <a:t>stanje</a:t>
+            </a:r>
+            <a:r>
+              <a:rPr dirty="0"/>
+              <a:t> </a:t>
+            </a:r>
+            <a:r>
+              <a:rPr dirty="0" err="1"/>
+              <a:t>i</a:t>
+            </a:r>
+            <a:r>
+              <a:rPr dirty="0"/>
+              <a:t> </a:t>
+            </a:r>
+            <a:r>
+              <a:rPr dirty="0" err="1"/>
+              <a:t>integralnu</a:t>
+            </a:r>
+            <a:r>
+              <a:rPr dirty="0"/>
+              <a:t> </a:t>
+            </a:r>
+            <a:r>
+              <a:rPr dirty="0" err="1"/>
+              <a:t>sumu</a:t>
+            </a:r>
+            <a:r>
+              <a:rPr dirty="0"/>
+              <a:t>; x se u HIL </a:t>
+            </a:r>
+            <a:r>
+              <a:rPr dirty="0" err="1"/>
+              <a:t>verziji</a:t>
+            </a:r>
+            <a:r>
+              <a:rPr dirty="0"/>
+              <a:t> </a:t>
+            </a:r>
+            <a:r>
+              <a:rPr dirty="0" err="1"/>
+              <a:t>cita</a:t>
+            </a:r>
+            <a:r>
+              <a:rPr dirty="0"/>
+              <a:t> </a:t>
+            </a:r>
+            <a:r>
+              <a:rPr dirty="0" err="1"/>
+              <a:t>sa</a:t>
+            </a:r>
+            <a:r>
+              <a:rPr dirty="0"/>
+              <a:t> </a:t>
+            </a:r>
+            <a:r>
+              <a:rPr dirty="0" err="1"/>
+              <a:t>mreze</a:t>
+            </a:r>
+            <a:r>
+              <a:rPr dirty="0"/>
+              <a:t>. </a:t>
+            </a:r>
+            <a:r>
+              <a:rPr dirty="0" err="1"/>
+              <a:t>Svaka</a:t>
+            </a:r>
+            <a:r>
+              <a:rPr dirty="0"/>
+              <a:t> </a:t>
+            </a:r>
+            <a:r>
+              <a:rPr dirty="0" err="1"/>
+              <a:t>iteracija</a:t>
+            </a:r>
+            <a:r>
+              <a:rPr dirty="0"/>
+              <a:t>: </a:t>
+            </a:r>
+            <a:r>
+              <a:rPr dirty="0" err="1"/>
+              <a:t>procita</a:t>
+            </a:r>
+            <a:r>
+              <a:rPr dirty="0"/>
+              <a:t> </a:t>
+            </a:r>
+            <a:r>
+              <a:rPr dirty="0" err="1"/>
+              <a:t>stanje</a:t>
+            </a:r>
+            <a:r>
+              <a:rPr dirty="0"/>
+              <a:t> -&gt; Case </a:t>
+            </a:r>
+            <a:r>
+              <a:rPr dirty="0" err="1"/>
+              <a:t>struktura</a:t>
+            </a:r>
+            <a:r>
+              <a:rPr dirty="0"/>
+              <a:t> </a:t>
+            </a:r>
+            <a:r>
+              <a:rPr dirty="0" err="1"/>
+              <a:t>racuna</a:t>
+            </a:r>
+            <a:r>
+              <a:rPr dirty="0"/>
+              <a:t> u </a:t>
+            </a:r>
+            <a:r>
+              <a:rPr dirty="0" err="1"/>
+              <a:t>i</a:t>
+            </a:r>
+            <a:r>
+              <a:rPr dirty="0"/>
+              <a:t> </a:t>
+            </a:r>
+            <a:r>
+              <a:rPr dirty="0" err="1"/>
+              <a:t>predlaze</a:t>
+            </a:r>
+            <a:r>
+              <a:rPr dirty="0"/>
+              <a:t> </a:t>
+            </a:r>
+            <a:r>
+              <a:rPr dirty="0" err="1"/>
+              <a:t>sledece</a:t>
+            </a:r>
+            <a:r>
+              <a:rPr dirty="0"/>
+              <a:t> </a:t>
+            </a:r>
+            <a:r>
+              <a:rPr dirty="0" err="1"/>
+              <a:t>stanje</a:t>
+            </a:r>
+            <a:r>
+              <a:rPr dirty="0"/>
+              <a:t> -&gt; Guard Clause </a:t>
+            </a:r>
+            <a:r>
+              <a:rPr dirty="0" err="1"/>
+              <a:t>presretne</a:t>
+            </a:r>
+            <a:r>
+              <a:rPr dirty="0"/>
+              <a:t> (Stop/</a:t>
+            </a:r>
+            <a:r>
+              <a:rPr dirty="0" err="1"/>
+              <a:t>greska</a:t>
+            </a:r>
+            <a:r>
+              <a:rPr dirty="0"/>
+              <a:t> -&gt; Shutdown) -&gt; </a:t>
+            </a:r>
+            <a:r>
+              <a:rPr dirty="0" err="1"/>
+              <a:t>stanje</a:t>
+            </a:r>
+            <a:r>
+              <a:rPr dirty="0"/>
+              <a:t> se </a:t>
+            </a:r>
+            <a:r>
+              <a:rPr dirty="0" err="1"/>
+              <a:t>upise</a:t>
+            </a:r>
+            <a:r>
+              <a:rPr dirty="0"/>
+              <a:t> u shift-</a:t>
+            </a:r>
+            <a:r>
+              <a:rPr dirty="0" err="1"/>
+              <a:t>registar</a:t>
+            </a:r>
+            <a:r>
+              <a:rPr dirty="0"/>
+              <a:t>. </a:t>
+            </a:r>
+            <a:r>
+              <a:rPr dirty="0" err="1"/>
+              <a:t>Mesto</a:t>
+            </a:r>
+            <a:r>
+              <a:rPr dirty="0"/>
+              <a:t> </a:t>
+            </a:r>
+            <a:r>
+              <a:rPr dirty="0" err="1"/>
+              <a:t>za</a:t>
+            </a:r>
+            <a:r>
+              <a:rPr dirty="0"/>
+              <a:t> </a:t>
+            </a:r>
+            <a:r>
+              <a:rPr dirty="0" err="1"/>
+              <a:t>sliku</a:t>
+            </a:r>
+            <a:r>
+              <a:rPr dirty="0"/>
+              <a:t> block </a:t>
+            </a:r>
+            <a:r>
+              <a:rPr dirty="0" err="1"/>
+              <a:t>dijagrama</a:t>
+            </a:r>
+            <a:r>
+              <a:rPr dirty="0"/>
+              <a:t> (</a:t>
+            </a:r>
+            <a:r>
+              <a:rPr dirty="0" err="1"/>
+              <a:t>Slika</a:t>
+            </a:r>
+            <a:r>
+              <a:rPr dirty="0"/>
+              <a:t> 4).</a:t>
             </a:r>
           </a:p>
         </p:txBody>
@@ -5175,6 +5765,13 @@
   <p:clrMapOvr>
     <a:masterClrMapping/>
   </p:clrMapOvr>
+  <p:timing>
+    <p:tnLst>
+      <p:par>
+        <p:cTn id="1" dur="indefinite" restart="never" nodeType="tmRoot"/>
+      </p:par>
+    </p:tnLst>
+  </p:timing>
 </p:sld>
 </file>
 
@@ -5327,7 +5924,7 @@
                 </a:solidFill>
                 <a:latin typeface="Poppins"/>
               </a:rPr>
-              <a:t>FRONT PANEL · PC_HMI_LIFT.VI</a:t>
+              <a:t>AUTOMAT · IMPLEMENTACIJA</a:t>
             </a:r>
           </a:p>
         </p:txBody>
@@ -5372,7 +5969,7 @@
                 </a:solidFill>
                 <a:latin typeface="Poppins"/>
               </a:rPr>
-              <a:t>Korisnički panel</a:t>
+              <a:t>Kako automat radi</a:t>
             </a:r>
           </a:p>
         </p:txBody>
@@ -5417,538 +6014,354 @@
                 </a:solidFill>
                 <a:latin typeface="Poppins"/>
               </a:rPr>
-              <a:t>09</a:t>
-            </a:r>
-          </a:p>
-        </p:txBody>
-      </p:sp>
-      <p:sp>
-        <p:nvSpPr>
-          <p:cNvPr id="7" name="TextBox 6"/>
-          <p:cNvSpPr txBox="1"/>
-          <p:nvPr/>
-        </p:nvSpPr>
-        <p:spPr>
-          <a:xfrm>
-            <a:off x="749808" y="1417320"/>
-            <a:ext cx="4114800" cy="3200400"/>
+              <a:t>08</a:t>
+            </a:r>
+          </a:p>
+        </p:txBody>
+      </p:sp>
+      <p:sp>
+        <p:nvSpPr>
+          <p:cNvPr id="13" name="AutoShape 2" descr="blob:https://web.whatsapp.com/b1d9635d-070f-480c-bdce-554c2893f55d"/>
+          <p:cNvSpPr>
+            <a:spLocks noChangeAspect="1" noChangeArrowheads="1"/>
+          </p:cNvSpPr>
+          <p:nvPr/>
+        </p:nvSpPr>
+        <p:spPr bwMode="auto">
+          <a:xfrm>
+            <a:off x="155575" y="-144463"/>
+            <a:ext cx="304800" cy="304801"/>
           </a:xfrm>
           <a:prstGeom prst="rect">
             <a:avLst/>
           </a:prstGeom>
           <a:noFill/>
-        </p:spPr>
-        <p:txBody>
-          <a:bodyPr wrap="square" lIns="0" tIns="0" rIns="0" bIns="0">
-            <a:spAutoFit/>
+          <a:extLst>
+            <a:ext uri="{909E8E84-426E-40DD-AFC4-6F175D3DCCD1}">
+              <a14:hiddenFill xmlns:a14="http://schemas.microsoft.com/office/drawing/2010/main">
+                <a:solidFill>
+                  <a:srgbClr val="FFFFFF"/>
+                </a:solidFill>
+              </a14:hiddenFill>
+            </a:ext>
+          </a:extLst>
+        </p:spPr>
+        <p:txBody>
+          <a:bodyPr vert="horz" wrap="square" lIns="91440" tIns="45720" rIns="91440" bIns="45720" numCol="1" anchor="t" anchorCtr="0" compatLnSpc="1">
+            <a:prstTxWarp prst="textNoShape">
+              <a:avLst/>
+            </a:prstTxWarp>
           </a:bodyPr>
           <a:lstStyle/>
           <a:p>
-            <a:pPr>
-              <a:lnSpc>
-                <a:spcPct val="105000"/>
-              </a:lnSpc>
-              <a:spcBef>
-                <a:spcPts val="0"/>
-              </a:spcBef>
-              <a:spcAft>
-                <a:spcPts val="800"/>
-              </a:spcAft>
-            </a:pPr>
-            <a:r>
-              <a:rPr sz="1050" b="1" i="0">
-                <a:solidFill>
-                  <a:srgbClr val="0E7C86"/>
-                </a:solidFill>
-                <a:latin typeface="Calibri"/>
-              </a:rPr>
-              <a:t>•  </a:t>
-            </a:r>
-            <a:r>
-              <a:rPr sz="1050" b="1" i="0">
-                <a:solidFill>
-                  <a:srgbClr val="17223B"/>
-                </a:solidFill>
-                <a:latin typeface="Calibri"/>
-              </a:rPr>
-              <a:t>6 dugmadi za izbor sprata </a:t>
-            </a:r>
-            <a:r>
-              <a:rPr sz="1050" b="0" i="0">
-                <a:solidFill>
-                  <a:srgbClr val="3A4763"/>
-                </a:solidFill>
-                <a:latin typeface="Calibri"/>
-              </a:rPr>
-              <a:t>iznutra (0-5) i 10 spoljašnjih poziva (gore/dole po spratu).</a:t>
-            </a:r>
-          </a:p>
-          <a:p>
-            <a:pPr>
-              <a:lnSpc>
-                <a:spcPct val="105000"/>
-              </a:lnSpc>
-              <a:spcBef>
-                <a:spcPts val="0"/>
-              </a:spcBef>
-              <a:spcAft>
-                <a:spcPts val="800"/>
-              </a:spcAft>
-            </a:pPr>
-            <a:r>
-              <a:rPr sz="1050" b="1" i="0">
-                <a:solidFill>
-                  <a:srgbClr val="0E7C86"/>
-                </a:solidFill>
-                <a:latin typeface="Calibri"/>
-              </a:rPr>
-              <a:t>•  </a:t>
-            </a:r>
-            <a:r>
-              <a:rPr sz="1050" b="1" i="0">
-                <a:solidFill>
-                  <a:srgbClr val="17223B"/>
-                </a:solidFill>
-                <a:latin typeface="Calibri"/>
-              </a:rPr>
-              <a:t>Unutrašnja dugmad su aktivna </a:t>
-            </a:r>
-            <a:r>
-              <a:rPr sz="1050" b="0" i="0">
-                <a:solidFill>
-                  <a:srgbClr val="3A4763"/>
-                </a:solidFill>
-                <a:latin typeface="Calibri"/>
-              </a:rPr>
-              <a:t>tek nakon poziva spolja, i samo u smeru tog poziva: sprečene su besmislene kombinacije.</a:t>
-            </a:r>
-          </a:p>
-          <a:p>
-            <a:pPr>
-              <a:lnSpc>
-                <a:spcPct val="105000"/>
-              </a:lnSpc>
-              <a:spcBef>
-                <a:spcPts val="0"/>
-              </a:spcBef>
-              <a:spcAft>
-                <a:spcPts val="800"/>
-              </a:spcAft>
-            </a:pPr>
-            <a:r>
-              <a:rPr sz="1050" b="1" i="0">
-                <a:solidFill>
-                  <a:srgbClr val="0E7C86"/>
-                </a:solidFill>
-                <a:latin typeface="Calibri"/>
-              </a:rPr>
-              <a:t>•  </a:t>
-            </a:r>
-            <a:r>
-              <a:rPr sz="1050" b="1" i="0">
-                <a:solidFill>
-                  <a:srgbClr val="17223B"/>
-                </a:solidFill>
-                <a:latin typeface="Calibri"/>
-              </a:rPr>
-              <a:t>Glavni grafik prikazuje </a:t>
-            </a:r>
-            <a:r>
-              <a:rPr sz="1050" b="0" i="0">
-                <a:solidFill>
-                  <a:srgbClr val="3A4763"/>
-                </a:solidFill>
-                <a:latin typeface="Calibri"/>
-              </a:rPr>
-              <a:t>tačnu, neprekidnu poziciju lifta (Meter).</a:t>
-            </a:r>
-          </a:p>
-          <a:p>
-            <a:pPr>
-              <a:lnSpc>
-                <a:spcPct val="105000"/>
-              </a:lnSpc>
-              <a:spcBef>
-                <a:spcPts val="0"/>
-              </a:spcBef>
-              <a:spcAft>
-                <a:spcPts val="800"/>
-              </a:spcAft>
-            </a:pPr>
-            <a:r>
-              <a:rPr sz="1050" b="1" i="0">
-                <a:solidFill>
-                  <a:srgbClr val="0E7C86"/>
-                </a:solidFill>
-                <a:latin typeface="Calibri"/>
-              </a:rPr>
-              <a:t>•  </a:t>
-            </a:r>
-            <a:r>
-              <a:rPr sz="1050" b="1" i="0">
-                <a:solidFill>
-                  <a:srgbClr val="17223B"/>
-                </a:solidFill>
-                <a:latin typeface="Calibri"/>
-              </a:rPr>
-              <a:t>Kretanje kroz spratove prati i </a:t>
-            </a:r>
-            <a:r>
-              <a:rPr sz="1050" b="0" i="0">
-                <a:solidFill>
-                  <a:srgbClr val="3A4763"/>
-                </a:solidFill>
-                <a:latin typeface="Calibri"/>
-              </a:rPr>
-              <a:t>vizuelni indikator vezan za zaokruženu poziciju.</a:t>
-            </a:r>
-          </a:p>
-          <a:p>
-            <a:pPr>
-              <a:lnSpc>
-                <a:spcPct val="105000"/>
-              </a:lnSpc>
-              <a:spcBef>
-                <a:spcPts val="0"/>
-              </a:spcBef>
-              <a:spcAft>
-                <a:spcPts val="800"/>
-              </a:spcAft>
-            </a:pPr>
-            <a:r>
-              <a:rPr sz="1050" b="1" i="0">
-                <a:solidFill>
-                  <a:srgbClr val="0E7C86"/>
-                </a:solidFill>
-                <a:latin typeface="Calibri"/>
-              </a:rPr>
-              <a:t>•  </a:t>
-            </a:r>
-            <a:r>
-              <a:rPr sz="1050" b="1" i="0">
-                <a:solidFill>
-                  <a:srgbClr val="17223B"/>
-                </a:solidFill>
-                <a:latin typeface="Calibri"/>
-              </a:rPr>
-              <a:t>Četiri LED indikatora (Idle, Moving, DoorOpen, Shutdown): </a:t>
-            </a:r>
-            <a:r>
-              <a:rPr sz="1050" b="0" i="0">
-                <a:solidFill>
-                  <a:srgbClr val="3A4763"/>
-                </a:solidFill>
-                <a:latin typeface="Calibri"/>
-              </a:rPr>
-              <a:t>u svakom trenutku svetli tačno jedan.</a:t>
-            </a:r>
-          </a:p>
-        </p:txBody>
-      </p:sp>
-      <p:sp>
-        <p:nvSpPr>
-          <p:cNvPr id="8" name="Rounded Rectangle 7"/>
-          <p:cNvSpPr/>
-          <p:nvPr/>
-        </p:nvSpPr>
-        <p:spPr>
-          <a:xfrm>
-            <a:off x="5074920" y="1417320"/>
-            <a:ext cx="3337560" cy="3108960"/>
-          </a:xfrm>
-          <a:prstGeom prst="roundRect">
-            <a:avLst>
-              <a:gd name="adj" fmla="val 4000"/>
-            </a:avLst>
-          </a:prstGeom>
-          <a:solidFill>
-            <a:srgbClr val="F4F6F8"/>
-          </a:solidFill>
-          <a:ln w="16510">
+            <a:endParaRPr lang="en-US"/>
+          </a:p>
+        </p:txBody>
+      </p:sp>
+      <p:grpSp>
+        <p:nvGrpSpPr>
+          <p:cNvPr id="9" name="Group 8"/>
+          <p:cNvGrpSpPr/>
+          <p:nvPr/>
+        </p:nvGrpSpPr>
+        <p:grpSpPr>
+          <a:xfrm>
+            <a:off x="413720" y="1086826"/>
+            <a:ext cx="8245086" cy="3914381"/>
+            <a:chOff x="460375" y="1152144"/>
+            <a:chExt cx="7952105" cy="3634460"/>
+          </a:xfrm>
+        </p:grpSpPr>
+        <p:sp>
+          <p:nvSpPr>
+            <p:cNvPr id="8" name="Rounded Rectangle 7"/>
+            <p:cNvSpPr/>
+            <p:nvPr/>
+          </p:nvSpPr>
+          <p:spPr>
+            <a:xfrm>
+              <a:off x="460375" y="1152144"/>
+              <a:ext cx="7952105" cy="3634460"/>
+            </a:xfrm>
+            <a:prstGeom prst="roundRect">
+              <a:avLst>
+                <a:gd name="adj" fmla="val 4000"/>
+              </a:avLst>
+            </a:prstGeom>
             <a:solidFill>
-              <a:srgbClr val="D9DFE5"/>
+              <a:srgbClr val="F4F6F8"/>
             </a:solidFill>
-          </a:ln>
-          <a:effectLst/>
-        </p:spPr>
-        <p:style>
-          <a:lnRef idx="1">
-            <a:schemeClr val="accent1"/>
-          </a:lnRef>
-          <a:fillRef idx="3">
-            <a:schemeClr val="accent1"/>
-          </a:fillRef>
-          <a:effectRef idx="2">
-            <a:schemeClr val="accent1"/>
-          </a:effectRef>
-          <a:fontRef idx="minor">
-            <a:schemeClr val="lt1"/>
-          </a:fontRef>
-        </p:style>
-        <p:txBody>
-          <a:bodyPr rtlCol="0" anchor="ctr"/>
-          <a:lstStyle/>
-          <a:p>
-            <a:pPr algn="ctr"/>
-            <a:endParaRPr/>
-          </a:p>
-        </p:txBody>
-      </p:sp>
-      <p:sp>
-        <p:nvSpPr>
-          <p:cNvPr id="9" name="Rounded Rectangle 8"/>
-          <p:cNvSpPr/>
-          <p:nvPr/>
-        </p:nvSpPr>
-        <p:spPr>
-          <a:xfrm>
-            <a:off x="6240780" y="2039112"/>
-            <a:ext cx="1005840" cy="749808"/>
-          </a:xfrm>
-          <a:prstGeom prst="roundRect">
-            <a:avLst>
-              <a:gd name="adj" fmla="val 8000"/>
-            </a:avLst>
-          </a:prstGeom>
-          <a:solidFill>
-            <a:srgbClr val="DCE3EA"/>
-          </a:solidFill>
-          <a:ln w="15240">
-            <a:solidFill>
-              <a:srgbClr val="6C7688"/>
-            </a:solidFill>
-          </a:ln>
-          <a:effectLst/>
-        </p:spPr>
-        <p:style>
-          <a:lnRef idx="1">
-            <a:schemeClr val="accent1"/>
-          </a:lnRef>
-          <a:fillRef idx="3">
-            <a:schemeClr val="accent1"/>
-          </a:fillRef>
-          <a:effectRef idx="2">
-            <a:schemeClr val="accent1"/>
-          </a:effectRef>
-          <a:fontRef idx="minor">
-            <a:schemeClr val="lt1"/>
-          </a:fontRef>
-        </p:style>
-        <p:txBody>
-          <a:bodyPr rtlCol="0" anchor="ctr"/>
-          <a:lstStyle/>
-          <a:p>
-            <a:pPr algn="ctr"/>
-            <a:endParaRPr/>
-          </a:p>
-        </p:txBody>
-      </p:sp>
-      <p:sp>
-        <p:nvSpPr>
-          <p:cNvPr id="10" name="Oval 9"/>
-          <p:cNvSpPr/>
-          <p:nvPr/>
-        </p:nvSpPr>
-        <p:spPr>
-          <a:xfrm>
-            <a:off x="6496812" y="2185416"/>
-            <a:ext cx="201168" cy="201168"/>
-          </a:xfrm>
-          <a:prstGeom prst="ellipse">
-            <a:avLst/>
-          </a:prstGeom>
-          <a:solidFill>
-            <a:srgbClr val="D9832F"/>
-          </a:solidFill>
-          <a:ln>
+            <a:ln w="16510">
+              <a:solidFill>
+                <a:srgbClr val="D9DFE5"/>
+              </a:solidFill>
+            </a:ln>
+            <a:effectLst/>
+          </p:spPr>
+          <p:style>
+            <a:lnRef idx="1">
+              <a:schemeClr val="accent1"/>
+            </a:lnRef>
+            <a:fillRef idx="3">
+              <a:schemeClr val="accent1"/>
+            </a:fillRef>
+            <a:effectRef idx="2">
+              <a:schemeClr val="accent1"/>
+            </a:effectRef>
+            <a:fontRef idx="minor">
+              <a:schemeClr val="lt1"/>
+            </a:fontRef>
+          </p:style>
+          <p:txBody>
+            <a:bodyPr rtlCol="0" anchor="ctr"/>
+            <a:lstStyle/>
+            <a:p>
+              <a:pPr algn="ctr"/>
+              <a:endParaRPr/>
+            </a:p>
+          </p:txBody>
+        </p:sp>
+        <p:sp>
+          <p:nvSpPr>
+            <p:cNvPr id="12" name="TextBox 11"/>
+            <p:cNvSpPr txBox="1"/>
+            <p:nvPr/>
+          </p:nvSpPr>
+          <p:spPr>
+            <a:xfrm>
+              <a:off x="1118730" y="4535408"/>
+              <a:ext cx="6913984" cy="146194"/>
+            </a:xfrm>
+            <a:prstGeom prst="rect">
+              <a:avLst/>
+            </a:prstGeom>
             <a:noFill/>
-          </a:ln>
-          <a:effectLst/>
-        </p:spPr>
-        <p:style>
-          <a:lnRef idx="1">
-            <a:schemeClr val="accent1"/>
-          </a:lnRef>
-          <a:fillRef idx="3">
-            <a:schemeClr val="accent1"/>
-          </a:fillRef>
-          <a:effectRef idx="2">
-            <a:schemeClr val="accent1"/>
-          </a:effectRef>
-          <a:fontRef idx="minor">
-            <a:schemeClr val="lt1"/>
-          </a:fontRef>
-        </p:style>
-        <p:txBody>
-          <a:bodyPr rtlCol="0" anchor="ctr"/>
-          <a:lstStyle/>
-          <a:p>
-            <a:pPr algn="ctr"/>
-            <a:endParaRPr/>
-          </a:p>
-        </p:txBody>
-      </p:sp>
-      <p:sp>
-        <p:nvSpPr>
-          <p:cNvPr id="11" name="Isosceles Triangle 10"/>
-          <p:cNvSpPr/>
-          <p:nvPr/>
-        </p:nvSpPr>
-        <p:spPr>
-          <a:xfrm>
-            <a:off x="6579108" y="2368296"/>
-            <a:ext cx="640080" cy="365760"/>
-          </a:xfrm>
-          <a:prstGeom prst="triangle">
-            <a:avLst/>
-          </a:prstGeom>
-          <a:solidFill>
-            <a:srgbClr val="0E7C86"/>
-          </a:solidFill>
-          <a:ln>
+          </p:spPr>
+          <p:txBody>
+            <a:bodyPr wrap="square" lIns="0" tIns="0" rIns="0" bIns="0" anchor="t">
+              <a:spAutoFit/>
+            </a:bodyPr>
+            <a:lstStyle/>
+            <a:p>
+              <a:pPr algn="ctr">
+                <a:lnSpc>
+                  <a:spcPct val="100000"/>
+                </a:lnSpc>
+                <a:spcBef>
+                  <a:spcPts val="0"/>
+                </a:spcBef>
+                <a:spcAft>
+                  <a:spcPts val="200"/>
+                </a:spcAft>
+              </a:pPr>
+              <a:r>
+                <a:rPr sz="950" b="0" i="0" dirty="0" err="1" smtClean="0">
+                  <a:solidFill>
+                    <a:srgbClr val="6C7688"/>
+                  </a:solidFill>
+                  <a:latin typeface="Calibri"/>
+                </a:rPr>
+                <a:t>Glavna</a:t>
+              </a:r>
+              <a:r>
+                <a:rPr sz="950" b="0" i="0" dirty="0" smtClean="0">
+                  <a:solidFill>
+                    <a:srgbClr val="6C7688"/>
+                  </a:solidFill>
+                  <a:latin typeface="Calibri"/>
+                </a:rPr>
+                <a:t> </a:t>
+              </a:r>
+              <a:r>
+                <a:rPr sz="950" b="0" i="0" dirty="0">
+                  <a:solidFill>
+                    <a:srgbClr val="6C7688"/>
+                  </a:solidFill>
+                  <a:latin typeface="Calibri"/>
+                </a:rPr>
+                <a:t>Case </a:t>
+              </a:r>
+              <a:r>
+                <a:rPr sz="950" b="0" i="0" dirty="0" err="1">
+                  <a:solidFill>
+                    <a:srgbClr val="6C7688"/>
+                  </a:solidFill>
+                  <a:latin typeface="Calibri"/>
+                </a:rPr>
+                <a:t>struktura</a:t>
+              </a:r>
+              <a:r>
+                <a:rPr sz="950" b="0" i="0" dirty="0">
+                  <a:solidFill>
+                    <a:srgbClr val="6C7688"/>
+                  </a:solidFill>
+                  <a:latin typeface="Calibri"/>
+                </a:rPr>
+                <a:t> (</a:t>
+              </a:r>
+              <a:r>
+                <a:rPr sz="950" b="0" i="0" dirty="0" smtClean="0">
+                  <a:solidFill>
+                    <a:srgbClr val="6C7688"/>
+                  </a:solidFill>
+                  <a:latin typeface="Calibri"/>
+                </a:rPr>
+                <a:t>Moving)</a:t>
+              </a:r>
+              <a:r>
+                <a:rPr lang="sr-Latn-RS" sz="950" b="0" i="0" dirty="0" smtClean="0">
+                  <a:solidFill>
+                    <a:srgbClr val="6C7688"/>
+                  </a:solidFill>
+                  <a:latin typeface="Calibri"/>
+                </a:rPr>
+                <a:t> </a:t>
+              </a:r>
+              <a:r>
+                <a:rPr sz="950" b="0" i="0" dirty="0" err="1" smtClean="0">
+                  <a:solidFill>
+                    <a:srgbClr val="6C7688"/>
+                  </a:solidFill>
+                  <a:latin typeface="Calibri"/>
+                </a:rPr>
+                <a:t>i</a:t>
+              </a:r>
+              <a:r>
+                <a:rPr sz="950" b="0" i="0" dirty="0" smtClean="0">
+                  <a:solidFill>
+                    <a:srgbClr val="6C7688"/>
+                  </a:solidFill>
+                  <a:latin typeface="Calibri"/>
+                </a:rPr>
+                <a:t> </a:t>
+              </a:r>
+              <a:r>
+                <a:rPr sz="950" b="0" i="0" dirty="0">
+                  <a:solidFill>
+                    <a:srgbClr val="6C7688"/>
+                  </a:solidFill>
+                  <a:latin typeface="Calibri"/>
+                </a:rPr>
+                <a:t>Guard Clause </a:t>
+              </a:r>
+              <a:r>
+                <a:rPr sz="950" b="0" i="0" dirty="0" smtClean="0">
+                  <a:solidFill>
+                    <a:srgbClr val="6C7688"/>
+                  </a:solidFill>
+                  <a:latin typeface="Calibri"/>
+                </a:rPr>
+                <a:t>u</a:t>
+              </a:r>
+              <a:r>
+                <a:rPr lang="sr-Latn-RS" sz="950" b="0" i="0" dirty="0" smtClean="0">
+                  <a:solidFill>
+                    <a:srgbClr val="6C7688"/>
+                  </a:solidFill>
+                  <a:latin typeface="Calibri"/>
+                </a:rPr>
+                <a:t> </a:t>
+              </a:r>
+              <a:r>
+                <a:rPr sz="950" b="0" i="0" dirty="0" smtClean="0">
+                  <a:solidFill>
+                    <a:srgbClr val="6C7688"/>
+                  </a:solidFill>
+                  <a:latin typeface="Calibri"/>
+                </a:rPr>
+                <a:t>Automat_Lift_sbRIO.vi</a:t>
+              </a:r>
+              <a:endParaRPr sz="950" b="0" i="0" dirty="0">
+                <a:solidFill>
+                  <a:srgbClr val="6C7688"/>
+                </a:solidFill>
+                <a:latin typeface="Calibri"/>
+              </a:endParaRPr>
+            </a:p>
+          </p:txBody>
+        </p:sp>
+        <p:pic>
+          <p:nvPicPr>
+            <p:cNvPr id="1027" name="Picture 3"/>
+            <p:cNvPicPr>
+              <a:picLocks noChangeAspect="1" noChangeArrowheads="1"/>
+            </p:cNvPicPr>
+            <p:nvPr/>
+          </p:nvPicPr>
+          <p:blipFill>
+            <a:blip r:embed="rId3">
+              <a:extLst>
+                <a:ext uri="{28A0092B-C50C-407E-A947-70E740481C1C}">
+                  <a14:useLocalDpi xmlns:a14="http://schemas.microsoft.com/office/drawing/2010/main" val="0"/>
+                </a:ext>
+              </a:extLst>
+            </a:blip>
+            <a:srcRect/>
+            <a:stretch>
+              <a:fillRect/>
+            </a:stretch>
+          </p:blipFill>
+          <p:spPr bwMode="auto">
+            <a:xfrm>
+              <a:off x="684491" y="1306286"/>
+              <a:ext cx="7525511" cy="3100842"/>
+            </a:xfrm>
+            <a:prstGeom prst="rect">
+              <a:avLst/>
+            </a:prstGeom>
             <a:noFill/>
-          </a:ln>
-          <a:effectLst/>
-        </p:spPr>
-        <p:style>
-          <a:lnRef idx="1">
-            <a:schemeClr val="accent1"/>
-          </a:lnRef>
-          <a:fillRef idx="3">
-            <a:schemeClr val="accent1"/>
-          </a:fillRef>
-          <a:effectRef idx="2">
-            <a:schemeClr val="accent1"/>
-          </a:effectRef>
-          <a:fontRef idx="minor">
-            <a:schemeClr val="lt1"/>
-          </a:fontRef>
-        </p:style>
-        <p:txBody>
-          <a:bodyPr rtlCol="0" anchor="ctr"/>
-          <a:lstStyle/>
-          <a:p>
-            <a:pPr algn="ctr"/>
-            <a:endParaRPr/>
-          </a:p>
-        </p:txBody>
-      </p:sp>
-      <p:sp>
-        <p:nvSpPr>
-          <p:cNvPr id="12" name="TextBox 11"/>
-          <p:cNvSpPr txBox="1"/>
-          <p:nvPr/>
-        </p:nvSpPr>
-        <p:spPr>
-          <a:xfrm>
-            <a:off x="5257800" y="3282696"/>
-            <a:ext cx="2971800" cy="1181404"/>
-          </a:xfrm>
-          <a:prstGeom prst="rect">
-            <a:avLst/>
-          </a:prstGeom>
-          <a:noFill/>
-        </p:spPr>
-        <p:txBody>
-          <a:bodyPr wrap="square" lIns="0" tIns="0" rIns="0" bIns="0" anchor="t">
-            <a:spAutoFit/>
-          </a:bodyPr>
-          <a:lstStyle/>
-          <a:p>
-            <a:pPr algn="ctr">
-              <a:lnSpc>
-                <a:spcPct val="100000"/>
-              </a:lnSpc>
-              <a:spcBef>
-                <a:spcPts val="0"/>
-              </a:spcBef>
-              <a:spcAft>
-                <a:spcPts val="200"/>
-              </a:spcAft>
-            </a:pPr>
-            <a:r>
-              <a:rPr sz="1200" b="1" i="0">
-                <a:solidFill>
-                  <a:srgbClr val="17223B"/>
-                </a:solidFill>
-                <a:latin typeface="Poppins"/>
-              </a:rPr>
-              <a:t>Ovde ubaci: Slika 1</a:t>
-            </a:r>
-          </a:p>
-          <a:p>
-            <a:pPr algn="ctr">
-              <a:lnSpc>
-                <a:spcPct val="100000"/>
-              </a:lnSpc>
-              <a:spcBef>
-                <a:spcPts val="0"/>
-              </a:spcBef>
-              <a:spcAft>
-                <a:spcPts val="200"/>
-              </a:spcAft>
-            </a:pPr>
-            <a:r>
-              <a:rPr sz="950" b="0" i="0">
-                <a:solidFill>
-                  <a:srgbClr val="6C7688"/>
-                </a:solidFill>
-                <a:latin typeface="Calibri"/>
-              </a:rPr>
-              <a:t>Front panel PC_HMI_Lift.vi:</a:t>
-            </a:r>
-          </a:p>
-          <a:p>
-            <a:pPr algn="ctr">
-              <a:lnSpc>
-                <a:spcPct val="100000"/>
-              </a:lnSpc>
-              <a:spcBef>
-                <a:spcPts val="0"/>
-              </a:spcBef>
-              <a:spcAft>
-                <a:spcPts val="200"/>
-              </a:spcAft>
-            </a:pPr>
-            <a:r>
-              <a:rPr sz="950" b="0" i="0">
-                <a:solidFill>
-                  <a:srgbClr val="6C7688"/>
-                </a:solidFill>
-                <a:latin typeface="Calibri"/>
-              </a:rPr>
-              <a:t>dugmad, grafik pozicije</a:t>
-            </a:r>
-          </a:p>
-          <a:p>
-            <a:pPr algn="ctr">
-              <a:lnSpc>
-                <a:spcPct val="100000"/>
-              </a:lnSpc>
-              <a:spcBef>
-                <a:spcPts val="0"/>
-              </a:spcBef>
-              <a:spcAft>
-                <a:spcPts val="200"/>
-              </a:spcAft>
-            </a:pPr>
-            <a:r>
-              <a:rPr sz="950" b="0" i="0">
-                <a:solidFill>
-                  <a:srgbClr val="6C7688"/>
-                </a:solidFill>
-                <a:latin typeface="Calibri"/>
-              </a:rPr>
-              <a:t>i LED indikatori stanja</a:t>
-            </a:r>
-          </a:p>
-        </p:txBody>
-      </p:sp>
+            <a:ln>
+              <a:noFill/>
+            </a:ln>
+            <a:effectLst/>
+            <a:extLst>
+              <a:ext uri="{909E8E84-426E-40DD-AFC4-6F175D3DCCD1}">
+                <a14:hiddenFill xmlns:a14="http://schemas.microsoft.com/office/drawing/2010/main">
+                  <a:solidFill>
+                    <a:schemeClr val="accent1"/>
+                  </a:solidFill>
+                </a14:hiddenFill>
+              </a:ext>
+              <a:ext uri="{91240B29-F687-4F45-9708-019B960494DF}">
+                <a14:hiddenLine xmlns:a14="http://schemas.microsoft.com/office/drawing/2010/main" w="9525">
+                  <a:solidFill>
+                    <a:schemeClr val="tx1"/>
+                  </a:solidFill>
+                  <a:miter lim="800000"/>
+                  <a:headEnd/>
+                  <a:tailEnd/>
+                </a14:hiddenLine>
+              </a:ext>
+              <a:ext uri="{AF507438-7753-43E0-B8FC-AC1667EBCBE1}">
+                <a14:hiddenEffects xmlns:a14="http://schemas.microsoft.com/office/drawing/2010/main">
+                  <a:effectLst>
+                    <a:outerShdw dist="35921" dir="2700000" algn="ctr" rotWithShape="0">
+                      <a:schemeClr val="bg2"/>
+                    </a:outerShdw>
+                  </a:effectLst>
+                </a14:hiddenEffects>
+              </a:ext>
+            </a:extLst>
+          </p:spPr>
+        </p:pic>
+      </p:grpSp>
     </p:spTree>
+    <p:extLst>
+      <p:ext uri="{BB962C8B-B14F-4D97-AF65-F5344CB8AC3E}">
+        <p14:creationId xmlns:p14="http://schemas.microsoft.com/office/powerpoint/2010/main" val="4243526050"/>
+      </p:ext>
+    </p:extLst>
   </p:cSld>
   <p:clrMapOvr>
     <a:masterClrMapping/>
   </p:clrMapOvr>
+  <p:timing>
+    <p:tnLst>
+      <p:par>
+        <p:cTn id="1" dur="indefinite" restart="never" nodeType="tmRoot"/>
+      </p:par>
+    </p:tnLst>
+  </p:timing>
 </p:sld>
 </file>
 
@@ -6101,7 +6514,7 @@
                 </a:solidFill>
                 <a:latin typeface="Poppins"/>
               </a:rPr>
-              <a:t>KORISNIČKI PANEL · IMPLEMENTACIJA</a:t>
+              <a:t>FRONT PANEL · PC_HMI_LIFT.VI</a:t>
             </a:r>
           </a:p>
         </p:txBody>
@@ -6146,7 +6559,7 @@
                 </a:solidFill>
                 <a:latin typeface="Poppins"/>
               </a:rPr>
-              <a:t>Kako panel radi</a:t>
+              <a:t>Korisnički panel</a:t>
             </a:r>
           </a:p>
         </p:txBody>
@@ -6191,7 +6604,7 @@
                 </a:solidFill>
                 <a:latin typeface="Poppins"/>
               </a:rPr>
-              <a:t>10</a:t>
+              <a:t>09</a:t>
             </a:r>
           </a:p>
         </p:txBody>
@@ -6220,17 +6633,17 @@
           <a:p>
             <a:pPr>
               <a:lnSpc>
-                <a:spcPct val="106000"/>
+                <a:spcPct val="105000"/>
               </a:lnSpc>
               <a:spcBef>
                 <a:spcPts val="0"/>
               </a:spcBef>
               <a:spcAft>
-                <a:spcPts val="1000"/>
+                <a:spcPts val="800"/>
               </a:spcAft>
             </a:pPr>
             <a:r>
-              <a:rPr sz="1100" b="1" i="0">
+              <a:rPr sz="1050" b="1" i="0" dirty="0">
                 <a:solidFill>
                   <a:srgbClr val="0E7C86"/>
                 </a:solidFill>
@@ -6239,38 +6652,209 @@
               <a:t>•  </a:t>
             </a:r>
             <a:r>
-              <a:rPr sz="1100" b="1" i="0">
+              <a:rPr sz="1050" b="1" i="0" dirty="0">
                 <a:solidFill>
                   <a:srgbClr val="17223B"/>
                 </a:solidFill>
                 <a:latin typeface="Calibri"/>
               </a:rPr>
-              <a:t>Panel čine </a:t>
-            </a:r>
-            <a:r>
-              <a:rPr sz="1100" b="0" i="0">
-                <a:solidFill>
-                  <a:srgbClr val="3A4763"/>
-                </a:solidFill>
-                <a:latin typeface="Calibri"/>
-              </a:rPr>
-              <a:t>dve nezavisne petlje koje rade paralelno.</a:t>
+              <a:t>6 </a:t>
+            </a:r>
+            <a:r>
+              <a:rPr sz="1050" b="1" i="0" dirty="0" err="1">
+                <a:solidFill>
+                  <a:srgbClr val="17223B"/>
+                </a:solidFill>
+                <a:latin typeface="Calibri"/>
+              </a:rPr>
+              <a:t>dugmadi</a:t>
+            </a:r>
+            <a:r>
+              <a:rPr sz="1050" b="1" i="0" dirty="0">
+                <a:solidFill>
+                  <a:srgbClr val="17223B"/>
+                </a:solidFill>
+                <a:latin typeface="Calibri"/>
+              </a:rPr>
+              <a:t> </a:t>
+            </a:r>
+            <a:r>
+              <a:rPr sz="1050" b="1" i="0" dirty="0" err="1">
+                <a:solidFill>
+                  <a:srgbClr val="17223B"/>
+                </a:solidFill>
+                <a:latin typeface="Calibri"/>
+              </a:rPr>
+              <a:t>za</a:t>
+            </a:r>
+            <a:r>
+              <a:rPr sz="1050" b="1" i="0" dirty="0">
+                <a:solidFill>
+                  <a:srgbClr val="17223B"/>
+                </a:solidFill>
+                <a:latin typeface="Calibri"/>
+              </a:rPr>
+              <a:t> </a:t>
+            </a:r>
+            <a:r>
+              <a:rPr sz="1050" b="1" i="0" dirty="0" err="1">
+                <a:solidFill>
+                  <a:srgbClr val="17223B"/>
+                </a:solidFill>
+                <a:latin typeface="Calibri"/>
+              </a:rPr>
+              <a:t>izbor</a:t>
+            </a:r>
+            <a:r>
+              <a:rPr sz="1050" b="1" i="0" dirty="0">
+                <a:solidFill>
+                  <a:srgbClr val="17223B"/>
+                </a:solidFill>
+                <a:latin typeface="Calibri"/>
+              </a:rPr>
+              <a:t> </a:t>
+            </a:r>
+            <a:r>
+              <a:rPr sz="1050" b="1" i="0" dirty="0" err="1">
+                <a:solidFill>
+                  <a:srgbClr val="17223B"/>
+                </a:solidFill>
+                <a:latin typeface="Calibri"/>
+              </a:rPr>
+              <a:t>sprata</a:t>
+            </a:r>
+            <a:r>
+              <a:rPr sz="1050" b="1" i="0" dirty="0">
+                <a:solidFill>
+                  <a:srgbClr val="17223B"/>
+                </a:solidFill>
+                <a:latin typeface="Calibri"/>
+              </a:rPr>
+              <a:t> </a:t>
+            </a:r>
+            <a:r>
+              <a:rPr sz="1050" b="0" i="0" dirty="0" err="1">
+                <a:solidFill>
+                  <a:srgbClr val="3A4763"/>
+                </a:solidFill>
+                <a:latin typeface="Calibri"/>
+              </a:rPr>
+              <a:t>iznutra</a:t>
+            </a:r>
+            <a:r>
+              <a:rPr sz="1050" b="0" i="0" dirty="0">
+                <a:solidFill>
+                  <a:srgbClr val="3A4763"/>
+                </a:solidFill>
+                <a:latin typeface="Calibri"/>
+              </a:rPr>
+              <a:t> (0-5) </a:t>
+            </a:r>
+            <a:r>
+              <a:rPr sz="1050" b="0" i="0" dirty="0" err="1">
+                <a:solidFill>
+                  <a:srgbClr val="3A4763"/>
+                </a:solidFill>
+                <a:latin typeface="Calibri"/>
+              </a:rPr>
+              <a:t>i</a:t>
+            </a:r>
+            <a:r>
+              <a:rPr sz="1050" b="0" i="0" dirty="0">
+                <a:solidFill>
+                  <a:srgbClr val="3A4763"/>
+                </a:solidFill>
+                <a:latin typeface="Calibri"/>
+              </a:rPr>
+              <a:t> 10 </a:t>
+            </a:r>
+            <a:r>
+              <a:rPr sz="1050" b="0" i="0" dirty="0" err="1">
+                <a:solidFill>
+                  <a:srgbClr val="3A4763"/>
+                </a:solidFill>
+                <a:latin typeface="Calibri"/>
+              </a:rPr>
+              <a:t>spoljašnjih</a:t>
+            </a:r>
+            <a:r>
+              <a:rPr sz="1050" b="0" i="0" dirty="0">
+                <a:solidFill>
+                  <a:srgbClr val="3A4763"/>
+                </a:solidFill>
+                <a:latin typeface="Calibri"/>
+              </a:rPr>
+              <a:t> </a:t>
+            </a:r>
+            <a:r>
+              <a:rPr sz="1050" b="0" i="0" dirty="0" err="1">
+                <a:solidFill>
+                  <a:srgbClr val="3A4763"/>
+                </a:solidFill>
+                <a:latin typeface="Calibri"/>
+              </a:rPr>
+              <a:t>poziva</a:t>
+            </a:r>
+            <a:r>
+              <a:rPr sz="1050" b="0" i="0" dirty="0">
+                <a:solidFill>
+                  <a:srgbClr val="3A4763"/>
+                </a:solidFill>
+                <a:latin typeface="Calibri"/>
+              </a:rPr>
+              <a:t> (gore/dole </a:t>
+            </a:r>
+            <a:r>
+              <a:rPr sz="1050" b="0" i="0" dirty="0" err="1">
+                <a:solidFill>
+                  <a:srgbClr val="3A4763"/>
+                </a:solidFill>
+                <a:latin typeface="Calibri"/>
+              </a:rPr>
+              <a:t>po</a:t>
+            </a:r>
+            <a:r>
+              <a:rPr sz="1050" b="0" i="0" dirty="0">
+                <a:solidFill>
+                  <a:srgbClr val="3A4763"/>
+                </a:solidFill>
+                <a:latin typeface="Calibri"/>
+              </a:rPr>
+              <a:t> </a:t>
+            </a:r>
+            <a:r>
+              <a:rPr sz="1050" b="0" i="0" dirty="0" err="1">
+                <a:solidFill>
+                  <a:srgbClr val="3A4763"/>
+                </a:solidFill>
+                <a:latin typeface="Calibri"/>
+              </a:rPr>
+              <a:t>spratu</a:t>
+            </a:r>
+            <a:r>
+              <a:rPr sz="1050" b="0" i="0" dirty="0">
+                <a:solidFill>
+                  <a:srgbClr val="3A4763"/>
+                </a:solidFill>
+                <a:latin typeface="Calibri"/>
+              </a:rPr>
+              <a:t>).</a:t>
             </a:r>
           </a:p>
           <a:p>
             <a:pPr>
               <a:lnSpc>
-                <a:spcPct val="106000"/>
+                <a:spcPct val="105000"/>
               </a:lnSpc>
               <a:spcBef>
                 <a:spcPts val="0"/>
               </a:spcBef>
               <a:spcAft>
-                <a:spcPts val="1000"/>
+                <a:spcPts val="800"/>
               </a:spcAft>
             </a:pPr>
             <a:r>
-              <a:rPr sz="1100" b="1" i="0">
+              <a:rPr sz="1050" b="1" i="0" dirty="0">
                 <a:solidFill>
                   <a:srgbClr val="0E7C86"/>
                 </a:solidFill>
@@ -6279,29 +6863,308 @@
               <a:t>•  </a:t>
             </a:r>
             <a:r>
-              <a:rPr sz="1100" b="0" i="0">
-                <a:solidFill>
-                  <a:srgbClr val="3A4763"/>
-                </a:solidFill>
-                <a:latin typeface="Calibri"/>
-              </a:rPr>
-              <a:t>Petlja sa Event strukturom: reaguje isključivo na klikove i upisuje odgovarajuće komande na mrežu (CiljniSprat, poziv, smer, Stop).</a:t>
+              <a:rPr sz="1050" b="1" i="0" dirty="0" err="1">
+                <a:solidFill>
+                  <a:srgbClr val="17223B"/>
+                </a:solidFill>
+                <a:latin typeface="Calibri"/>
+              </a:rPr>
+              <a:t>Unutrašnja</a:t>
+            </a:r>
+            <a:r>
+              <a:rPr sz="1050" b="1" i="0" dirty="0">
+                <a:solidFill>
+                  <a:srgbClr val="17223B"/>
+                </a:solidFill>
+                <a:latin typeface="Calibri"/>
+              </a:rPr>
+              <a:t> </a:t>
+            </a:r>
+            <a:r>
+              <a:rPr sz="1050" b="1" i="0" dirty="0" err="1">
+                <a:solidFill>
+                  <a:srgbClr val="17223B"/>
+                </a:solidFill>
+                <a:latin typeface="Calibri"/>
+              </a:rPr>
+              <a:t>dugmad</a:t>
+            </a:r>
+            <a:r>
+              <a:rPr sz="1050" b="1" i="0" dirty="0">
+                <a:solidFill>
+                  <a:srgbClr val="17223B"/>
+                </a:solidFill>
+                <a:latin typeface="Calibri"/>
+              </a:rPr>
+              <a:t> </a:t>
+            </a:r>
+            <a:r>
+              <a:rPr sz="1050" b="1" i="0" dirty="0" err="1">
+                <a:solidFill>
+                  <a:srgbClr val="17223B"/>
+                </a:solidFill>
+                <a:latin typeface="Calibri"/>
+              </a:rPr>
+              <a:t>su</a:t>
+            </a:r>
+            <a:r>
+              <a:rPr sz="1050" b="1" i="0" dirty="0">
+                <a:solidFill>
+                  <a:srgbClr val="17223B"/>
+                </a:solidFill>
+                <a:latin typeface="Calibri"/>
+              </a:rPr>
+              <a:t> </a:t>
+            </a:r>
+            <a:r>
+              <a:rPr sz="1050" b="1" i="0" dirty="0" err="1">
+                <a:solidFill>
+                  <a:srgbClr val="17223B"/>
+                </a:solidFill>
+                <a:latin typeface="Calibri"/>
+              </a:rPr>
+              <a:t>aktivna</a:t>
+            </a:r>
+            <a:r>
+              <a:rPr sz="1050" b="1" i="0" dirty="0">
+                <a:solidFill>
+                  <a:srgbClr val="17223B"/>
+                </a:solidFill>
+                <a:latin typeface="Calibri"/>
+              </a:rPr>
+              <a:t> </a:t>
+            </a:r>
+            <a:r>
+              <a:rPr sz="1050" b="0" i="0" dirty="0" err="1">
+                <a:solidFill>
+                  <a:srgbClr val="3A4763"/>
+                </a:solidFill>
+                <a:latin typeface="Calibri"/>
+              </a:rPr>
+              <a:t>tek</a:t>
+            </a:r>
+            <a:r>
+              <a:rPr sz="1050" b="0" i="0" dirty="0">
+                <a:solidFill>
+                  <a:srgbClr val="3A4763"/>
+                </a:solidFill>
+                <a:latin typeface="Calibri"/>
+              </a:rPr>
+              <a:t> </a:t>
+            </a:r>
+            <a:r>
+              <a:rPr sz="1050" b="0" i="0" dirty="0" err="1">
+                <a:solidFill>
+                  <a:srgbClr val="3A4763"/>
+                </a:solidFill>
+                <a:latin typeface="Calibri"/>
+              </a:rPr>
+              <a:t>nakon</a:t>
+            </a:r>
+            <a:r>
+              <a:rPr sz="1050" b="0" i="0" dirty="0">
+                <a:solidFill>
+                  <a:srgbClr val="3A4763"/>
+                </a:solidFill>
+                <a:latin typeface="Calibri"/>
+              </a:rPr>
+              <a:t> </a:t>
+            </a:r>
+            <a:r>
+              <a:rPr sz="1050" b="0" i="0" dirty="0" err="1">
+                <a:solidFill>
+                  <a:srgbClr val="3A4763"/>
+                </a:solidFill>
+                <a:latin typeface="Calibri"/>
+              </a:rPr>
+              <a:t>poziva</a:t>
+            </a:r>
+            <a:r>
+              <a:rPr sz="1050" b="0" i="0" dirty="0">
+                <a:solidFill>
+                  <a:srgbClr val="3A4763"/>
+                </a:solidFill>
+                <a:latin typeface="Calibri"/>
+              </a:rPr>
+              <a:t> </a:t>
+            </a:r>
+            <a:r>
+              <a:rPr sz="1050" b="0" i="0" dirty="0" err="1">
+                <a:solidFill>
+                  <a:srgbClr val="3A4763"/>
+                </a:solidFill>
+                <a:latin typeface="Calibri"/>
+              </a:rPr>
+              <a:t>spolja</a:t>
+            </a:r>
+            <a:r>
+              <a:rPr sz="1050" b="0" i="0" dirty="0">
+                <a:solidFill>
+                  <a:srgbClr val="3A4763"/>
+                </a:solidFill>
+                <a:latin typeface="Calibri"/>
+              </a:rPr>
+              <a:t>, </a:t>
+            </a:r>
+            <a:r>
+              <a:rPr sz="1050" b="0" i="0" dirty="0" err="1">
+                <a:solidFill>
+                  <a:srgbClr val="3A4763"/>
+                </a:solidFill>
+                <a:latin typeface="Calibri"/>
+              </a:rPr>
+              <a:t>i</a:t>
+            </a:r>
+            <a:r>
+              <a:rPr sz="1050" b="0" i="0" dirty="0">
+                <a:solidFill>
+                  <a:srgbClr val="3A4763"/>
+                </a:solidFill>
+                <a:latin typeface="Calibri"/>
+              </a:rPr>
+              <a:t> </a:t>
+            </a:r>
+            <a:r>
+              <a:rPr sz="1050" b="0" i="0" dirty="0" err="1">
+                <a:solidFill>
+                  <a:srgbClr val="3A4763"/>
+                </a:solidFill>
+                <a:latin typeface="Calibri"/>
+              </a:rPr>
+              <a:t>samo</a:t>
+            </a:r>
+            <a:r>
+              <a:rPr sz="1050" b="0" i="0" dirty="0">
+                <a:solidFill>
+                  <a:srgbClr val="3A4763"/>
+                </a:solidFill>
+                <a:latin typeface="Calibri"/>
+              </a:rPr>
+              <a:t> u </a:t>
+            </a:r>
+            <a:r>
+              <a:rPr sz="1050" b="0" i="0" dirty="0" err="1">
+                <a:solidFill>
+                  <a:srgbClr val="3A4763"/>
+                </a:solidFill>
+                <a:latin typeface="Calibri"/>
+              </a:rPr>
+              <a:t>smeru</a:t>
+            </a:r>
+            <a:r>
+              <a:rPr sz="1050" b="0" i="0" dirty="0">
+                <a:solidFill>
+                  <a:srgbClr val="3A4763"/>
+                </a:solidFill>
+                <a:latin typeface="Calibri"/>
+              </a:rPr>
+              <a:t> tog </a:t>
+            </a:r>
+            <a:r>
+              <a:rPr sz="1050" b="0" i="0" dirty="0" err="1">
+                <a:solidFill>
+                  <a:srgbClr val="3A4763"/>
+                </a:solidFill>
+                <a:latin typeface="Calibri"/>
+              </a:rPr>
+              <a:t>poziva</a:t>
+            </a:r>
+            <a:r>
+              <a:rPr sz="1050" b="0" i="0" dirty="0">
+                <a:solidFill>
+                  <a:srgbClr val="3A4763"/>
+                </a:solidFill>
+                <a:latin typeface="Calibri"/>
+              </a:rPr>
+              <a:t>: </a:t>
+            </a:r>
+            <a:r>
+              <a:rPr sz="1050" b="0" i="0" dirty="0" err="1">
+                <a:solidFill>
+                  <a:srgbClr val="3A4763"/>
+                </a:solidFill>
+                <a:latin typeface="Calibri"/>
+              </a:rPr>
+              <a:t>sprečene</a:t>
+            </a:r>
+            <a:r>
+              <a:rPr sz="1050" b="0" i="0" dirty="0">
+                <a:solidFill>
+                  <a:srgbClr val="3A4763"/>
+                </a:solidFill>
+                <a:latin typeface="Calibri"/>
+              </a:rPr>
+              <a:t> </a:t>
+            </a:r>
+            <a:r>
+              <a:rPr sz="1050" b="0" i="0" dirty="0" err="1">
+                <a:solidFill>
+                  <a:srgbClr val="3A4763"/>
+                </a:solidFill>
+                <a:latin typeface="Calibri"/>
+              </a:rPr>
+              <a:t>su</a:t>
+            </a:r>
+            <a:r>
+              <a:rPr sz="1050" b="0" i="0" dirty="0">
+                <a:solidFill>
+                  <a:srgbClr val="3A4763"/>
+                </a:solidFill>
+                <a:latin typeface="Calibri"/>
+              </a:rPr>
+              <a:t> </a:t>
+            </a:r>
+            <a:r>
+              <a:rPr sz="1050" b="0" i="0" dirty="0" err="1">
+                <a:solidFill>
+                  <a:srgbClr val="3A4763"/>
+                </a:solidFill>
+                <a:latin typeface="Calibri"/>
+              </a:rPr>
+              <a:t>besmislene</a:t>
+            </a:r>
+            <a:r>
+              <a:rPr sz="1050" b="0" i="0" dirty="0">
+                <a:solidFill>
+                  <a:srgbClr val="3A4763"/>
+                </a:solidFill>
+                <a:latin typeface="Calibri"/>
+              </a:rPr>
+              <a:t> </a:t>
+            </a:r>
+            <a:r>
+              <a:rPr sz="1050" b="0" i="0" dirty="0" err="1">
+                <a:solidFill>
+                  <a:srgbClr val="3A4763"/>
+                </a:solidFill>
+                <a:latin typeface="Calibri"/>
+              </a:rPr>
+              <a:t>kombinacije</a:t>
+            </a:r>
+            <a:r>
+              <a:rPr sz="1050" b="0" i="0" dirty="0">
+                <a:solidFill>
+                  <a:srgbClr val="3A4763"/>
+                </a:solidFill>
+                <a:latin typeface="Calibri"/>
+              </a:rPr>
+              <a:t>.</a:t>
             </a:r>
           </a:p>
           <a:p>
             <a:pPr>
               <a:lnSpc>
-                <a:spcPct val="106000"/>
+                <a:spcPct val="105000"/>
               </a:lnSpc>
               <a:spcBef>
                 <a:spcPts val="0"/>
               </a:spcBef>
               <a:spcAft>
-                <a:spcPts val="1000"/>
+                <a:spcPts val="800"/>
               </a:spcAft>
             </a:pPr>
             <a:r>
-              <a:rPr sz="1100" b="1" i="0">
+              <a:rPr sz="1050" b="1" i="0" dirty="0">
                 <a:solidFill>
                   <a:srgbClr val="0E7C86"/>
                 </a:solidFill>
@@ -6310,29 +7173,146 @@
               <a:t>•  </a:t>
             </a:r>
             <a:r>
-              <a:rPr sz="1100" b="0" i="0">
-                <a:solidFill>
-                  <a:srgbClr val="3A4763"/>
-                </a:solidFill>
-                <a:latin typeface="Calibri"/>
-              </a:rPr>
-              <a:t>Petlja za osvežavanje: bez Event strukture, neprekidno čita poziciju i stanje sa mreže i osvežava grafik i LED indikatore.</a:t>
+              <a:rPr sz="1050" b="1" i="0" dirty="0" err="1">
+                <a:solidFill>
+                  <a:srgbClr val="17223B"/>
+                </a:solidFill>
+                <a:latin typeface="Calibri"/>
+              </a:rPr>
+              <a:t>Glavni</a:t>
+            </a:r>
+            <a:r>
+              <a:rPr sz="1050" b="1" i="0" dirty="0">
+                <a:solidFill>
+                  <a:srgbClr val="17223B"/>
+                </a:solidFill>
+                <a:latin typeface="Calibri"/>
+              </a:rPr>
+              <a:t> </a:t>
+            </a:r>
+            <a:r>
+              <a:rPr sz="1050" b="1" i="0" dirty="0" err="1">
+                <a:solidFill>
+                  <a:srgbClr val="17223B"/>
+                </a:solidFill>
+                <a:latin typeface="Calibri"/>
+              </a:rPr>
+              <a:t>grafik</a:t>
+            </a:r>
+            <a:r>
+              <a:rPr sz="1050" b="1" i="0" dirty="0">
+                <a:solidFill>
+                  <a:srgbClr val="17223B"/>
+                </a:solidFill>
+                <a:latin typeface="Calibri"/>
+              </a:rPr>
+              <a:t> </a:t>
+            </a:r>
+            <a:r>
+              <a:rPr sz="1050" b="1" i="0" dirty="0" err="1">
+                <a:solidFill>
+                  <a:srgbClr val="17223B"/>
+                </a:solidFill>
+                <a:latin typeface="Calibri"/>
+              </a:rPr>
+              <a:t>prikazuje</a:t>
+            </a:r>
+            <a:r>
+              <a:rPr sz="1050" b="1" i="0" dirty="0">
+                <a:solidFill>
+                  <a:srgbClr val="17223B"/>
+                </a:solidFill>
+                <a:latin typeface="Calibri"/>
+              </a:rPr>
+              <a:t> </a:t>
+            </a:r>
+            <a:r>
+              <a:rPr sz="1050" b="0" i="0" dirty="0" err="1">
+                <a:solidFill>
+                  <a:srgbClr val="3A4763"/>
+                </a:solidFill>
+                <a:latin typeface="Calibri"/>
+              </a:rPr>
+              <a:t>tačnu</a:t>
+            </a:r>
+            <a:r>
+              <a:rPr sz="1050" b="0" i="0" dirty="0">
+                <a:solidFill>
+                  <a:srgbClr val="3A4763"/>
+                </a:solidFill>
+                <a:latin typeface="Calibri"/>
+              </a:rPr>
+              <a:t>, </a:t>
+            </a:r>
+            <a:r>
+              <a:rPr sz="1050" b="0" i="0" dirty="0" err="1">
+                <a:solidFill>
+                  <a:srgbClr val="3A4763"/>
+                </a:solidFill>
+                <a:latin typeface="Calibri"/>
+              </a:rPr>
+              <a:t>neprekidnu</a:t>
+            </a:r>
+            <a:r>
+              <a:rPr sz="1050" b="0" i="0" dirty="0">
+                <a:solidFill>
+                  <a:srgbClr val="3A4763"/>
+                </a:solidFill>
+                <a:latin typeface="Calibri"/>
+              </a:rPr>
+              <a:t> </a:t>
+            </a:r>
+            <a:r>
+              <a:rPr sz="1050" b="0" i="0" dirty="0" err="1">
+                <a:solidFill>
+                  <a:srgbClr val="3A4763"/>
+                </a:solidFill>
+                <a:latin typeface="Calibri"/>
+              </a:rPr>
+              <a:t>poziciju</a:t>
+            </a:r>
+            <a:r>
+              <a:rPr sz="1050" b="0" i="0" dirty="0">
+                <a:solidFill>
+                  <a:srgbClr val="3A4763"/>
+                </a:solidFill>
+                <a:latin typeface="Calibri"/>
+              </a:rPr>
+              <a:t> </a:t>
+            </a:r>
+            <a:r>
+              <a:rPr sz="1050" b="0" i="0" dirty="0" err="1">
+                <a:solidFill>
+                  <a:srgbClr val="3A4763"/>
+                </a:solidFill>
+                <a:latin typeface="Calibri"/>
+              </a:rPr>
+              <a:t>lifta</a:t>
+            </a:r>
+            <a:r>
+              <a:rPr sz="1050" b="0" i="0" dirty="0">
+                <a:solidFill>
+                  <a:srgbClr val="3A4763"/>
+                </a:solidFill>
+                <a:latin typeface="Calibri"/>
+              </a:rPr>
+              <a:t> (Meter).</a:t>
             </a:r>
           </a:p>
           <a:p>
             <a:pPr>
               <a:lnSpc>
-                <a:spcPct val="106000"/>
+                <a:spcPct val="105000"/>
               </a:lnSpc>
               <a:spcBef>
                 <a:spcPts val="0"/>
               </a:spcBef>
               <a:spcAft>
-                <a:spcPts val="1000"/>
+                <a:spcPts val="800"/>
               </a:spcAft>
             </a:pPr>
             <a:r>
-              <a:rPr sz="1100" b="1" i="0">
+              <a:rPr sz="1050" b="1" i="0" dirty="0">
                 <a:solidFill>
                   <a:srgbClr val="0E7C86"/>
                 </a:solidFill>
@@ -6341,330 +7321,707 @@
               <a:t>•  </a:t>
             </a:r>
             <a:r>
-              <a:rPr sz="1100" b="1" i="0">
+              <a:rPr sz="1050" b="1" i="0" dirty="0" err="1">
                 <a:solidFill>
                   <a:srgbClr val="17223B"/>
                 </a:solidFill>
                 <a:latin typeface="Calibri"/>
               </a:rPr>
-              <a:t>Zašto dve petlje: </a:t>
-            </a:r>
-            <a:r>
-              <a:rPr sz="1100" b="0" i="0">
-                <a:solidFill>
-                  <a:srgbClr val="3A4763"/>
-                </a:solidFill>
-                <a:latin typeface="Calibri"/>
-              </a:rPr>
-              <a:t>prikaz ostaje gladak i ažuran u realnom vremenu, nezavisno od toga da li korisnik u tom trenutku klika.</a:t>
-            </a:r>
-          </a:p>
-        </p:txBody>
-      </p:sp>
-      <p:sp>
-        <p:nvSpPr>
-          <p:cNvPr id="8" name="Rounded Rectangle 7"/>
-          <p:cNvSpPr/>
-          <p:nvPr/>
-        </p:nvSpPr>
-        <p:spPr>
-          <a:xfrm>
-            <a:off x="5074920" y="1417320"/>
-            <a:ext cx="3337560" cy="3108960"/>
-          </a:xfrm>
-          <a:prstGeom prst="roundRect">
-            <a:avLst>
-              <a:gd name="adj" fmla="val 4000"/>
-            </a:avLst>
-          </a:prstGeom>
-          <a:solidFill>
-            <a:srgbClr val="F4F6F8"/>
-          </a:solidFill>
-          <a:ln w="16510">
-            <a:solidFill>
-              <a:srgbClr val="D9DFE5"/>
-            </a:solidFill>
-          </a:ln>
-          <a:effectLst/>
-        </p:spPr>
-        <p:style>
-          <a:lnRef idx="1">
-            <a:schemeClr val="accent1"/>
-          </a:lnRef>
-          <a:fillRef idx="3">
-            <a:schemeClr val="accent1"/>
-          </a:fillRef>
-          <a:effectRef idx="2">
-            <a:schemeClr val="accent1"/>
-          </a:effectRef>
-          <a:fontRef idx="minor">
-            <a:schemeClr val="lt1"/>
-          </a:fontRef>
-        </p:style>
-        <p:txBody>
-          <a:bodyPr rtlCol="0" anchor="ctr"/>
-          <a:lstStyle/>
-          <a:p>
-            <a:pPr algn="ctr"/>
-            <a:endParaRPr/>
-          </a:p>
-        </p:txBody>
-      </p:sp>
-      <p:sp>
-        <p:nvSpPr>
-          <p:cNvPr id="9" name="Rounded Rectangle 8"/>
-          <p:cNvSpPr/>
-          <p:nvPr/>
-        </p:nvSpPr>
-        <p:spPr>
-          <a:xfrm>
-            <a:off x="6240780" y="2039112"/>
-            <a:ext cx="1005840" cy="749808"/>
-          </a:xfrm>
-          <a:prstGeom prst="roundRect">
-            <a:avLst>
-              <a:gd name="adj" fmla="val 8000"/>
-            </a:avLst>
-          </a:prstGeom>
-          <a:solidFill>
-            <a:srgbClr val="DCE3EA"/>
-          </a:solidFill>
-          <a:ln w="15240">
-            <a:solidFill>
-              <a:srgbClr val="6C7688"/>
-            </a:solidFill>
-          </a:ln>
-          <a:effectLst/>
-        </p:spPr>
-        <p:style>
-          <a:lnRef idx="1">
-            <a:schemeClr val="accent1"/>
-          </a:lnRef>
-          <a:fillRef idx="3">
-            <a:schemeClr val="accent1"/>
-          </a:fillRef>
-          <a:effectRef idx="2">
-            <a:schemeClr val="accent1"/>
-          </a:effectRef>
-          <a:fontRef idx="minor">
-            <a:schemeClr val="lt1"/>
-          </a:fontRef>
-        </p:style>
-        <p:txBody>
-          <a:bodyPr rtlCol="0" anchor="ctr"/>
-          <a:lstStyle/>
-          <a:p>
-            <a:pPr algn="ctr"/>
-            <a:endParaRPr/>
-          </a:p>
-        </p:txBody>
-      </p:sp>
-      <p:sp>
-        <p:nvSpPr>
-          <p:cNvPr id="10" name="Oval 9"/>
-          <p:cNvSpPr/>
-          <p:nvPr/>
-        </p:nvSpPr>
-        <p:spPr>
-          <a:xfrm>
-            <a:off x="6496812" y="2185416"/>
-            <a:ext cx="201168" cy="201168"/>
-          </a:xfrm>
-          <a:prstGeom prst="ellipse">
-            <a:avLst/>
-          </a:prstGeom>
-          <a:solidFill>
-            <a:srgbClr val="D9832F"/>
-          </a:solidFill>
-          <a:ln>
-            <a:noFill/>
-          </a:ln>
-          <a:effectLst/>
-        </p:spPr>
-        <p:style>
-          <a:lnRef idx="1">
-            <a:schemeClr val="accent1"/>
-          </a:lnRef>
-          <a:fillRef idx="3">
-            <a:schemeClr val="accent1"/>
-          </a:fillRef>
-          <a:effectRef idx="2">
-            <a:schemeClr val="accent1"/>
-          </a:effectRef>
-          <a:fontRef idx="minor">
-            <a:schemeClr val="lt1"/>
-          </a:fontRef>
-        </p:style>
-        <p:txBody>
-          <a:bodyPr rtlCol="0" anchor="ctr"/>
-          <a:lstStyle/>
-          <a:p>
-            <a:pPr algn="ctr"/>
-            <a:endParaRPr/>
-          </a:p>
-        </p:txBody>
-      </p:sp>
-      <p:sp>
-        <p:nvSpPr>
-          <p:cNvPr id="11" name="Isosceles Triangle 10"/>
-          <p:cNvSpPr/>
-          <p:nvPr/>
-        </p:nvSpPr>
-        <p:spPr>
-          <a:xfrm>
-            <a:off x="6579108" y="2368296"/>
-            <a:ext cx="640080" cy="365760"/>
-          </a:xfrm>
-          <a:prstGeom prst="triangle">
-            <a:avLst/>
-          </a:prstGeom>
-          <a:solidFill>
-            <a:srgbClr val="0E7C86"/>
-          </a:solidFill>
-          <a:ln>
-            <a:noFill/>
-          </a:ln>
-          <a:effectLst/>
-        </p:spPr>
-        <p:style>
-          <a:lnRef idx="1">
-            <a:schemeClr val="accent1"/>
-          </a:lnRef>
-          <a:fillRef idx="3">
-            <a:schemeClr val="accent1"/>
-          </a:fillRef>
-          <a:effectRef idx="2">
-            <a:schemeClr val="accent1"/>
-          </a:effectRef>
-          <a:fontRef idx="minor">
-            <a:schemeClr val="lt1"/>
-          </a:fontRef>
-        </p:style>
-        <p:txBody>
-          <a:bodyPr rtlCol="0" anchor="ctr"/>
-          <a:lstStyle/>
-          <a:p>
-            <a:pPr algn="ctr"/>
-            <a:endParaRPr/>
-          </a:p>
-        </p:txBody>
-      </p:sp>
-      <p:sp>
-        <p:nvSpPr>
-          <p:cNvPr id="12" name="TextBox 11"/>
-          <p:cNvSpPr txBox="1"/>
-          <p:nvPr/>
-        </p:nvSpPr>
-        <p:spPr>
-          <a:xfrm>
-            <a:off x="5257800" y="3282696"/>
-            <a:ext cx="2971800" cy="1181404"/>
-          </a:xfrm>
-          <a:prstGeom prst="rect">
-            <a:avLst/>
-          </a:prstGeom>
-          <a:noFill/>
-        </p:spPr>
-        <p:txBody>
-          <a:bodyPr wrap="square" lIns="0" tIns="0" rIns="0" bIns="0" anchor="t">
-            <a:spAutoFit/>
-          </a:bodyPr>
-          <a:lstStyle/>
-          <a:p>
-            <a:pPr algn="ctr">
+              <a:t>Kretanje</a:t>
+            </a:r>
+            <a:r>
+              <a:rPr sz="1050" b="1" i="0" dirty="0">
+                <a:solidFill>
+                  <a:srgbClr val="17223B"/>
+                </a:solidFill>
+                <a:latin typeface="Calibri"/>
+              </a:rPr>
+              <a:t> </a:t>
+            </a:r>
+            <a:r>
+              <a:rPr sz="1050" b="1" i="0" dirty="0" err="1">
+                <a:solidFill>
+                  <a:srgbClr val="17223B"/>
+                </a:solidFill>
+                <a:latin typeface="Calibri"/>
+              </a:rPr>
+              <a:t>kroz</a:t>
+            </a:r>
+            <a:r>
+              <a:rPr sz="1050" b="1" i="0" dirty="0">
+                <a:solidFill>
+                  <a:srgbClr val="17223B"/>
+                </a:solidFill>
+                <a:latin typeface="Calibri"/>
+              </a:rPr>
+              <a:t> </a:t>
+            </a:r>
+            <a:r>
+              <a:rPr sz="1050" b="1" i="0" dirty="0" err="1">
+                <a:solidFill>
+                  <a:srgbClr val="17223B"/>
+                </a:solidFill>
+                <a:latin typeface="Calibri"/>
+              </a:rPr>
+              <a:t>spratove</a:t>
+            </a:r>
+            <a:r>
+              <a:rPr sz="1050" b="1" i="0" dirty="0">
+                <a:solidFill>
+                  <a:srgbClr val="17223B"/>
+                </a:solidFill>
+                <a:latin typeface="Calibri"/>
+              </a:rPr>
+              <a:t> </a:t>
+            </a:r>
+            <a:r>
+              <a:rPr sz="1050" b="1" i="0" dirty="0" err="1">
+                <a:solidFill>
+                  <a:srgbClr val="17223B"/>
+                </a:solidFill>
+                <a:latin typeface="Calibri"/>
+              </a:rPr>
+              <a:t>prati</a:t>
+            </a:r>
+            <a:r>
+              <a:rPr sz="1050" b="1" i="0" dirty="0">
+                <a:solidFill>
+                  <a:srgbClr val="17223B"/>
+                </a:solidFill>
+                <a:latin typeface="Calibri"/>
+              </a:rPr>
+              <a:t> </a:t>
+            </a:r>
+            <a:r>
+              <a:rPr sz="1050" b="1" i="0" dirty="0" err="1">
+                <a:solidFill>
+                  <a:srgbClr val="17223B"/>
+                </a:solidFill>
+                <a:latin typeface="Calibri"/>
+              </a:rPr>
+              <a:t>i</a:t>
+            </a:r>
+            <a:r>
+              <a:rPr sz="1050" b="1" i="0" dirty="0">
+                <a:solidFill>
+                  <a:srgbClr val="17223B"/>
+                </a:solidFill>
+                <a:latin typeface="Calibri"/>
+              </a:rPr>
+              <a:t> </a:t>
+            </a:r>
+            <a:r>
+              <a:rPr sz="1050" b="0" i="0" dirty="0" err="1">
+                <a:solidFill>
+                  <a:srgbClr val="3A4763"/>
+                </a:solidFill>
+                <a:latin typeface="Calibri"/>
+              </a:rPr>
+              <a:t>vizuelni</a:t>
+            </a:r>
+            <a:r>
+              <a:rPr sz="1050" b="0" i="0" dirty="0">
+                <a:solidFill>
+                  <a:srgbClr val="3A4763"/>
+                </a:solidFill>
+                <a:latin typeface="Calibri"/>
+              </a:rPr>
+              <a:t> </a:t>
+            </a:r>
+            <a:r>
+              <a:rPr sz="1050" b="0" i="0" dirty="0" err="1">
+                <a:solidFill>
+                  <a:srgbClr val="3A4763"/>
+                </a:solidFill>
+                <a:latin typeface="Calibri"/>
+              </a:rPr>
+              <a:t>indikator</a:t>
+            </a:r>
+            <a:r>
+              <a:rPr sz="1050" b="0" i="0" dirty="0">
+                <a:solidFill>
+                  <a:srgbClr val="3A4763"/>
+                </a:solidFill>
+                <a:latin typeface="Calibri"/>
+              </a:rPr>
+              <a:t> </a:t>
+            </a:r>
+            <a:r>
+              <a:rPr sz="1050" b="0" i="0" dirty="0" err="1">
+                <a:solidFill>
+                  <a:srgbClr val="3A4763"/>
+                </a:solidFill>
+                <a:latin typeface="Calibri"/>
+              </a:rPr>
+              <a:t>vezan</a:t>
+            </a:r>
+            <a:r>
+              <a:rPr sz="1050" b="0" i="0" dirty="0">
+                <a:solidFill>
+                  <a:srgbClr val="3A4763"/>
+                </a:solidFill>
+                <a:latin typeface="Calibri"/>
+              </a:rPr>
+              <a:t> </a:t>
+            </a:r>
+            <a:r>
+              <a:rPr sz="1050" b="0" i="0" dirty="0" err="1">
+                <a:solidFill>
+                  <a:srgbClr val="3A4763"/>
+                </a:solidFill>
+                <a:latin typeface="Calibri"/>
+              </a:rPr>
+              <a:t>za</a:t>
+            </a:r>
+            <a:r>
+              <a:rPr sz="1050" b="0" i="0" dirty="0">
+                <a:solidFill>
+                  <a:srgbClr val="3A4763"/>
+                </a:solidFill>
+                <a:latin typeface="Calibri"/>
+              </a:rPr>
+              <a:t> </a:t>
+            </a:r>
+            <a:r>
+              <a:rPr sz="1050" b="0" i="0" dirty="0" err="1">
+                <a:solidFill>
+                  <a:srgbClr val="3A4763"/>
+                </a:solidFill>
+                <a:latin typeface="Calibri"/>
+              </a:rPr>
+              <a:t>zaokruženu</a:t>
+            </a:r>
+            <a:r>
+              <a:rPr sz="1050" b="0" i="0" dirty="0">
+                <a:solidFill>
+                  <a:srgbClr val="3A4763"/>
+                </a:solidFill>
+                <a:latin typeface="Calibri"/>
+              </a:rPr>
+              <a:t> </a:t>
+            </a:r>
+            <a:r>
+              <a:rPr sz="1050" b="0" i="0" dirty="0" err="1">
+                <a:solidFill>
+                  <a:srgbClr val="3A4763"/>
+                </a:solidFill>
+                <a:latin typeface="Calibri"/>
+              </a:rPr>
+              <a:t>poziciju</a:t>
+            </a:r>
+            <a:r>
+              <a:rPr sz="1050" b="0" i="0" dirty="0">
+                <a:solidFill>
+                  <a:srgbClr val="3A4763"/>
+                </a:solidFill>
+                <a:latin typeface="Calibri"/>
+              </a:rPr>
+              <a:t>.</a:t>
+            </a:r>
+          </a:p>
+          <a:p>
+            <a:pPr>
               <a:lnSpc>
-                <a:spcPct val="100000"/>
+                <a:spcPct val="105000"/>
               </a:lnSpc>
               <a:spcBef>
                 <a:spcPts val="0"/>
               </a:spcBef>
               <a:spcAft>
-                <a:spcPts val="200"/>
+                <a:spcPts val="800"/>
               </a:spcAft>
             </a:pPr>
             <a:r>
-              <a:rPr sz="1200" b="1" i="0">
+              <a:rPr sz="1050" b="1" i="0" dirty="0">
+                <a:solidFill>
+                  <a:srgbClr val="0E7C86"/>
+                </a:solidFill>
+                <a:latin typeface="Calibri"/>
+              </a:rPr>
+              <a:t>•  </a:t>
+            </a:r>
+            <a:r>
+              <a:rPr sz="1050" b="1" i="0" dirty="0" err="1">
                 <a:solidFill>
                   <a:srgbClr val="17223B"/>
                 </a:solidFill>
-                <a:latin typeface="Poppins"/>
-              </a:rPr>
-              <a:t>Ovde ubaci: Slika 7</a:t>
-            </a:r>
-          </a:p>
-          <a:p>
-            <a:pPr algn="ctr">
-              <a:lnSpc>
-                <a:spcPct val="100000"/>
-              </a:lnSpc>
-              <a:spcBef>
-                <a:spcPts val="0"/>
-              </a:spcBef>
-              <a:spcAft>
-                <a:spcPts val="200"/>
-              </a:spcAft>
-            </a:pPr>
-            <a:r>
-              <a:rPr sz="950" b="0" i="0">
+                <a:latin typeface="Calibri"/>
+              </a:rPr>
+              <a:t>Četiri</a:t>
+            </a:r>
+            <a:r>
+              <a:rPr sz="1050" b="1" i="0" dirty="0">
+                <a:solidFill>
+                  <a:srgbClr val="17223B"/>
+                </a:solidFill>
+                <a:latin typeface="Calibri"/>
+              </a:rPr>
+              <a:t> LED </a:t>
+            </a:r>
+            <a:r>
+              <a:rPr sz="1050" b="1" i="0" dirty="0" err="1">
+                <a:solidFill>
+                  <a:srgbClr val="17223B"/>
+                </a:solidFill>
+                <a:latin typeface="Calibri"/>
+              </a:rPr>
+              <a:t>indikatora</a:t>
+            </a:r>
+            <a:r>
+              <a:rPr sz="1050" b="1" i="0" dirty="0">
+                <a:solidFill>
+                  <a:srgbClr val="17223B"/>
+                </a:solidFill>
+                <a:latin typeface="Calibri"/>
+              </a:rPr>
+              <a:t> (Idle, Moving, </a:t>
+            </a:r>
+            <a:r>
+              <a:rPr sz="1050" b="1" i="0" dirty="0" err="1">
+                <a:solidFill>
+                  <a:srgbClr val="17223B"/>
+                </a:solidFill>
+                <a:latin typeface="Calibri"/>
+              </a:rPr>
+              <a:t>DoorOpen</a:t>
+            </a:r>
+            <a:r>
+              <a:rPr sz="1050" b="1" i="0" dirty="0">
+                <a:solidFill>
+                  <a:srgbClr val="17223B"/>
+                </a:solidFill>
+                <a:latin typeface="Calibri"/>
+              </a:rPr>
+              <a:t>, Shutdown): </a:t>
+            </a:r>
+            <a:r>
+              <a:rPr sz="1050" b="0" i="0" dirty="0">
+                <a:solidFill>
+                  <a:srgbClr val="3A4763"/>
+                </a:solidFill>
+                <a:latin typeface="Calibri"/>
+              </a:rPr>
+              <a:t>u </a:t>
+            </a:r>
+            <a:r>
+              <a:rPr sz="1050" b="0" i="0" dirty="0" err="1">
+                <a:solidFill>
+                  <a:srgbClr val="3A4763"/>
+                </a:solidFill>
+                <a:latin typeface="Calibri"/>
+              </a:rPr>
+              <a:t>svakom</a:t>
+            </a:r>
+            <a:r>
+              <a:rPr sz="1050" b="0" i="0" dirty="0">
+                <a:solidFill>
+                  <a:srgbClr val="3A4763"/>
+                </a:solidFill>
+                <a:latin typeface="Calibri"/>
+              </a:rPr>
+              <a:t> </a:t>
+            </a:r>
+            <a:r>
+              <a:rPr sz="1050" b="0" i="0" dirty="0" err="1">
+                <a:solidFill>
+                  <a:srgbClr val="3A4763"/>
+                </a:solidFill>
+                <a:latin typeface="Calibri"/>
+              </a:rPr>
+              <a:t>trenutku</a:t>
+            </a:r>
+            <a:r>
+              <a:rPr sz="1050" b="0" i="0" dirty="0">
+                <a:solidFill>
+                  <a:srgbClr val="3A4763"/>
+                </a:solidFill>
+                <a:latin typeface="Calibri"/>
+              </a:rPr>
+              <a:t> </a:t>
+            </a:r>
+            <a:r>
+              <a:rPr sz="1050" b="0" i="0" dirty="0" err="1">
+                <a:solidFill>
+                  <a:srgbClr val="3A4763"/>
+                </a:solidFill>
+                <a:latin typeface="Calibri"/>
+              </a:rPr>
+              <a:t>svetli</a:t>
+            </a:r>
+            <a:r>
+              <a:rPr sz="1050" b="0" i="0" dirty="0">
+                <a:solidFill>
+                  <a:srgbClr val="3A4763"/>
+                </a:solidFill>
+                <a:latin typeface="Calibri"/>
+              </a:rPr>
+              <a:t> </a:t>
+            </a:r>
+            <a:r>
+              <a:rPr sz="1050" b="0" i="0" dirty="0" err="1">
+                <a:solidFill>
+                  <a:srgbClr val="3A4763"/>
+                </a:solidFill>
+                <a:latin typeface="Calibri"/>
+              </a:rPr>
+              <a:t>tačno</a:t>
+            </a:r>
+            <a:r>
+              <a:rPr sz="1050" b="0" i="0" dirty="0">
+                <a:solidFill>
+                  <a:srgbClr val="3A4763"/>
+                </a:solidFill>
+                <a:latin typeface="Calibri"/>
+              </a:rPr>
+              <a:t> </a:t>
+            </a:r>
+            <a:r>
+              <a:rPr sz="1050" b="0" i="0" dirty="0" err="1">
+                <a:solidFill>
+                  <a:srgbClr val="3A4763"/>
+                </a:solidFill>
+                <a:latin typeface="Calibri"/>
+              </a:rPr>
+              <a:t>jedan</a:t>
+            </a:r>
+            <a:r>
+              <a:rPr sz="1050" b="0" i="0" dirty="0">
+                <a:solidFill>
+                  <a:srgbClr val="3A4763"/>
+                </a:solidFill>
+                <a:latin typeface="Calibri"/>
+              </a:rPr>
+              <a:t>.</a:t>
+            </a:r>
+          </a:p>
+        </p:txBody>
+      </p:sp>
+      <p:grpSp>
+        <p:nvGrpSpPr>
+          <p:cNvPr id="13" name="Group 12"/>
+          <p:cNvGrpSpPr/>
+          <p:nvPr/>
+        </p:nvGrpSpPr>
+        <p:grpSpPr>
+          <a:xfrm>
+            <a:off x="4993374" y="890296"/>
+            <a:ext cx="3704253" cy="3962898"/>
+            <a:chOff x="5698683" y="947071"/>
+            <a:chExt cx="3429933" cy="3739896"/>
+          </a:xfrm>
+        </p:grpSpPr>
+        <p:sp>
+          <p:nvSpPr>
+            <p:cNvPr id="8" name="Rounded Rectangle 7"/>
+            <p:cNvSpPr/>
+            <p:nvPr/>
+          </p:nvSpPr>
+          <p:spPr>
+            <a:xfrm>
+              <a:off x="5698683" y="947071"/>
+              <a:ext cx="3429933" cy="3739896"/>
+            </a:xfrm>
+            <a:prstGeom prst="roundRect">
+              <a:avLst>
+                <a:gd name="adj" fmla="val 4000"/>
+              </a:avLst>
+            </a:prstGeom>
+            <a:solidFill>
+              <a:srgbClr val="F4F6F8"/>
+            </a:solidFill>
+            <a:ln w="16510">
+              <a:solidFill>
+                <a:srgbClr val="D9DFE5"/>
+              </a:solidFill>
+            </a:ln>
+            <a:effectLst/>
+          </p:spPr>
+          <p:style>
+            <a:lnRef idx="1">
+              <a:schemeClr val="accent1"/>
+            </a:lnRef>
+            <a:fillRef idx="3">
+              <a:schemeClr val="accent1"/>
+            </a:fillRef>
+            <a:effectRef idx="2">
+              <a:schemeClr val="accent1"/>
+            </a:effectRef>
+            <a:fontRef idx="minor">
+              <a:schemeClr val="lt1"/>
+            </a:fontRef>
+          </p:style>
+          <p:txBody>
+            <a:bodyPr rtlCol="0" anchor="ctr"/>
+            <a:lstStyle/>
+            <a:p>
+              <a:pPr algn="ctr"/>
+              <a:endParaRPr/>
+            </a:p>
+          </p:txBody>
+        </p:sp>
+        <p:sp>
+          <p:nvSpPr>
+            <p:cNvPr id="12" name="TextBox 11"/>
+            <p:cNvSpPr txBox="1"/>
+            <p:nvPr/>
+          </p:nvSpPr>
+          <p:spPr>
+            <a:xfrm>
+              <a:off x="5927750" y="4325332"/>
+              <a:ext cx="2971800" cy="292388"/>
+            </a:xfrm>
+            <a:prstGeom prst="rect">
+              <a:avLst/>
+            </a:prstGeom>
+            <a:noFill/>
+          </p:spPr>
+          <p:txBody>
+            <a:bodyPr wrap="square" lIns="0" tIns="0" rIns="0" bIns="0" anchor="t">
+              <a:spAutoFit/>
+            </a:bodyPr>
+            <a:lstStyle/>
+            <a:p>
+              <a:pPr algn="ctr">
+                <a:lnSpc>
+                  <a:spcPct val="100000"/>
+                </a:lnSpc>
+                <a:spcBef>
+                  <a:spcPts val="0"/>
+                </a:spcBef>
+                <a:spcAft>
+                  <a:spcPts val="200"/>
+                </a:spcAft>
+              </a:pPr>
+              <a:r>
+                <a:rPr sz="950" b="0" i="0" dirty="0" smtClean="0">
+                  <a:solidFill>
+                    <a:srgbClr val="6C7688"/>
+                  </a:solidFill>
+                  <a:latin typeface="Calibri"/>
+                </a:rPr>
+                <a:t>Front </a:t>
+              </a:r>
+              <a:r>
+                <a:rPr sz="950" b="0" i="0" dirty="0">
+                  <a:solidFill>
+                    <a:srgbClr val="6C7688"/>
+                  </a:solidFill>
+                  <a:latin typeface="Calibri"/>
+                </a:rPr>
+                <a:t>panel </a:t>
+              </a:r>
+              <a:r>
+                <a:rPr sz="950" b="0" i="0" dirty="0" smtClean="0">
+                  <a:solidFill>
+                    <a:srgbClr val="6C7688"/>
+                  </a:solidFill>
+                  <a:latin typeface="Calibri"/>
+                </a:rPr>
+                <a:t>PC_HMI_Lift.vi:</a:t>
+              </a:r>
+              <a:r>
+                <a:rPr lang="sr-Latn-RS" sz="950" b="0" i="0" dirty="0" smtClean="0">
+                  <a:solidFill>
+                    <a:srgbClr val="6C7688"/>
+                  </a:solidFill>
+                  <a:latin typeface="Calibri"/>
+                </a:rPr>
+                <a:t> </a:t>
+              </a:r>
+              <a:r>
+                <a:rPr sz="950" b="0" i="0" dirty="0" err="1" smtClean="0">
+                  <a:solidFill>
+                    <a:srgbClr val="6C7688"/>
+                  </a:solidFill>
+                  <a:latin typeface="Calibri"/>
+                </a:rPr>
+                <a:t>dugmad</a:t>
+              </a:r>
+              <a:r>
+                <a:rPr sz="950" b="0" i="0" dirty="0">
+                  <a:solidFill>
+                    <a:srgbClr val="6C7688"/>
+                  </a:solidFill>
+                  <a:latin typeface="Calibri"/>
+                </a:rPr>
+                <a:t>, </a:t>
+              </a:r>
+              <a:r>
+                <a:rPr sz="950" b="0" i="0" dirty="0" err="1">
+                  <a:solidFill>
+                    <a:srgbClr val="6C7688"/>
+                  </a:solidFill>
+                  <a:latin typeface="Calibri"/>
+                </a:rPr>
+                <a:t>grafik</a:t>
+              </a:r>
+              <a:r>
+                <a:rPr sz="950" b="0" i="0" dirty="0">
+                  <a:solidFill>
+                    <a:srgbClr val="6C7688"/>
+                  </a:solidFill>
+                  <a:latin typeface="Calibri"/>
+                </a:rPr>
+                <a:t> </a:t>
+              </a:r>
+              <a:r>
+                <a:rPr sz="950" b="0" i="0" dirty="0" err="1" smtClean="0">
+                  <a:solidFill>
+                    <a:srgbClr val="6C7688"/>
+                  </a:solidFill>
+                  <a:latin typeface="Calibri"/>
+                </a:rPr>
+                <a:t>pozicije</a:t>
+              </a:r>
+              <a:r>
+                <a:rPr lang="sr-Latn-RS" sz="950" dirty="0">
+                  <a:solidFill>
+                    <a:srgbClr val="6C7688"/>
+                  </a:solidFill>
+                  <a:latin typeface="Calibri"/>
+                </a:rPr>
+                <a:t> </a:t>
+              </a:r>
+              <a:r>
+                <a:rPr sz="950" b="0" i="0" dirty="0" err="1" smtClean="0">
+                  <a:solidFill>
+                    <a:srgbClr val="6C7688"/>
+                  </a:solidFill>
+                  <a:latin typeface="Calibri"/>
+                </a:rPr>
+                <a:t>i</a:t>
+              </a:r>
+              <a:r>
+                <a:rPr sz="950" b="0" i="0" dirty="0" smtClean="0">
+                  <a:solidFill>
+                    <a:srgbClr val="6C7688"/>
+                  </a:solidFill>
+                  <a:latin typeface="Calibri"/>
+                </a:rPr>
+                <a:t> </a:t>
+              </a:r>
+              <a:r>
+                <a:rPr sz="950" b="0" i="0" dirty="0">
+                  <a:solidFill>
+                    <a:srgbClr val="6C7688"/>
+                  </a:solidFill>
+                  <a:latin typeface="Calibri"/>
+                </a:rPr>
+                <a:t>LED </a:t>
+              </a:r>
+              <a:r>
+                <a:rPr sz="950" b="0" i="0" dirty="0" err="1">
+                  <a:solidFill>
+                    <a:srgbClr val="6C7688"/>
+                  </a:solidFill>
+                  <a:latin typeface="Calibri"/>
+                </a:rPr>
+                <a:t>indikatori</a:t>
+              </a:r>
+              <a:r>
+                <a:rPr sz="950" b="0" i="0" dirty="0">
+                  <a:solidFill>
+                    <a:srgbClr val="6C7688"/>
+                  </a:solidFill>
+                  <a:latin typeface="Calibri"/>
+                </a:rPr>
+                <a:t> </a:t>
+              </a:r>
+              <a:r>
+                <a:rPr sz="950" b="0" i="0" dirty="0" err="1">
+                  <a:solidFill>
+                    <a:srgbClr val="6C7688"/>
+                  </a:solidFill>
+                  <a:latin typeface="Calibri"/>
+                </a:rPr>
+                <a:t>stanja</a:t>
+              </a:r>
+              <a:endParaRPr sz="950" b="0" i="0" dirty="0">
                 <a:solidFill>
                   <a:srgbClr val="6C7688"/>
                 </a:solidFill>
                 <a:latin typeface="Calibri"/>
-              </a:rPr>
-              <a:t>Block dijagram PC_HMI_Lift.vi:</a:t>
-            </a:r>
-          </a:p>
-          <a:p>
-            <a:pPr algn="ctr">
-              <a:lnSpc>
-                <a:spcPct val="100000"/>
-              </a:lnSpc>
-              <a:spcBef>
-                <a:spcPts val="0"/>
-              </a:spcBef>
-              <a:spcAft>
-                <a:spcPts val="200"/>
-              </a:spcAft>
-            </a:pPr>
-            <a:r>
-              <a:rPr sz="950" b="0" i="0">
-                <a:solidFill>
-                  <a:srgbClr val="6C7688"/>
-                </a:solidFill>
-                <a:latin typeface="Calibri"/>
-              </a:rPr>
-              <a:t>Event struktura za dugmad</a:t>
-            </a:r>
-          </a:p>
-          <a:p>
-            <a:pPr algn="ctr">
-              <a:lnSpc>
-                <a:spcPct val="100000"/>
-              </a:lnSpc>
-              <a:spcBef>
-                <a:spcPts val="0"/>
-              </a:spcBef>
-              <a:spcAft>
-                <a:spcPts val="200"/>
-              </a:spcAft>
-            </a:pPr>
-            <a:r>
-              <a:rPr sz="950" b="0" i="0">
-                <a:solidFill>
-                  <a:srgbClr val="6C7688"/>
-                </a:solidFill>
-                <a:latin typeface="Calibri"/>
-              </a:rPr>
-              <a:t>i petlja za osvežavanje prikaza</a:t>
-            </a:r>
-          </a:p>
-        </p:txBody>
-      </p:sp>
+              </a:endParaRPr>
+            </a:p>
+          </p:txBody>
+        </p:sp>
+        <p:pic>
+          <p:nvPicPr>
+            <p:cNvPr id="2050" name="Picture 2"/>
+            <p:cNvPicPr>
+              <a:picLocks noChangeAspect="1" noChangeArrowheads="1"/>
+            </p:cNvPicPr>
+            <p:nvPr/>
+          </p:nvPicPr>
+          <p:blipFill>
+            <a:blip r:embed="rId3">
+              <a:extLst>
+                <a:ext uri="{28A0092B-C50C-407E-A947-70E740481C1C}">
+                  <a14:useLocalDpi xmlns:a14="http://schemas.microsoft.com/office/drawing/2010/main" val="0"/>
+                </a:ext>
+              </a:extLst>
+            </a:blip>
+            <a:srcRect/>
+            <a:stretch>
+              <a:fillRect/>
+            </a:stretch>
+          </p:blipFill>
+          <p:spPr bwMode="auto">
+            <a:xfrm>
+              <a:off x="5927750" y="1152144"/>
+              <a:ext cx="2971800" cy="3104075"/>
+            </a:xfrm>
+            <a:prstGeom prst="rect">
+              <a:avLst/>
+            </a:prstGeom>
+            <a:noFill/>
+            <a:ln>
+              <a:noFill/>
+            </a:ln>
+            <a:effectLst/>
+            <a:extLst>
+              <a:ext uri="{909E8E84-426E-40DD-AFC4-6F175D3DCCD1}">
+                <a14:hiddenFill xmlns:a14="http://schemas.microsoft.com/office/drawing/2010/main">
+                  <a:solidFill>
+                    <a:schemeClr val="accent1"/>
+                  </a:solidFill>
+                </a14:hiddenFill>
+              </a:ext>
+              <a:ext uri="{91240B29-F687-4F45-9708-019B960494DF}">
+                <a14:hiddenLine xmlns:a14="http://schemas.microsoft.com/office/drawing/2010/main" w="9525">
+                  <a:solidFill>
+                    <a:schemeClr val="tx1"/>
+                  </a:solidFill>
+                  <a:miter lim="800000"/>
+                  <a:headEnd/>
+                  <a:tailEnd/>
+                </a14:hiddenLine>
+              </a:ext>
+              <a:ext uri="{AF507438-7753-43E0-B8FC-AC1667EBCBE1}">
+                <a14:hiddenEffects xmlns:a14="http://schemas.microsoft.com/office/drawing/2010/main">
+                  <a:effectLst>
+                    <a:outerShdw dist="35921" dir="2700000" algn="ctr" rotWithShape="0">
+                      <a:schemeClr val="bg2"/>
+                    </a:outerShdw>
+                  </a:effectLst>
+                </a14:hiddenEffects>
+              </a:ext>
+            </a:extLst>
+          </p:spPr>
+        </p:pic>
+      </p:grpSp>
     </p:spTree>
   </p:cSld>
   <p:clrMapOvr>
     <a:masterClrMapping/>
   </p:clrMapOvr>
+  <p:timing>
+    <p:tnLst>
+      <p:par>
+        <p:cTn id="1" dur="indefinite" restart="never" nodeType="tmRoot"/>
+      </p:par>
+    </p:tnLst>
+  </p:timing>
 </p:sld>
 </file>
 
@@ -6817,7 +8174,7 @@
                 </a:solidFill>
                 <a:latin typeface="Poppins"/>
               </a:rPr>
-              <a:t>KONTROLISANO GAŠENJE</a:t>
+              <a:t>KORISNIČKI PANEL · IMPLEMENTACIJA</a:t>
             </a:r>
           </a:p>
         </p:txBody>
@@ -6862,7 +8219,7 @@
                 </a:solidFill>
                 <a:latin typeface="Poppins"/>
               </a:rPr>
-              <a:t>Bezbednost i završetak programa</a:t>
+              <a:t>Kako panel radi</a:t>
             </a:r>
           </a:p>
         </p:txBody>
@@ -6907,7 +8264,7 @@
                 </a:solidFill>
                 <a:latin typeface="Poppins"/>
               </a:rPr>
-              <a:t>11</a:t>
+              <a:t>10</a:t>
             </a:r>
           </a:p>
         </p:txBody>
@@ -6920,8 +8277,8 @@
         </p:nvSpPr>
         <p:spPr>
           <a:xfrm>
-            <a:off x="749808" y="1417320"/>
-            <a:ext cx="4160520" cy="3200400"/>
+            <a:off x="749806" y="1062759"/>
+            <a:ext cx="7946323" cy="2332946"/>
           </a:xfrm>
           <a:prstGeom prst="rect">
             <a:avLst/>
@@ -6936,17 +8293,17 @@
           <a:p>
             <a:pPr>
               <a:lnSpc>
-                <a:spcPct val="107000"/>
+                <a:spcPct val="106000"/>
               </a:lnSpc>
               <a:spcBef>
                 <a:spcPts val="0"/>
               </a:spcBef>
               <a:spcAft>
-                <a:spcPts val="1100"/>
+                <a:spcPts val="1000"/>
               </a:spcAft>
             </a:pPr>
             <a:r>
-              <a:rPr sz="1150" b="1" i="0">
+              <a:rPr sz="1100" b="1" i="0" dirty="0">
                 <a:solidFill>
                   <a:srgbClr val="0E7C86"/>
                 </a:solidFill>
@@ -6955,38 +8312,155 @@
               <a:t>•  </a:t>
             </a:r>
             <a:r>
-              <a:rPr sz="1150" b="1" i="0">
+              <a:rPr sz="1100" b="1" i="0" dirty="0">
                 <a:solidFill>
                   <a:srgbClr val="17223B"/>
                 </a:solidFill>
                 <a:latin typeface="Calibri"/>
               </a:rPr>
-              <a:t>Sistem se zaustavlja preko </a:t>
-            </a:r>
-            <a:r>
-              <a:rPr sz="1150" b="0" i="0">
-                <a:solidFill>
-                  <a:srgbClr val="3A4763"/>
-                </a:solidFill>
-                <a:latin typeface="Calibri"/>
-              </a:rPr>
-              <a:t>Guard Clause mehanizma: pritiskom na Stop ili usled greške automat prelazi u Shutdown.</a:t>
+              <a:t>Panel </a:t>
+            </a:r>
+            <a:r>
+              <a:rPr sz="1100" b="1" i="0" dirty="0" err="1">
+                <a:solidFill>
+                  <a:srgbClr val="17223B"/>
+                </a:solidFill>
+                <a:latin typeface="Calibri"/>
+              </a:rPr>
+              <a:t>čine</a:t>
+            </a:r>
+            <a:r>
+              <a:rPr sz="1100" b="1" i="0" dirty="0">
+                <a:solidFill>
+                  <a:srgbClr val="17223B"/>
+                </a:solidFill>
+                <a:latin typeface="Calibri"/>
+              </a:rPr>
+              <a:t> </a:t>
+            </a:r>
+            <a:r>
+              <a:rPr sz="1100" b="0" i="0" dirty="0" err="1">
+                <a:solidFill>
+                  <a:srgbClr val="3A4763"/>
+                </a:solidFill>
+                <a:latin typeface="Calibri"/>
+              </a:rPr>
+              <a:t>dve</a:t>
+            </a:r>
+            <a:r>
+              <a:rPr sz="1100" b="0" i="0" dirty="0">
+                <a:solidFill>
+                  <a:srgbClr val="3A4763"/>
+                </a:solidFill>
+                <a:latin typeface="Calibri"/>
+              </a:rPr>
+              <a:t> </a:t>
+            </a:r>
+            <a:r>
+              <a:rPr sz="1100" b="0" i="0" dirty="0" err="1">
+                <a:solidFill>
+                  <a:srgbClr val="3A4763"/>
+                </a:solidFill>
+                <a:latin typeface="Calibri"/>
+              </a:rPr>
+              <a:t>nezavisne</a:t>
+            </a:r>
+            <a:r>
+              <a:rPr sz="1100" b="0" i="0" dirty="0">
+                <a:solidFill>
+                  <a:srgbClr val="3A4763"/>
+                </a:solidFill>
+                <a:latin typeface="Calibri"/>
+              </a:rPr>
+              <a:t> </a:t>
+            </a:r>
+            <a:r>
+              <a:rPr sz="1100" b="0" i="0" dirty="0" err="1">
+                <a:solidFill>
+                  <a:srgbClr val="3A4763"/>
+                </a:solidFill>
+                <a:latin typeface="Calibri"/>
+              </a:rPr>
+              <a:t>petlje</a:t>
+            </a:r>
+            <a:r>
+              <a:rPr sz="1100" b="0" i="0" dirty="0">
+                <a:solidFill>
+                  <a:srgbClr val="3A4763"/>
+                </a:solidFill>
+                <a:latin typeface="Calibri"/>
+              </a:rPr>
+              <a:t> </a:t>
+            </a:r>
+            <a:r>
+              <a:rPr sz="1100" b="0" i="0" dirty="0" err="1">
+                <a:solidFill>
+                  <a:srgbClr val="3A4763"/>
+                </a:solidFill>
+                <a:latin typeface="Calibri"/>
+              </a:rPr>
+              <a:t>koje</a:t>
+            </a:r>
+            <a:r>
+              <a:rPr sz="1100" b="0" i="0" dirty="0">
+                <a:solidFill>
+                  <a:srgbClr val="3A4763"/>
+                </a:solidFill>
+                <a:latin typeface="Calibri"/>
+              </a:rPr>
+              <a:t> </a:t>
+            </a:r>
+            <a:r>
+              <a:rPr sz="1100" b="0" i="0" dirty="0" err="1">
+                <a:solidFill>
+                  <a:srgbClr val="3A4763"/>
+                </a:solidFill>
+                <a:latin typeface="Calibri"/>
+              </a:rPr>
+              <a:t>rade</a:t>
+            </a:r>
+            <a:r>
+              <a:rPr sz="1100" b="0" i="0" dirty="0">
+                <a:solidFill>
+                  <a:srgbClr val="3A4763"/>
+                </a:solidFill>
+                <a:latin typeface="Calibri"/>
+              </a:rPr>
+              <a:t> </a:t>
+            </a:r>
+            <a:r>
+              <a:rPr sz="1100" b="0" i="0" dirty="0" err="1">
+                <a:solidFill>
+                  <a:srgbClr val="3A4763"/>
+                </a:solidFill>
+                <a:latin typeface="Calibri"/>
+              </a:rPr>
+              <a:t>paralelno</a:t>
+            </a:r>
+            <a:r>
+              <a:rPr sz="1100" b="0" i="0" dirty="0">
+                <a:solidFill>
+                  <a:srgbClr val="3A4763"/>
+                </a:solidFill>
+                <a:latin typeface="Calibri"/>
+              </a:rPr>
+              <a:t>.</a:t>
             </a:r>
           </a:p>
           <a:p>
             <a:pPr>
               <a:lnSpc>
-                <a:spcPct val="107000"/>
+                <a:spcPct val="106000"/>
               </a:lnSpc>
               <a:spcBef>
                 <a:spcPts val="0"/>
               </a:spcBef>
               <a:spcAft>
-                <a:spcPts val="1100"/>
+                <a:spcPts val="1000"/>
               </a:spcAft>
             </a:pPr>
             <a:r>
-              <a:rPr sz="1150" b="1" i="0">
+              <a:rPr sz="1100" b="1" i="0" dirty="0">
                 <a:solidFill>
                   <a:srgbClr val="0E7C86"/>
                 </a:solidFill>
@@ -6995,38 +8469,308 @@
               <a:t>•  </a:t>
             </a:r>
             <a:r>
-              <a:rPr sz="1150" b="1" i="0">
-                <a:solidFill>
-                  <a:srgbClr val="17223B"/>
-                </a:solidFill>
-                <a:latin typeface="Calibri"/>
-              </a:rPr>
-              <a:t>Petlja se prekida </a:t>
-            </a:r>
-            <a:r>
-              <a:rPr sz="1150" b="0" i="0">
-                <a:solidFill>
-                  <a:srgbClr val="3A4763"/>
-                </a:solidFill>
-                <a:latin typeface="Calibri"/>
-              </a:rPr>
-              <a:t>kontrolisano, bez naglog gašenja.</a:t>
+              <a:rPr sz="1100" b="0" i="0" dirty="0" err="1">
+                <a:solidFill>
+                  <a:srgbClr val="3A4763"/>
+                </a:solidFill>
+                <a:latin typeface="Calibri"/>
+              </a:rPr>
+              <a:t>Petlja</a:t>
+            </a:r>
+            <a:r>
+              <a:rPr sz="1100" b="0" i="0" dirty="0">
+                <a:solidFill>
+                  <a:srgbClr val="3A4763"/>
+                </a:solidFill>
+                <a:latin typeface="Calibri"/>
+              </a:rPr>
+              <a:t> </a:t>
+            </a:r>
+            <a:r>
+              <a:rPr sz="1100" b="0" i="0" dirty="0" err="1">
+                <a:solidFill>
+                  <a:srgbClr val="3A4763"/>
+                </a:solidFill>
+                <a:latin typeface="Calibri"/>
+              </a:rPr>
+              <a:t>sa</a:t>
+            </a:r>
+            <a:r>
+              <a:rPr sz="1100" b="0" i="0" dirty="0">
+                <a:solidFill>
+                  <a:srgbClr val="3A4763"/>
+                </a:solidFill>
+                <a:latin typeface="Calibri"/>
+              </a:rPr>
+              <a:t> Event </a:t>
+            </a:r>
+            <a:r>
+              <a:rPr sz="1100" b="0" i="0" dirty="0" err="1">
+                <a:solidFill>
+                  <a:srgbClr val="3A4763"/>
+                </a:solidFill>
+                <a:latin typeface="Calibri"/>
+              </a:rPr>
+              <a:t>strukturom</a:t>
+            </a:r>
+            <a:r>
+              <a:rPr sz="1100" b="0" i="0" dirty="0">
+                <a:solidFill>
+                  <a:srgbClr val="3A4763"/>
+                </a:solidFill>
+                <a:latin typeface="Calibri"/>
+              </a:rPr>
+              <a:t>: </a:t>
+            </a:r>
+            <a:r>
+              <a:rPr sz="1100" b="0" i="0" dirty="0" err="1">
+                <a:solidFill>
+                  <a:srgbClr val="3A4763"/>
+                </a:solidFill>
+                <a:latin typeface="Calibri"/>
+              </a:rPr>
+              <a:t>reaguje</a:t>
+            </a:r>
+            <a:r>
+              <a:rPr sz="1100" b="0" i="0" dirty="0">
+                <a:solidFill>
+                  <a:srgbClr val="3A4763"/>
+                </a:solidFill>
+                <a:latin typeface="Calibri"/>
+              </a:rPr>
+              <a:t> </a:t>
+            </a:r>
+            <a:r>
+              <a:rPr sz="1100" b="0" i="0" dirty="0" err="1">
+                <a:solidFill>
+                  <a:srgbClr val="3A4763"/>
+                </a:solidFill>
+                <a:latin typeface="Calibri"/>
+              </a:rPr>
+              <a:t>isključivo</a:t>
+            </a:r>
+            <a:r>
+              <a:rPr sz="1100" b="0" i="0" dirty="0">
+                <a:solidFill>
+                  <a:srgbClr val="3A4763"/>
+                </a:solidFill>
+                <a:latin typeface="Calibri"/>
+              </a:rPr>
+              <a:t> </a:t>
+            </a:r>
+            <a:r>
+              <a:rPr sz="1100" b="0" i="0" dirty="0" err="1">
+                <a:solidFill>
+                  <a:srgbClr val="3A4763"/>
+                </a:solidFill>
+                <a:latin typeface="Calibri"/>
+              </a:rPr>
+              <a:t>na</a:t>
+            </a:r>
+            <a:r>
+              <a:rPr sz="1100" b="0" i="0" dirty="0">
+                <a:solidFill>
+                  <a:srgbClr val="3A4763"/>
+                </a:solidFill>
+                <a:latin typeface="Calibri"/>
+              </a:rPr>
+              <a:t> </a:t>
+            </a:r>
+            <a:r>
+              <a:rPr sz="1100" b="0" i="0" dirty="0" err="1">
+                <a:solidFill>
+                  <a:srgbClr val="3A4763"/>
+                </a:solidFill>
+                <a:latin typeface="Calibri"/>
+              </a:rPr>
+              <a:t>klikove</a:t>
+            </a:r>
+            <a:r>
+              <a:rPr sz="1100" b="0" i="0" dirty="0">
+                <a:solidFill>
+                  <a:srgbClr val="3A4763"/>
+                </a:solidFill>
+                <a:latin typeface="Calibri"/>
+              </a:rPr>
+              <a:t> </a:t>
+            </a:r>
+            <a:r>
+              <a:rPr sz="1100" b="0" i="0" dirty="0" err="1">
+                <a:solidFill>
+                  <a:srgbClr val="3A4763"/>
+                </a:solidFill>
+                <a:latin typeface="Calibri"/>
+              </a:rPr>
+              <a:t>i</a:t>
+            </a:r>
+            <a:r>
+              <a:rPr sz="1100" b="0" i="0" dirty="0">
+                <a:solidFill>
+                  <a:srgbClr val="3A4763"/>
+                </a:solidFill>
+                <a:latin typeface="Calibri"/>
+              </a:rPr>
+              <a:t> </a:t>
+            </a:r>
+            <a:r>
+              <a:rPr sz="1100" b="0" i="0" dirty="0" err="1" smtClean="0">
+                <a:solidFill>
+                  <a:srgbClr val="3A4763"/>
+                </a:solidFill>
+                <a:latin typeface="Calibri"/>
+              </a:rPr>
+              <a:t>upisuje</a:t>
+            </a:r>
+            <a:r>
+              <a:rPr sz="1100" b="0" i="0" dirty="0" smtClean="0">
+                <a:solidFill>
+                  <a:srgbClr val="3A4763"/>
+                </a:solidFill>
+                <a:latin typeface="Calibri"/>
+              </a:rPr>
+              <a:t> </a:t>
+            </a:r>
+            <a:r>
+              <a:rPr sz="1100" b="0" i="0" dirty="0" err="1">
+                <a:solidFill>
+                  <a:srgbClr val="3A4763"/>
+                </a:solidFill>
+                <a:latin typeface="Calibri"/>
+              </a:rPr>
+              <a:t>odgovarajuće</a:t>
+            </a:r>
+            <a:r>
+              <a:rPr sz="1100" b="0" i="0" dirty="0">
+                <a:solidFill>
+                  <a:srgbClr val="3A4763"/>
+                </a:solidFill>
+                <a:latin typeface="Calibri"/>
+              </a:rPr>
+              <a:t> </a:t>
+            </a:r>
+            <a:r>
+              <a:rPr sz="1100" b="0" i="0" dirty="0" err="1">
+                <a:solidFill>
+                  <a:srgbClr val="3A4763"/>
+                </a:solidFill>
+                <a:latin typeface="Calibri"/>
+              </a:rPr>
+              <a:t>komande</a:t>
+            </a:r>
+            <a:r>
+              <a:rPr sz="1100" b="0" i="0" dirty="0">
+                <a:solidFill>
+                  <a:srgbClr val="3A4763"/>
+                </a:solidFill>
+                <a:latin typeface="Calibri"/>
+              </a:rPr>
+              <a:t> </a:t>
+            </a:r>
+            <a:r>
+              <a:rPr sz="1100" b="0" i="0" dirty="0" err="1">
+                <a:solidFill>
+                  <a:srgbClr val="3A4763"/>
+                </a:solidFill>
+                <a:latin typeface="Calibri"/>
+              </a:rPr>
+              <a:t>na</a:t>
+            </a:r>
+            <a:r>
+              <a:rPr sz="1100" b="0" i="0" dirty="0">
+                <a:solidFill>
+                  <a:srgbClr val="3A4763"/>
+                </a:solidFill>
+                <a:latin typeface="Calibri"/>
+              </a:rPr>
+              <a:t> </a:t>
+            </a:r>
+            <a:r>
+              <a:rPr sz="1100" b="0" i="0" dirty="0" err="1">
+                <a:solidFill>
+                  <a:srgbClr val="3A4763"/>
+                </a:solidFill>
+                <a:latin typeface="Calibri"/>
+              </a:rPr>
+              <a:t>mrežu</a:t>
+            </a:r>
+            <a:r>
+              <a:rPr sz="1100" b="0" i="0" dirty="0">
+                <a:solidFill>
+                  <a:srgbClr val="3A4763"/>
+                </a:solidFill>
+                <a:latin typeface="Calibri"/>
+              </a:rPr>
+              <a:t> (</a:t>
+            </a:r>
+            <a:r>
+              <a:rPr sz="1100" b="0" i="0" dirty="0" err="1">
+                <a:solidFill>
+                  <a:srgbClr val="3A4763"/>
+                </a:solidFill>
+                <a:latin typeface="Calibri"/>
+              </a:rPr>
+              <a:t>CiljniSprat</a:t>
+            </a:r>
+            <a:r>
+              <a:rPr sz="1100" b="0" i="0" dirty="0">
+                <a:solidFill>
+                  <a:srgbClr val="3A4763"/>
+                </a:solidFill>
+                <a:latin typeface="Calibri"/>
+              </a:rPr>
+              <a:t>, </a:t>
+            </a:r>
+            <a:r>
+              <a:rPr sz="1100" b="0" i="0" dirty="0" err="1">
+                <a:solidFill>
+                  <a:srgbClr val="3A4763"/>
+                </a:solidFill>
+                <a:latin typeface="Calibri"/>
+              </a:rPr>
+              <a:t>poziv</a:t>
+            </a:r>
+            <a:r>
+              <a:rPr sz="1100" b="0" i="0" dirty="0">
+                <a:solidFill>
+                  <a:srgbClr val="3A4763"/>
+                </a:solidFill>
+                <a:latin typeface="Calibri"/>
+              </a:rPr>
+              <a:t>, </a:t>
+            </a:r>
+            <a:r>
+              <a:rPr sz="1100" b="0" i="0" dirty="0" err="1">
+                <a:solidFill>
+                  <a:srgbClr val="3A4763"/>
+                </a:solidFill>
+                <a:latin typeface="Calibri"/>
+              </a:rPr>
+              <a:t>smer</a:t>
+            </a:r>
+            <a:r>
+              <a:rPr sz="1100" b="0" i="0" dirty="0">
+                <a:solidFill>
+                  <a:srgbClr val="3A4763"/>
+                </a:solidFill>
+                <a:latin typeface="Calibri"/>
+              </a:rPr>
+              <a:t>, Stop).</a:t>
             </a:r>
           </a:p>
           <a:p>
             <a:pPr>
               <a:lnSpc>
-                <a:spcPct val="107000"/>
+                <a:spcPct val="106000"/>
               </a:lnSpc>
               <a:spcBef>
                 <a:spcPts val="0"/>
               </a:spcBef>
               <a:spcAft>
-                <a:spcPts val="1100"/>
+                <a:spcPts val="1000"/>
               </a:spcAft>
             </a:pPr>
             <a:r>
-              <a:rPr sz="1150" b="1" i="0">
+              <a:rPr sz="1100" b="1" i="0" dirty="0">
                 <a:solidFill>
                   <a:srgbClr val="0E7C86"/>
                 </a:solidFill>
@@ -7035,89 +8779,728 @@
               <a:t>•  </a:t>
             </a:r>
             <a:r>
-              <a:rPr sz="1150" b="1" i="0">
+              <a:rPr sz="1100" b="0" i="0" dirty="0" err="1">
+                <a:solidFill>
+                  <a:srgbClr val="3A4763"/>
+                </a:solidFill>
+                <a:latin typeface="Calibri"/>
+              </a:rPr>
+              <a:t>Petlja</a:t>
+            </a:r>
+            <a:r>
+              <a:rPr sz="1100" b="0" i="0" dirty="0">
+                <a:solidFill>
+                  <a:srgbClr val="3A4763"/>
+                </a:solidFill>
+                <a:latin typeface="Calibri"/>
+              </a:rPr>
+              <a:t> </a:t>
+            </a:r>
+            <a:r>
+              <a:rPr sz="1100" b="0" i="0" dirty="0" err="1">
+                <a:solidFill>
+                  <a:srgbClr val="3A4763"/>
+                </a:solidFill>
+                <a:latin typeface="Calibri"/>
+              </a:rPr>
+              <a:t>za</a:t>
+            </a:r>
+            <a:r>
+              <a:rPr sz="1100" b="0" i="0" dirty="0">
+                <a:solidFill>
+                  <a:srgbClr val="3A4763"/>
+                </a:solidFill>
+                <a:latin typeface="Calibri"/>
+              </a:rPr>
+              <a:t> </a:t>
+            </a:r>
+            <a:r>
+              <a:rPr sz="1100" b="0" i="0" dirty="0" err="1">
+                <a:solidFill>
+                  <a:srgbClr val="3A4763"/>
+                </a:solidFill>
+                <a:latin typeface="Calibri"/>
+              </a:rPr>
+              <a:t>osvežavanje</a:t>
+            </a:r>
+            <a:r>
+              <a:rPr sz="1100" b="0" i="0" dirty="0">
+                <a:solidFill>
+                  <a:srgbClr val="3A4763"/>
+                </a:solidFill>
+                <a:latin typeface="Calibri"/>
+              </a:rPr>
+              <a:t>: bez Event </a:t>
+            </a:r>
+            <a:r>
+              <a:rPr sz="1100" b="0" i="0" dirty="0" err="1">
+                <a:solidFill>
+                  <a:srgbClr val="3A4763"/>
+                </a:solidFill>
+                <a:latin typeface="Calibri"/>
+              </a:rPr>
+              <a:t>strukture</a:t>
+            </a:r>
+            <a:r>
+              <a:rPr sz="1100" b="0" i="0" dirty="0">
+                <a:solidFill>
+                  <a:srgbClr val="3A4763"/>
+                </a:solidFill>
+                <a:latin typeface="Calibri"/>
+              </a:rPr>
+              <a:t>, </a:t>
+            </a:r>
+            <a:endParaRPr lang="sr-Latn-RS" sz="1100" b="0" i="0" dirty="0" smtClean="0">
+              <a:solidFill>
+                <a:srgbClr val="3A4763"/>
+              </a:solidFill>
+              <a:latin typeface="Calibri"/>
+            </a:endParaRPr>
+          </a:p>
+          <a:p>
+            <a:pPr>
+              <a:lnSpc>
+                <a:spcPct val="106000"/>
+              </a:lnSpc>
+              <a:spcBef>
+                <a:spcPts val="0"/>
+              </a:spcBef>
+              <a:spcAft>
+                <a:spcPts val="1000"/>
+              </a:spcAft>
+            </a:pPr>
+            <a:r>
+              <a:rPr lang="sr-Latn-RS" sz="1100" b="0" i="0" dirty="0" smtClean="0">
+                <a:solidFill>
+                  <a:srgbClr val="3A4763"/>
+                </a:solidFill>
+                <a:latin typeface="Calibri"/>
+              </a:rPr>
+              <a:t>    </a:t>
+            </a:r>
+            <a:r>
+              <a:rPr sz="1100" b="0" i="0" dirty="0" err="1" smtClean="0">
+                <a:solidFill>
+                  <a:srgbClr val="3A4763"/>
+                </a:solidFill>
+                <a:latin typeface="Calibri"/>
+              </a:rPr>
+              <a:t>neprekidno</a:t>
+            </a:r>
+            <a:r>
+              <a:rPr sz="1100" b="0" i="0" dirty="0" smtClean="0">
+                <a:solidFill>
+                  <a:srgbClr val="3A4763"/>
+                </a:solidFill>
+                <a:latin typeface="Calibri"/>
+              </a:rPr>
+              <a:t> </a:t>
+            </a:r>
+            <a:r>
+              <a:rPr sz="1100" b="0" i="0" dirty="0" err="1">
+                <a:solidFill>
+                  <a:srgbClr val="3A4763"/>
+                </a:solidFill>
+                <a:latin typeface="Calibri"/>
+              </a:rPr>
+              <a:t>čita</a:t>
+            </a:r>
+            <a:r>
+              <a:rPr sz="1100" b="0" i="0" dirty="0">
+                <a:solidFill>
+                  <a:srgbClr val="3A4763"/>
+                </a:solidFill>
+                <a:latin typeface="Calibri"/>
+              </a:rPr>
+              <a:t> </a:t>
+            </a:r>
+            <a:r>
+              <a:rPr sz="1100" b="0" i="0" dirty="0" err="1">
+                <a:solidFill>
+                  <a:srgbClr val="3A4763"/>
+                </a:solidFill>
+                <a:latin typeface="Calibri"/>
+              </a:rPr>
+              <a:t>poziciju</a:t>
+            </a:r>
+            <a:r>
+              <a:rPr sz="1100" b="0" i="0" dirty="0">
+                <a:solidFill>
+                  <a:srgbClr val="3A4763"/>
+                </a:solidFill>
+                <a:latin typeface="Calibri"/>
+              </a:rPr>
+              <a:t> </a:t>
+            </a:r>
+            <a:r>
+              <a:rPr sz="1100" b="0" i="0" dirty="0" err="1" smtClean="0">
+                <a:solidFill>
+                  <a:srgbClr val="3A4763"/>
+                </a:solidFill>
+                <a:latin typeface="Calibri"/>
+              </a:rPr>
+              <a:t>i</a:t>
+            </a:r>
+            <a:r>
+              <a:rPr sz="1100" b="0" i="0" dirty="0" smtClean="0">
+                <a:solidFill>
+                  <a:srgbClr val="3A4763"/>
+                </a:solidFill>
+                <a:latin typeface="Calibri"/>
+              </a:rPr>
+              <a:t> </a:t>
+            </a:r>
+            <a:r>
+              <a:rPr sz="1100" b="0" i="0" dirty="0" err="1">
+                <a:solidFill>
+                  <a:srgbClr val="3A4763"/>
+                </a:solidFill>
+                <a:latin typeface="Calibri"/>
+              </a:rPr>
+              <a:t>stanje</a:t>
+            </a:r>
+            <a:r>
+              <a:rPr sz="1100" b="0" i="0" dirty="0">
+                <a:solidFill>
+                  <a:srgbClr val="3A4763"/>
+                </a:solidFill>
+                <a:latin typeface="Calibri"/>
+              </a:rPr>
+              <a:t> </a:t>
+            </a:r>
+            <a:r>
+              <a:rPr sz="1100" b="0" i="0" dirty="0" err="1">
+                <a:solidFill>
+                  <a:srgbClr val="3A4763"/>
+                </a:solidFill>
+                <a:latin typeface="Calibri"/>
+              </a:rPr>
+              <a:t>sa</a:t>
+            </a:r>
+            <a:r>
+              <a:rPr sz="1100" b="0" i="0" dirty="0">
+                <a:solidFill>
+                  <a:srgbClr val="3A4763"/>
+                </a:solidFill>
+                <a:latin typeface="Calibri"/>
+              </a:rPr>
+              <a:t> </a:t>
+            </a:r>
+            <a:r>
+              <a:rPr sz="1100" b="0" i="0" dirty="0" err="1">
+                <a:solidFill>
+                  <a:srgbClr val="3A4763"/>
+                </a:solidFill>
+                <a:latin typeface="Calibri"/>
+              </a:rPr>
+              <a:t>mreže</a:t>
+            </a:r>
+            <a:r>
+              <a:rPr sz="1100" b="0" i="0" dirty="0">
+                <a:solidFill>
+                  <a:srgbClr val="3A4763"/>
+                </a:solidFill>
+                <a:latin typeface="Calibri"/>
+              </a:rPr>
+              <a:t> </a:t>
+            </a:r>
+            <a:r>
+              <a:rPr sz="1100" b="0" i="0" dirty="0" err="1">
+                <a:solidFill>
+                  <a:srgbClr val="3A4763"/>
+                </a:solidFill>
+                <a:latin typeface="Calibri"/>
+              </a:rPr>
+              <a:t>i</a:t>
+            </a:r>
+            <a:r>
+              <a:rPr sz="1100" b="0" i="0" dirty="0">
+                <a:solidFill>
+                  <a:srgbClr val="3A4763"/>
+                </a:solidFill>
+                <a:latin typeface="Calibri"/>
+              </a:rPr>
+              <a:t> </a:t>
+            </a:r>
+            <a:endParaRPr lang="sr-Latn-RS" sz="1100" b="0" i="0" dirty="0" smtClean="0">
+              <a:solidFill>
+                <a:srgbClr val="3A4763"/>
+              </a:solidFill>
+              <a:latin typeface="Calibri"/>
+            </a:endParaRPr>
+          </a:p>
+          <a:p>
+            <a:pPr>
+              <a:lnSpc>
+                <a:spcPct val="106000"/>
+              </a:lnSpc>
+              <a:spcBef>
+                <a:spcPts val="0"/>
+              </a:spcBef>
+              <a:spcAft>
+                <a:spcPts val="1000"/>
+              </a:spcAft>
+            </a:pPr>
+            <a:r>
+              <a:rPr lang="sr-Latn-RS" sz="1100" b="0" i="0" dirty="0" smtClean="0">
+                <a:solidFill>
+                  <a:srgbClr val="3A4763"/>
+                </a:solidFill>
+                <a:latin typeface="Calibri"/>
+              </a:rPr>
+              <a:t>    </a:t>
+            </a:r>
+            <a:r>
+              <a:rPr sz="1100" b="0" i="0" dirty="0" err="1" smtClean="0">
+                <a:solidFill>
+                  <a:srgbClr val="3A4763"/>
+                </a:solidFill>
+                <a:latin typeface="Calibri"/>
+              </a:rPr>
+              <a:t>osvežava</a:t>
+            </a:r>
+            <a:r>
+              <a:rPr sz="1100" b="0" i="0" dirty="0" smtClean="0">
+                <a:solidFill>
+                  <a:srgbClr val="3A4763"/>
+                </a:solidFill>
+                <a:latin typeface="Calibri"/>
+              </a:rPr>
+              <a:t> </a:t>
+            </a:r>
+            <a:r>
+              <a:rPr sz="1100" b="0" i="0" dirty="0" err="1">
+                <a:solidFill>
+                  <a:srgbClr val="3A4763"/>
+                </a:solidFill>
+                <a:latin typeface="Calibri"/>
+              </a:rPr>
+              <a:t>grafik</a:t>
+            </a:r>
+            <a:r>
+              <a:rPr sz="1100" b="0" i="0" dirty="0">
+                <a:solidFill>
+                  <a:srgbClr val="3A4763"/>
+                </a:solidFill>
+                <a:latin typeface="Calibri"/>
+              </a:rPr>
+              <a:t> </a:t>
+            </a:r>
+            <a:r>
+              <a:rPr sz="1100" b="0" i="0" dirty="0" err="1">
+                <a:solidFill>
+                  <a:srgbClr val="3A4763"/>
+                </a:solidFill>
+                <a:latin typeface="Calibri"/>
+              </a:rPr>
+              <a:t>i</a:t>
+            </a:r>
+            <a:r>
+              <a:rPr sz="1100" b="0" i="0" dirty="0">
+                <a:solidFill>
+                  <a:srgbClr val="3A4763"/>
+                </a:solidFill>
+                <a:latin typeface="Calibri"/>
+              </a:rPr>
+              <a:t> LED </a:t>
+            </a:r>
+            <a:r>
+              <a:rPr sz="1100" b="0" i="0" dirty="0" err="1">
+                <a:solidFill>
+                  <a:srgbClr val="3A4763"/>
+                </a:solidFill>
+                <a:latin typeface="Calibri"/>
+              </a:rPr>
+              <a:t>indikatore</a:t>
+            </a:r>
+            <a:r>
+              <a:rPr sz="1100" b="0" i="0" dirty="0">
+                <a:solidFill>
+                  <a:srgbClr val="3A4763"/>
+                </a:solidFill>
+                <a:latin typeface="Calibri"/>
+              </a:rPr>
+              <a:t>.</a:t>
+            </a:r>
+          </a:p>
+          <a:p>
+            <a:pPr>
+              <a:lnSpc>
+                <a:spcPct val="106000"/>
+              </a:lnSpc>
+              <a:spcBef>
+                <a:spcPts val="0"/>
+              </a:spcBef>
+              <a:spcAft>
+                <a:spcPts val="1000"/>
+              </a:spcAft>
+            </a:pPr>
+            <a:r>
+              <a:rPr sz="1100" b="1" i="0" dirty="0">
+                <a:solidFill>
+                  <a:srgbClr val="0E7C86"/>
+                </a:solidFill>
+                <a:latin typeface="Calibri"/>
+              </a:rPr>
+              <a:t>•  </a:t>
+            </a:r>
+            <a:r>
+              <a:rPr sz="1100" b="1" i="0" dirty="0" err="1">
                 <a:solidFill>
                   <a:srgbClr val="17223B"/>
                 </a:solidFill>
                 <a:latin typeface="Calibri"/>
               </a:rPr>
-              <a:t>Deljene promenljive ostaju </a:t>
-            </a:r>
-            <a:r>
-              <a:rPr sz="1150" b="0" i="0">
-                <a:solidFill>
-                  <a:srgbClr val="3A4763"/>
-                </a:solidFill>
-                <a:latin typeface="Calibri"/>
-              </a:rPr>
-              <a:t>konzistentne: pošto server pamti poslednju vrednost, Shutdown prvo postavi u = 0 i zaustavi kretanje, pa se tek onda petlja gasi, da na mreži ne ostanu zaostale (npr. u različito od nule) ili protivrečne vrednosti.</a:t>
-            </a:r>
-          </a:p>
-        </p:txBody>
-      </p:sp>
-      <p:sp>
-        <p:nvSpPr>
-          <p:cNvPr id="8" name="Rounded Rectangle 7"/>
-          <p:cNvSpPr/>
-          <p:nvPr/>
-        </p:nvSpPr>
-        <p:spPr>
-          <a:xfrm>
-            <a:off x="5120640" y="1417320"/>
-            <a:ext cx="3291840" cy="603504"/>
-          </a:xfrm>
-          <a:prstGeom prst="roundRect">
-            <a:avLst>
-              <a:gd name="adj" fmla="val 12000"/>
-            </a:avLst>
-          </a:prstGeom>
-          <a:solidFill>
-            <a:srgbClr val="FBE9E4"/>
-          </a:solidFill>
-          <a:ln>
-            <a:noFill/>
-          </a:ln>
-          <a:effectLst>
-            <a:outerShdw blurRad="90000" dist="38100" dir="5400000" rotWithShape="0">
-              <a:srgbClr val="9BA6B2">
-                <a:alpha val="38000"/>
-              </a:srgbClr>
-            </a:outerShdw>
-          </a:effectLst>
-        </p:spPr>
-        <p:style>
-          <a:lnRef idx="1">
-            <a:schemeClr val="accent1"/>
-          </a:lnRef>
-          <a:fillRef idx="3">
-            <a:schemeClr val="accent1"/>
-          </a:fillRef>
-          <a:effectRef idx="2">
-            <a:schemeClr val="accent1"/>
-          </a:effectRef>
-          <a:fontRef idx="minor">
-            <a:schemeClr val="lt1"/>
-          </a:fontRef>
-        </p:style>
-        <p:txBody>
-          <a:bodyPr rtlCol="0" anchor="ctr"/>
-          <a:lstStyle/>
-          <a:p>
-            <a:pPr algn="ctr"/>
-            <a:endParaRPr/>
-          </a:p>
-        </p:txBody>
-      </p:sp>
-      <p:sp>
-        <p:nvSpPr>
-          <p:cNvPr id="9" name="TextBox 8"/>
+              <a:t>Zašto</a:t>
+            </a:r>
+            <a:r>
+              <a:rPr sz="1100" b="1" i="0" dirty="0">
+                <a:solidFill>
+                  <a:srgbClr val="17223B"/>
+                </a:solidFill>
+                <a:latin typeface="Calibri"/>
+              </a:rPr>
+              <a:t> </a:t>
+            </a:r>
+            <a:r>
+              <a:rPr sz="1100" b="1" i="0" dirty="0" err="1">
+                <a:solidFill>
+                  <a:srgbClr val="17223B"/>
+                </a:solidFill>
+                <a:latin typeface="Calibri"/>
+              </a:rPr>
+              <a:t>dve</a:t>
+            </a:r>
+            <a:r>
+              <a:rPr sz="1100" b="1" i="0" dirty="0">
+                <a:solidFill>
+                  <a:srgbClr val="17223B"/>
+                </a:solidFill>
+                <a:latin typeface="Calibri"/>
+              </a:rPr>
+              <a:t> </a:t>
+            </a:r>
+            <a:r>
+              <a:rPr sz="1100" b="1" i="0" dirty="0" err="1">
+                <a:solidFill>
+                  <a:srgbClr val="17223B"/>
+                </a:solidFill>
+                <a:latin typeface="Calibri"/>
+              </a:rPr>
+              <a:t>petlje</a:t>
+            </a:r>
+            <a:r>
+              <a:rPr sz="1100" b="1" i="0" dirty="0">
+                <a:solidFill>
+                  <a:srgbClr val="17223B"/>
+                </a:solidFill>
+                <a:latin typeface="Calibri"/>
+              </a:rPr>
+              <a:t>: </a:t>
+            </a:r>
+            <a:r>
+              <a:rPr sz="1100" b="0" i="0" dirty="0" err="1">
+                <a:solidFill>
+                  <a:srgbClr val="3A4763"/>
+                </a:solidFill>
+                <a:latin typeface="Calibri"/>
+              </a:rPr>
+              <a:t>prikaz</a:t>
+            </a:r>
+            <a:r>
+              <a:rPr sz="1100" b="0" i="0" dirty="0">
+                <a:solidFill>
+                  <a:srgbClr val="3A4763"/>
+                </a:solidFill>
+                <a:latin typeface="Calibri"/>
+              </a:rPr>
+              <a:t> </a:t>
+            </a:r>
+            <a:r>
+              <a:rPr sz="1100" b="0" i="0" dirty="0" err="1">
+                <a:solidFill>
+                  <a:srgbClr val="3A4763"/>
+                </a:solidFill>
+                <a:latin typeface="Calibri"/>
+              </a:rPr>
+              <a:t>ostaje</a:t>
+            </a:r>
+            <a:r>
+              <a:rPr sz="1100" b="0" i="0" dirty="0">
+                <a:solidFill>
+                  <a:srgbClr val="3A4763"/>
+                </a:solidFill>
+                <a:latin typeface="Calibri"/>
+              </a:rPr>
+              <a:t> </a:t>
+            </a:r>
+            <a:r>
+              <a:rPr sz="1100" b="0" i="0" dirty="0" err="1">
+                <a:solidFill>
+                  <a:srgbClr val="3A4763"/>
+                </a:solidFill>
+                <a:latin typeface="Calibri"/>
+              </a:rPr>
+              <a:t>gladak</a:t>
+            </a:r>
+            <a:r>
+              <a:rPr sz="1100" b="0" i="0" dirty="0">
+                <a:solidFill>
+                  <a:srgbClr val="3A4763"/>
+                </a:solidFill>
+                <a:latin typeface="Calibri"/>
+              </a:rPr>
+              <a:t> </a:t>
+            </a:r>
+            <a:r>
+              <a:rPr sz="1100" b="0" i="0" dirty="0" err="1">
+                <a:solidFill>
+                  <a:srgbClr val="3A4763"/>
+                </a:solidFill>
+                <a:latin typeface="Calibri"/>
+              </a:rPr>
+              <a:t>i</a:t>
+            </a:r>
+            <a:r>
+              <a:rPr sz="1100" b="0" i="0" dirty="0">
+                <a:solidFill>
+                  <a:srgbClr val="3A4763"/>
+                </a:solidFill>
+                <a:latin typeface="Calibri"/>
+              </a:rPr>
+              <a:t> </a:t>
+            </a:r>
+            <a:r>
+              <a:rPr sz="1100" b="0" i="0" dirty="0" err="1">
+                <a:solidFill>
+                  <a:srgbClr val="3A4763"/>
+                </a:solidFill>
+                <a:latin typeface="Calibri"/>
+              </a:rPr>
+              <a:t>ažuran</a:t>
+            </a:r>
+            <a:r>
+              <a:rPr sz="1100" b="0" i="0" dirty="0">
+                <a:solidFill>
+                  <a:srgbClr val="3A4763"/>
+                </a:solidFill>
+                <a:latin typeface="Calibri"/>
+              </a:rPr>
+              <a:t> u </a:t>
+            </a:r>
+            <a:endParaRPr lang="sr-Latn-RS" sz="1100" b="0" i="0" dirty="0" smtClean="0">
+              <a:solidFill>
+                <a:srgbClr val="3A4763"/>
+              </a:solidFill>
+              <a:latin typeface="Calibri"/>
+            </a:endParaRPr>
+          </a:p>
+          <a:p>
+            <a:pPr>
+              <a:lnSpc>
+                <a:spcPct val="106000"/>
+              </a:lnSpc>
+              <a:spcBef>
+                <a:spcPts val="0"/>
+              </a:spcBef>
+              <a:spcAft>
+                <a:spcPts val="1000"/>
+              </a:spcAft>
+            </a:pPr>
+            <a:r>
+              <a:rPr lang="sr-Latn-RS" sz="1100" dirty="0">
+                <a:solidFill>
+                  <a:srgbClr val="3A4763"/>
+                </a:solidFill>
+                <a:latin typeface="Calibri"/>
+              </a:rPr>
+              <a:t> </a:t>
+            </a:r>
+            <a:r>
+              <a:rPr lang="sr-Latn-RS" sz="1100" dirty="0" smtClean="0">
+                <a:solidFill>
+                  <a:srgbClr val="3A4763"/>
+                </a:solidFill>
+                <a:latin typeface="Calibri"/>
+              </a:rPr>
+              <a:t>   </a:t>
+            </a:r>
+            <a:r>
+              <a:rPr sz="1100" b="0" i="0" dirty="0" err="1" smtClean="0">
+                <a:solidFill>
+                  <a:srgbClr val="3A4763"/>
+                </a:solidFill>
+                <a:latin typeface="Calibri"/>
+              </a:rPr>
+              <a:t>realnom</a:t>
+            </a:r>
+            <a:r>
+              <a:rPr sz="1100" b="0" i="0" dirty="0" smtClean="0">
+                <a:solidFill>
+                  <a:srgbClr val="3A4763"/>
+                </a:solidFill>
+                <a:latin typeface="Calibri"/>
+              </a:rPr>
+              <a:t> </a:t>
+            </a:r>
+            <a:r>
+              <a:rPr sz="1100" b="0" i="0" dirty="0" err="1">
+                <a:solidFill>
+                  <a:srgbClr val="3A4763"/>
+                </a:solidFill>
+                <a:latin typeface="Calibri"/>
+              </a:rPr>
+              <a:t>vremenu</a:t>
+            </a:r>
+            <a:r>
+              <a:rPr sz="1100" b="0" i="0" dirty="0">
+                <a:solidFill>
+                  <a:srgbClr val="3A4763"/>
+                </a:solidFill>
+                <a:latin typeface="Calibri"/>
+              </a:rPr>
+              <a:t>, </a:t>
+            </a:r>
+            <a:r>
+              <a:rPr sz="1100" b="0" i="0" dirty="0" err="1">
+                <a:solidFill>
+                  <a:srgbClr val="3A4763"/>
+                </a:solidFill>
+                <a:latin typeface="Calibri"/>
+              </a:rPr>
+              <a:t>nezavisno</a:t>
+            </a:r>
+            <a:r>
+              <a:rPr sz="1100" b="0" i="0" dirty="0">
+                <a:solidFill>
+                  <a:srgbClr val="3A4763"/>
+                </a:solidFill>
+                <a:latin typeface="Calibri"/>
+              </a:rPr>
+              <a:t> od toga da li </a:t>
+            </a:r>
+            <a:endParaRPr lang="sr-Latn-RS" sz="1100" b="0" i="0" dirty="0" smtClean="0">
+              <a:solidFill>
+                <a:srgbClr val="3A4763"/>
+              </a:solidFill>
+              <a:latin typeface="Calibri"/>
+            </a:endParaRPr>
+          </a:p>
+          <a:p>
+            <a:pPr>
+              <a:lnSpc>
+                <a:spcPct val="106000"/>
+              </a:lnSpc>
+              <a:spcBef>
+                <a:spcPts val="0"/>
+              </a:spcBef>
+              <a:spcAft>
+                <a:spcPts val="1000"/>
+              </a:spcAft>
+            </a:pPr>
+            <a:r>
+              <a:rPr lang="sr-Latn-RS" sz="1100" b="0" i="0" dirty="0" smtClean="0">
+                <a:solidFill>
+                  <a:srgbClr val="3A4763"/>
+                </a:solidFill>
+                <a:latin typeface="Calibri"/>
+              </a:rPr>
+              <a:t>    </a:t>
+            </a:r>
+            <a:r>
+              <a:rPr sz="1100" b="0" i="0" dirty="0" err="1" smtClean="0">
+                <a:solidFill>
+                  <a:srgbClr val="3A4763"/>
+                </a:solidFill>
+                <a:latin typeface="Calibri"/>
+              </a:rPr>
+              <a:t>korisnik</a:t>
+            </a:r>
+            <a:r>
+              <a:rPr sz="1100" b="0" i="0" dirty="0" smtClean="0">
+                <a:solidFill>
+                  <a:srgbClr val="3A4763"/>
+                </a:solidFill>
+                <a:latin typeface="Calibri"/>
+              </a:rPr>
+              <a:t> </a:t>
+            </a:r>
+            <a:r>
+              <a:rPr lang="sr-Latn-RS" sz="1100" dirty="0" smtClean="0">
+                <a:solidFill>
+                  <a:srgbClr val="3A4763"/>
+                </a:solidFill>
+                <a:latin typeface="Calibri"/>
+              </a:rPr>
+              <a:t> </a:t>
+            </a:r>
+            <a:r>
+              <a:rPr sz="1100" b="0" i="0" dirty="0" smtClean="0">
+                <a:solidFill>
+                  <a:srgbClr val="3A4763"/>
+                </a:solidFill>
+                <a:latin typeface="Calibri"/>
+              </a:rPr>
+              <a:t>u </a:t>
+            </a:r>
+            <a:r>
+              <a:rPr sz="1100" b="0" i="0" dirty="0">
+                <a:solidFill>
+                  <a:srgbClr val="3A4763"/>
+                </a:solidFill>
+                <a:latin typeface="Calibri"/>
+              </a:rPr>
+              <a:t>tom </a:t>
+            </a:r>
+            <a:r>
+              <a:rPr sz="1100" b="0" i="0" dirty="0" err="1">
+                <a:solidFill>
+                  <a:srgbClr val="3A4763"/>
+                </a:solidFill>
+                <a:latin typeface="Calibri"/>
+              </a:rPr>
+              <a:t>trenutku</a:t>
+            </a:r>
+            <a:r>
+              <a:rPr sz="1100" b="0" i="0" dirty="0">
+                <a:solidFill>
+                  <a:srgbClr val="3A4763"/>
+                </a:solidFill>
+                <a:latin typeface="Calibri"/>
+              </a:rPr>
+              <a:t> </a:t>
+            </a:r>
+            <a:r>
+              <a:rPr sz="1100" b="0" i="0" dirty="0" err="1">
+                <a:solidFill>
+                  <a:srgbClr val="3A4763"/>
+                </a:solidFill>
+                <a:latin typeface="Calibri"/>
+              </a:rPr>
+              <a:t>klika</a:t>
+            </a:r>
+            <a:r>
+              <a:rPr sz="1100" b="0" i="0" dirty="0">
+                <a:solidFill>
+                  <a:srgbClr val="3A4763"/>
+                </a:solidFill>
+                <a:latin typeface="Calibri"/>
+              </a:rPr>
+              <a:t>.</a:t>
+            </a:r>
+          </a:p>
+        </p:txBody>
+      </p:sp>
+      <p:sp>
+        <p:nvSpPr>
+          <p:cNvPr id="12" name="TextBox 11"/>
           <p:cNvSpPr txBox="1"/>
           <p:nvPr/>
         </p:nvSpPr>
         <p:spPr>
           <a:xfrm>
-            <a:off x="5303520" y="1417320"/>
-            <a:ext cx="2926080" cy="603504"/>
+            <a:off x="736640" y="4428979"/>
+            <a:ext cx="3060441" cy="292388"/>
           </a:xfrm>
           <a:prstGeom prst="rect">
             <a:avLst/>
@@ -7125,12 +9508,12 @@
           <a:noFill/>
         </p:spPr>
         <p:txBody>
-          <a:bodyPr wrap="square" lIns="0" tIns="0" rIns="0" bIns="0" anchor="ctr">
+          <a:bodyPr wrap="square" lIns="0" tIns="0" rIns="0" bIns="0" anchor="t">
             <a:spAutoFit/>
           </a:bodyPr>
           <a:lstStyle/>
           <a:p>
-            <a:pPr algn="l">
+            <a:pPr algn="ctr">
               <a:lnSpc>
                 <a:spcPct val="100000"/>
               </a:lnSpc>
@@ -7138,455 +9521,347 @@
                 <a:spcPts val="0"/>
               </a:spcBef>
               <a:spcAft>
-                <a:spcPts val="400"/>
+                <a:spcPts val="200"/>
               </a:spcAft>
             </a:pPr>
             <a:r>
-              <a:rPr sz="1200" b="1" i="0">
-                <a:solidFill>
-                  <a:srgbClr val="CF5340"/>
-                </a:solidFill>
-                <a:latin typeface="Poppins"/>
-              </a:rPr>
-              <a:t>Stop  ILI  greška</a:t>
-            </a:r>
-          </a:p>
-        </p:txBody>
-      </p:sp>
-      <p:sp>
-        <p:nvSpPr>
-          <p:cNvPr id="10" name="Chevron 9"/>
-          <p:cNvSpPr/>
-          <p:nvPr/>
-        </p:nvSpPr>
-        <p:spPr>
-          <a:xfrm rot="5400000">
-            <a:off x="6620255" y="2029967"/>
-            <a:ext cx="292608" cy="201168"/>
-          </a:xfrm>
-          <a:prstGeom prst="chevron">
-            <a:avLst/>
-          </a:prstGeom>
-          <a:solidFill>
-            <a:srgbClr val="6C7688"/>
-          </a:solidFill>
-          <a:ln>
+              <a:rPr sz="950" b="0" i="0" dirty="0" smtClean="0">
+                <a:solidFill>
+                  <a:srgbClr val="6C7688"/>
+                </a:solidFill>
+                <a:latin typeface="Calibri"/>
+              </a:rPr>
+              <a:t>Block </a:t>
+            </a:r>
+            <a:r>
+              <a:rPr sz="950" b="0" i="0" dirty="0" err="1">
+                <a:solidFill>
+                  <a:srgbClr val="6C7688"/>
+                </a:solidFill>
+                <a:latin typeface="Calibri"/>
+              </a:rPr>
+              <a:t>dijagram</a:t>
+            </a:r>
+            <a:r>
+              <a:rPr sz="950" b="0" i="0" dirty="0">
+                <a:solidFill>
+                  <a:srgbClr val="6C7688"/>
+                </a:solidFill>
+                <a:latin typeface="Calibri"/>
+              </a:rPr>
+              <a:t> </a:t>
+            </a:r>
+            <a:r>
+              <a:rPr sz="950" b="0" i="0" dirty="0" smtClean="0">
+                <a:solidFill>
+                  <a:srgbClr val="6C7688"/>
+                </a:solidFill>
+                <a:latin typeface="Calibri"/>
+              </a:rPr>
+              <a:t>PC_HMI_Lift.vi:</a:t>
+            </a:r>
+            <a:r>
+              <a:rPr lang="sr-Latn-RS" sz="950" b="0" i="0" dirty="0" smtClean="0">
+                <a:solidFill>
+                  <a:srgbClr val="6C7688"/>
+                </a:solidFill>
+                <a:latin typeface="Calibri"/>
+              </a:rPr>
+              <a:t> </a:t>
+            </a:r>
+            <a:r>
+              <a:rPr sz="950" b="0" i="0" dirty="0" smtClean="0">
+                <a:solidFill>
+                  <a:srgbClr val="6C7688"/>
+                </a:solidFill>
+                <a:latin typeface="Calibri"/>
+              </a:rPr>
+              <a:t>Event </a:t>
+            </a:r>
+            <a:r>
+              <a:rPr sz="950" b="0" i="0" dirty="0" err="1">
+                <a:solidFill>
+                  <a:srgbClr val="6C7688"/>
+                </a:solidFill>
+                <a:latin typeface="Calibri"/>
+              </a:rPr>
+              <a:t>struktura</a:t>
+            </a:r>
+            <a:r>
+              <a:rPr sz="950" b="0" i="0" dirty="0">
+                <a:solidFill>
+                  <a:srgbClr val="6C7688"/>
+                </a:solidFill>
+                <a:latin typeface="Calibri"/>
+              </a:rPr>
+              <a:t> </a:t>
+            </a:r>
+            <a:r>
+              <a:rPr sz="950" b="0" i="0" dirty="0" err="1">
+                <a:solidFill>
+                  <a:srgbClr val="6C7688"/>
+                </a:solidFill>
+                <a:latin typeface="Calibri"/>
+              </a:rPr>
+              <a:t>za</a:t>
+            </a:r>
+            <a:r>
+              <a:rPr sz="950" b="0" i="0" dirty="0">
+                <a:solidFill>
+                  <a:srgbClr val="6C7688"/>
+                </a:solidFill>
+                <a:latin typeface="Calibri"/>
+              </a:rPr>
+              <a:t> </a:t>
+            </a:r>
+            <a:r>
+              <a:rPr sz="950" b="0" i="0" dirty="0" err="1" smtClean="0">
+                <a:solidFill>
+                  <a:srgbClr val="6C7688"/>
+                </a:solidFill>
+                <a:latin typeface="Calibri"/>
+              </a:rPr>
+              <a:t>dugmad</a:t>
+            </a:r>
+            <a:r>
+              <a:rPr lang="sr-Latn-RS" sz="950" dirty="0">
+                <a:solidFill>
+                  <a:srgbClr val="6C7688"/>
+                </a:solidFill>
+                <a:latin typeface="Calibri"/>
+              </a:rPr>
+              <a:t> </a:t>
+            </a:r>
+            <a:r>
+              <a:rPr sz="950" b="0" i="0" dirty="0" err="1" smtClean="0">
+                <a:solidFill>
+                  <a:srgbClr val="6C7688"/>
+                </a:solidFill>
+                <a:latin typeface="Calibri"/>
+              </a:rPr>
+              <a:t>i</a:t>
+            </a:r>
+            <a:r>
+              <a:rPr sz="950" b="0" i="0" dirty="0" smtClean="0">
+                <a:solidFill>
+                  <a:srgbClr val="6C7688"/>
+                </a:solidFill>
+                <a:latin typeface="Calibri"/>
+              </a:rPr>
+              <a:t> </a:t>
+            </a:r>
+            <a:r>
+              <a:rPr sz="950" b="0" i="0" dirty="0" err="1">
+                <a:solidFill>
+                  <a:srgbClr val="6C7688"/>
+                </a:solidFill>
+                <a:latin typeface="Calibri"/>
+              </a:rPr>
+              <a:t>petlja</a:t>
+            </a:r>
+            <a:r>
+              <a:rPr sz="950" b="0" i="0" dirty="0">
+                <a:solidFill>
+                  <a:srgbClr val="6C7688"/>
+                </a:solidFill>
+                <a:latin typeface="Calibri"/>
+              </a:rPr>
+              <a:t> </a:t>
+            </a:r>
+            <a:r>
+              <a:rPr sz="950" b="0" i="0" dirty="0" err="1">
+                <a:solidFill>
+                  <a:srgbClr val="6C7688"/>
+                </a:solidFill>
+                <a:latin typeface="Calibri"/>
+              </a:rPr>
+              <a:t>za</a:t>
+            </a:r>
+            <a:r>
+              <a:rPr sz="950" b="0" i="0" dirty="0">
+                <a:solidFill>
+                  <a:srgbClr val="6C7688"/>
+                </a:solidFill>
+                <a:latin typeface="Calibri"/>
+              </a:rPr>
+              <a:t> </a:t>
+            </a:r>
+            <a:r>
+              <a:rPr sz="950" b="0" i="0" dirty="0" err="1">
+                <a:solidFill>
+                  <a:srgbClr val="6C7688"/>
+                </a:solidFill>
+                <a:latin typeface="Calibri"/>
+              </a:rPr>
+              <a:t>osvežavanje</a:t>
+            </a:r>
+            <a:r>
+              <a:rPr sz="950" b="0" i="0" dirty="0">
+                <a:solidFill>
+                  <a:srgbClr val="6C7688"/>
+                </a:solidFill>
+                <a:latin typeface="Calibri"/>
+              </a:rPr>
+              <a:t> </a:t>
+            </a:r>
+            <a:r>
+              <a:rPr sz="950" b="0" i="0" dirty="0" err="1">
+                <a:solidFill>
+                  <a:srgbClr val="6C7688"/>
+                </a:solidFill>
+                <a:latin typeface="Calibri"/>
+              </a:rPr>
+              <a:t>prikaza</a:t>
+            </a:r>
+            <a:endParaRPr sz="950" b="0" i="0" dirty="0">
+              <a:solidFill>
+                <a:srgbClr val="6C7688"/>
+              </a:solidFill>
+              <a:latin typeface="Calibri"/>
+            </a:endParaRPr>
+          </a:p>
+        </p:txBody>
+      </p:sp>
+      <p:grpSp>
+        <p:nvGrpSpPr>
+          <p:cNvPr id="13" name="Group 12"/>
+          <p:cNvGrpSpPr/>
+          <p:nvPr/>
+        </p:nvGrpSpPr>
+        <p:grpSpPr>
+          <a:xfrm>
+            <a:off x="3881060" y="1914811"/>
+            <a:ext cx="4805264" cy="2877589"/>
+            <a:chOff x="4124131" y="2361055"/>
+            <a:chExt cx="4571997" cy="2677475"/>
+          </a:xfrm>
+        </p:grpSpPr>
+        <p:sp>
+          <p:nvSpPr>
+            <p:cNvPr id="8" name="Rounded Rectangle 7"/>
+            <p:cNvSpPr/>
+            <p:nvPr/>
+          </p:nvSpPr>
+          <p:spPr>
+            <a:xfrm>
+              <a:off x="4124131" y="2361055"/>
+              <a:ext cx="4571997" cy="2677475"/>
+            </a:xfrm>
+            <a:prstGeom prst="roundRect">
+              <a:avLst>
+                <a:gd name="adj" fmla="val 4000"/>
+              </a:avLst>
+            </a:prstGeom>
+            <a:solidFill>
+              <a:srgbClr val="F4F6F8"/>
+            </a:solidFill>
+            <a:ln w="16510">
+              <a:solidFill>
+                <a:srgbClr val="D9DFE5"/>
+              </a:solidFill>
+            </a:ln>
+            <a:effectLst/>
+          </p:spPr>
+          <p:style>
+            <a:lnRef idx="1">
+              <a:schemeClr val="accent1"/>
+            </a:lnRef>
+            <a:fillRef idx="3">
+              <a:schemeClr val="accent1"/>
+            </a:fillRef>
+            <a:effectRef idx="2">
+              <a:schemeClr val="accent1"/>
+            </a:effectRef>
+            <a:fontRef idx="minor">
+              <a:schemeClr val="lt1"/>
+            </a:fontRef>
+          </p:style>
+          <p:txBody>
+            <a:bodyPr rtlCol="0" anchor="ctr"/>
+            <a:lstStyle/>
+            <a:p>
+              <a:pPr algn="ctr"/>
+              <a:endParaRPr/>
+            </a:p>
+          </p:txBody>
+        </p:sp>
+        <p:pic>
+          <p:nvPicPr>
+            <p:cNvPr id="3075" name="Picture 3"/>
+            <p:cNvPicPr>
+              <a:picLocks noChangeAspect="1" noChangeArrowheads="1"/>
+            </p:cNvPicPr>
+            <p:nvPr/>
+          </p:nvPicPr>
+          <p:blipFill>
+            <a:blip r:embed="rId3">
+              <a:extLst>
+                <a:ext uri="{28A0092B-C50C-407E-A947-70E740481C1C}">
+                  <a14:useLocalDpi xmlns:a14="http://schemas.microsoft.com/office/drawing/2010/main" val="0"/>
+                </a:ext>
+              </a:extLst>
+            </a:blip>
+            <a:srcRect/>
+            <a:stretch>
+              <a:fillRect/>
+            </a:stretch>
+          </p:blipFill>
+          <p:spPr bwMode="auto">
+            <a:xfrm>
+              <a:off x="4231121" y="2458087"/>
+              <a:ext cx="4339358" cy="2483409"/>
+            </a:xfrm>
+            <a:prstGeom prst="rect">
+              <a:avLst/>
+            </a:prstGeom>
             <a:noFill/>
-          </a:ln>
-          <a:effectLst/>
-        </p:spPr>
-        <p:style>
-          <a:lnRef idx="1">
-            <a:schemeClr val="accent1"/>
-          </a:lnRef>
-          <a:fillRef idx="3">
-            <a:schemeClr val="accent1"/>
-          </a:fillRef>
-          <a:effectRef idx="2">
-            <a:schemeClr val="accent1"/>
-          </a:effectRef>
-          <a:fontRef idx="minor">
-            <a:schemeClr val="lt1"/>
-          </a:fontRef>
-        </p:style>
-        <p:txBody>
-          <a:bodyPr rtlCol="0" anchor="ctr"/>
-          <a:lstStyle/>
-          <a:p>
-            <a:pPr algn="ctr"/>
-            <a:endParaRPr/>
-          </a:p>
-        </p:txBody>
-      </p:sp>
-      <p:sp>
-        <p:nvSpPr>
-          <p:cNvPr id="11" name="Rounded Rectangle 10"/>
-          <p:cNvSpPr/>
-          <p:nvPr/>
-        </p:nvSpPr>
-        <p:spPr>
-          <a:xfrm>
-            <a:off x="5120640" y="2240280"/>
-            <a:ext cx="3291840" cy="603504"/>
-          </a:xfrm>
-          <a:prstGeom prst="roundRect">
-            <a:avLst>
-              <a:gd name="adj" fmla="val 12000"/>
-            </a:avLst>
-          </a:prstGeom>
-          <a:solidFill>
-            <a:srgbClr val="F4F6F8"/>
-          </a:solidFill>
-          <a:ln>
-            <a:noFill/>
-          </a:ln>
-          <a:effectLst>
-            <a:outerShdw blurRad="90000" dist="38100" dir="5400000" rotWithShape="0">
-              <a:srgbClr val="9BA6B2">
-                <a:alpha val="38000"/>
-              </a:srgbClr>
-            </a:outerShdw>
-          </a:effectLst>
-        </p:spPr>
-        <p:style>
-          <a:lnRef idx="1">
-            <a:schemeClr val="accent1"/>
-          </a:lnRef>
-          <a:fillRef idx="3">
-            <a:schemeClr val="accent1"/>
-          </a:fillRef>
-          <a:effectRef idx="2">
-            <a:schemeClr val="accent1"/>
-          </a:effectRef>
-          <a:fontRef idx="minor">
-            <a:schemeClr val="lt1"/>
-          </a:fontRef>
-        </p:style>
-        <p:txBody>
-          <a:bodyPr rtlCol="0" anchor="ctr"/>
-          <a:lstStyle/>
-          <a:p>
-            <a:pPr algn="ctr"/>
-            <a:endParaRPr/>
-          </a:p>
-        </p:txBody>
-      </p:sp>
-      <p:sp>
-        <p:nvSpPr>
-          <p:cNvPr id="12" name="TextBox 11"/>
-          <p:cNvSpPr txBox="1"/>
-          <p:nvPr/>
-        </p:nvSpPr>
-        <p:spPr>
-          <a:xfrm>
-            <a:off x="5303520" y="2240280"/>
-            <a:ext cx="2926080" cy="603504"/>
-          </a:xfrm>
-          <a:prstGeom prst="rect">
-            <a:avLst/>
-          </a:prstGeom>
-          <a:noFill/>
-        </p:spPr>
-        <p:txBody>
-          <a:bodyPr wrap="square" lIns="0" tIns="0" rIns="0" bIns="0" anchor="ctr">
-            <a:spAutoFit/>
-          </a:bodyPr>
-          <a:lstStyle/>
-          <a:p>
-            <a:pPr algn="l">
-              <a:lnSpc>
-                <a:spcPct val="100000"/>
-              </a:lnSpc>
-              <a:spcBef>
-                <a:spcPts val="0"/>
-              </a:spcBef>
-              <a:spcAft>
-                <a:spcPts val="400"/>
-              </a:spcAft>
-            </a:pPr>
-            <a:r>
-              <a:rPr sz="1200" b="1" i="0">
-                <a:solidFill>
-                  <a:srgbClr val="17223B"/>
-                </a:solidFill>
-                <a:latin typeface="Poppins"/>
-              </a:rPr>
-              <a:t>Guard Clause hvata uslov</a:t>
-            </a:r>
-          </a:p>
-        </p:txBody>
-      </p:sp>
-      <p:sp>
-        <p:nvSpPr>
-          <p:cNvPr id="13" name="Chevron 12"/>
-          <p:cNvSpPr/>
-          <p:nvPr/>
-        </p:nvSpPr>
-        <p:spPr>
-          <a:xfrm rot="5400000">
-            <a:off x="6620255" y="2852928"/>
-            <a:ext cx="292608" cy="201168"/>
-          </a:xfrm>
-          <a:prstGeom prst="chevron">
-            <a:avLst/>
-          </a:prstGeom>
-          <a:solidFill>
-            <a:srgbClr val="6C7688"/>
-          </a:solidFill>
-          <a:ln>
-            <a:noFill/>
-          </a:ln>
-          <a:effectLst/>
-        </p:spPr>
-        <p:style>
-          <a:lnRef idx="1">
-            <a:schemeClr val="accent1"/>
-          </a:lnRef>
-          <a:fillRef idx="3">
-            <a:schemeClr val="accent1"/>
-          </a:fillRef>
-          <a:effectRef idx="2">
-            <a:schemeClr val="accent1"/>
-          </a:effectRef>
-          <a:fontRef idx="minor">
-            <a:schemeClr val="lt1"/>
-          </a:fontRef>
-        </p:style>
-        <p:txBody>
-          <a:bodyPr rtlCol="0" anchor="ctr"/>
-          <a:lstStyle/>
-          <a:p>
-            <a:pPr algn="ctr"/>
-            <a:endParaRPr/>
-          </a:p>
-        </p:txBody>
-      </p:sp>
-      <p:sp>
-        <p:nvSpPr>
-          <p:cNvPr id="14" name="Rounded Rectangle 13"/>
-          <p:cNvSpPr/>
-          <p:nvPr/>
-        </p:nvSpPr>
-        <p:spPr>
-          <a:xfrm>
-            <a:off x="5120640" y="3063240"/>
-            <a:ext cx="3291840" cy="603504"/>
-          </a:xfrm>
-          <a:prstGeom prst="roundRect">
-            <a:avLst>
-              <a:gd name="adj" fmla="val 12000"/>
-            </a:avLst>
-          </a:prstGeom>
-          <a:solidFill>
-            <a:srgbClr val="FBE9E4"/>
-          </a:solidFill>
-          <a:ln>
-            <a:noFill/>
-          </a:ln>
-          <a:effectLst>
-            <a:outerShdw blurRad="90000" dist="38100" dir="5400000" rotWithShape="0">
-              <a:srgbClr val="9BA6B2">
-                <a:alpha val="38000"/>
-              </a:srgbClr>
-            </a:outerShdw>
-          </a:effectLst>
-        </p:spPr>
-        <p:style>
-          <a:lnRef idx="1">
-            <a:schemeClr val="accent1"/>
-          </a:lnRef>
-          <a:fillRef idx="3">
-            <a:schemeClr val="accent1"/>
-          </a:fillRef>
-          <a:effectRef idx="2">
-            <a:schemeClr val="accent1"/>
-          </a:effectRef>
-          <a:fontRef idx="minor">
-            <a:schemeClr val="lt1"/>
-          </a:fontRef>
-        </p:style>
-        <p:txBody>
-          <a:bodyPr rtlCol="0" anchor="ctr"/>
-          <a:lstStyle/>
-          <a:p>
-            <a:pPr algn="ctr"/>
-            <a:endParaRPr/>
-          </a:p>
-        </p:txBody>
-      </p:sp>
-      <p:sp>
-        <p:nvSpPr>
-          <p:cNvPr id="15" name="TextBox 14"/>
-          <p:cNvSpPr txBox="1"/>
-          <p:nvPr/>
-        </p:nvSpPr>
-        <p:spPr>
-          <a:xfrm>
-            <a:off x="5303520" y="3063240"/>
-            <a:ext cx="2926080" cy="603504"/>
-          </a:xfrm>
-          <a:prstGeom prst="rect">
-            <a:avLst/>
-          </a:prstGeom>
-          <a:noFill/>
-        </p:spPr>
-        <p:txBody>
-          <a:bodyPr wrap="square" lIns="0" tIns="0" rIns="0" bIns="0" anchor="ctr">
-            <a:spAutoFit/>
-          </a:bodyPr>
-          <a:lstStyle/>
-          <a:p>
-            <a:pPr algn="l">
-              <a:lnSpc>
-                <a:spcPct val="100000"/>
-              </a:lnSpc>
-              <a:spcBef>
-                <a:spcPts val="0"/>
-              </a:spcBef>
-              <a:spcAft>
-                <a:spcPts val="400"/>
-              </a:spcAft>
-            </a:pPr>
-            <a:r>
-              <a:rPr sz="1200" b="1" i="0">
-                <a:solidFill>
-                  <a:srgbClr val="CF5340"/>
-                </a:solidFill>
-                <a:latin typeface="Poppins"/>
-              </a:rPr>
-              <a:t>Shutdown: u = 0, kretanje stoji</a:t>
-            </a:r>
-          </a:p>
-        </p:txBody>
-      </p:sp>
-      <p:sp>
-        <p:nvSpPr>
-          <p:cNvPr id="16" name="Chevron 15"/>
-          <p:cNvSpPr/>
-          <p:nvPr/>
-        </p:nvSpPr>
-        <p:spPr>
-          <a:xfrm rot="5400000">
-            <a:off x="6620255" y="3675887"/>
-            <a:ext cx="292608" cy="201168"/>
-          </a:xfrm>
-          <a:prstGeom prst="chevron">
-            <a:avLst/>
-          </a:prstGeom>
-          <a:solidFill>
-            <a:srgbClr val="6C7688"/>
-          </a:solidFill>
-          <a:ln>
-            <a:noFill/>
-          </a:ln>
-          <a:effectLst/>
-        </p:spPr>
-        <p:style>
-          <a:lnRef idx="1">
-            <a:schemeClr val="accent1"/>
-          </a:lnRef>
-          <a:fillRef idx="3">
-            <a:schemeClr val="accent1"/>
-          </a:fillRef>
-          <a:effectRef idx="2">
-            <a:schemeClr val="accent1"/>
-          </a:effectRef>
-          <a:fontRef idx="minor">
-            <a:schemeClr val="lt1"/>
-          </a:fontRef>
-        </p:style>
-        <p:txBody>
-          <a:bodyPr rtlCol="0" anchor="ctr"/>
-          <a:lstStyle/>
-          <a:p>
-            <a:pPr algn="ctr"/>
-            <a:endParaRPr/>
-          </a:p>
-        </p:txBody>
-      </p:sp>
-      <p:sp>
-        <p:nvSpPr>
-          <p:cNvPr id="17" name="Rounded Rectangle 16"/>
-          <p:cNvSpPr/>
-          <p:nvPr/>
-        </p:nvSpPr>
-        <p:spPr>
-          <a:xfrm>
-            <a:off x="5120640" y="3886200"/>
-            <a:ext cx="3291840" cy="603504"/>
-          </a:xfrm>
-          <a:prstGeom prst="roundRect">
-            <a:avLst>
-              <a:gd name="adj" fmla="val 12000"/>
-            </a:avLst>
-          </a:prstGeom>
-          <a:solidFill>
-            <a:srgbClr val="E6F3EC"/>
-          </a:solidFill>
-          <a:ln>
-            <a:noFill/>
-          </a:ln>
-          <a:effectLst>
-            <a:outerShdw blurRad="90000" dist="38100" dir="5400000" rotWithShape="0">
-              <a:srgbClr val="9BA6B2">
-                <a:alpha val="38000"/>
-              </a:srgbClr>
-            </a:outerShdw>
-          </a:effectLst>
-        </p:spPr>
-        <p:style>
-          <a:lnRef idx="1">
-            <a:schemeClr val="accent1"/>
-          </a:lnRef>
-          <a:fillRef idx="3">
-            <a:schemeClr val="accent1"/>
-          </a:fillRef>
-          <a:effectRef idx="2">
-            <a:schemeClr val="accent1"/>
-          </a:effectRef>
-          <a:fontRef idx="minor">
-            <a:schemeClr val="lt1"/>
-          </a:fontRef>
-        </p:style>
-        <p:txBody>
-          <a:bodyPr rtlCol="0" anchor="ctr"/>
-          <a:lstStyle/>
-          <a:p>
-            <a:pPr algn="ctr"/>
-            <a:endParaRPr/>
-          </a:p>
-        </p:txBody>
-      </p:sp>
-      <p:sp>
-        <p:nvSpPr>
-          <p:cNvPr id="18" name="TextBox 17"/>
-          <p:cNvSpPr txBox="1"/>
-          <p:nvPr/>
-        </p:nvSpPr>
-        <p:spPr>
-          <a:xfrm>
-            <a:off x="5303520" y="3886200"/>
-            <a:ext cx="2926080" cy="603504"/>
-          </a:xfrm>
-          <a:prstGeom prst="rect">
-            <a:avLst/>
-          </a:prstGeom>
-          <a:noFill/>
-        </p:spPr>
-        <p:txBody>
-          <a:bodyPr wrap="square" lIns="0" tIns="0" rIns="0" bIns="0" anchor="ctr">
-            <a:spAutoFit/>
-          </a:bodyPr>
-          <a:lstStyle/>
-          <a:p>
-            <a:pPr algn="l">
-              <a:lnSpc>
-                <a:spcPct val="100000"/>
-              </a:lnSpc>
-              <a:spcBef>
-                <a:spcPts val="0"/>
-              </a:spcBef>
-              <a:spcAft>
-                <a:spcPts val="400"/>
-              </a:spcAft>
-            </a:pPr>
-            <a:r>
-              <a:rPr sz="1200" b="1" i="0">
-                <a:solidFill>
-                  <a:srgbClr val="3F9E7C"/>
-                </a:solidFill>
-                <a:latin typeface="Poppins"/>
-              </a:rPr>
-              <a:t>Bezbedan, konzistentan izlaz</a:t>
-            </a:r>
-          </a:p>
-        </p:txBody>
-      </p:sp>
+            <a:ln>
+              <a:noFill/>
+            </a:ln>
+            <a:effectLst/>
+            <a:extLst>
+              <a:ext uri="{909E8E84-426E-40DD-AFC4-6F175D3DCCD1}">
+                <a14:hiddenFill xmlns:a14="http://schemas.microsoft.com/office/drawing/2010/main">
+                  <a:solidFill>
+                    <a:schemeClr val="accent1"/>
+                  </a:solidFill>
+                </a14:hiddenFill>
+              </a:ext>
+              <a:ext uri="{91240B29-F687-4F45-9708-019B960494DF}">
+                <a14:hiddenLine xmlns:a14="http://schemas.microsoft.com/office/drawing/2010/main" w="9525">
+                  <a:solidFill>
+                    <a:schemeClr val="tx1"/>
+                  </a:solidFill>
+                  <a:miter lim="800000"/>
+                  <a:headEnd/>
+                  <a:tailEnd/>
+                </a14:hiddenLine>
+              </a:ext>
+              <a:ext uri="{AF507438-7753-43E0-B8FC-AC1667EBCBE1}">
+                <a14:hiddenEffects xmlns:a14="http://schemas.microsoft.com/office/drawing/2010/main">
+                  <a:effectLst>
+                    <a:outerShdw dist="35921" dir="2700000" algn="ctr" rotWithShape="0">
+                      <a:schemeClr val="bg2"/>
+                    </a:outerShdw>
+                  </a:effectLst>
+                </a14:hiddenEffects>
+              </a:ext>
+            </a:extLst>
+          </p:spPr>
+        </p:pic>
+      </p:grpSp>
     </p:spTree>
   </p:cSld>
   <p:clrMapOvr>
     <a:masterClrMapping/>
   </p:clrMapOvr>
+  <p:timing>
+    <p:tnLst>
+      <p:par>
+        <p:cTn id="1" dur="indefinite" restart="never" nodeType="tmRoot"/>
+      </p:par>
+    </p:tnLst>
+  </p:timing>
 </p:sld>
 </file>
 
@@ -7622,7 +9897,7 @@
             <a:avLst/>
           </a:prstGeom>
           <a:solidFill>
-            <a:srgbClr val="17223B"/>
+            <a:srgbClr val="FFFFFF"/>
           </a:solidFill>
           <a:ln>
             <a:noFill/>
@@ -7660,8 +9935,8 @@
         </p:nvSpPr>
         <p:spPr>
           <a:xfrm>
-            <a:off x="502920" y="502920"/>
-            <a:ext cx="128016" cy="457200"/>
+            <a:off x="502920" y="402336"/>
+            <a:ext cx="128016" cy="384048"/>
           </a:xfrm>
           <a:prstGeom prst="roundRect">
             <a:avLst>
@@ -7669,7 +9944,7 @@
             </a:avLst>
           </a:prstGeom>
           <a:solidFill>
-            <a:srgbClr val="D9832F"/>
+            <a:srgbClr val="0E7C86"/>
           </a:solidFill>
           <a:ln>
             <a:noFill/>
@@ -7707,8 +9982,8 @@
         </p:nvSpPr>
         <p:spPr>
           <a:xfrm>
-            <a:off x="749808" y="457200"/>
-            <a:ext cx="5486400" cy="274320"/>
+            <a:off x="749808" y="365760"/>
+            <a:ext cx="7315200" cy="256032"/>
           </a:xfrm>
           <a:prstGeom prst="rect">
             <a:avLst/>
@@ -7733,13 +10008,13 @@
               </a:spcAft>
             </a:pPr>
             <a:r>
-              <a:rPr sz="1100" b="1" i="0">
-                <a:solidFill>
-                  <a:srgbClr val="D9832F"/>
+              <a:rPr sz="1050" b="1" i="0">
+                <a:solidFill>
+                  <a:srgbClr val="0E7C86"/>
                 </a:solidFill>
                 <a:latin typeface="Poppins"/>
               </a:rPr>
-              <a:t>ZAKLJUČAK</a:t>
+              <a:t>KONTROLISANO GAŠENJE</a:t>
             </a:r>
           </a:p>
         </p:txBody>
@@ -7752,8 +10027,8 @@
         </p:nvSpPr>
         <p:spPr>
           <a:xfrm>
-            <a:off x="749808" y="713232"/>
-            <a:ext cx="7680960" cy="548640"/>
+            <a:off x="749808" y="603504"/>
+            <a:ext cx="7863840" cy="548640"/>
           </a:xfrm>
           <a:prstGeom prst="rect">
             <a:avLst/>
@@ -7778,6 +10053,935 @@
               </a:spcAft>
             </a:pPr>
             <a:r>
+              <a:rPr sz="2300" b="1" i="0">
+                <a:solidFill>
+                  <a:srgbClr val="17223B"/>
+                </a:solidFill>
+                <a:latin typeface="Poppins"/>
+              </a:rPr>
+              <a:t>Bezbednost i završetak programa</a:t>
+            </a:r>
+          </a:p>
+        </p:txBody>
+      </p:sp>
+      <p:sp>
+        <p:nvSpPr>
+          <p:cNvPr id="6" name="TextBox 5"/>
+          <p:cNvSpPr txBox="1"/>
+          <p:nvPr/>
+        </p:nvSpPr>
+        <p:spPr>
+          <a:xfrm>
+            <a:off x="8275320" y="475488"/>
+            <a:ext cx="548640" cy="365760"/>
+          </a:xfrm>
+          <a:prstGeom prst="rect">
+            <a:avLst/>
+          </a:prstGeom>
+          <a:noFill/>
+        </p:spPr>
+        <p:txBody>
+          <a:bodyPr wrap="square" lIns="0" tIns="0" rIns="0" bIns="0" anchor="t">
+            <a:spAutoFit/>
+          </a:bodyPr>
+          <a:lstStyle/>
+          <a:p>
+            <a:pPr algn="r">
+              <a:lnSpc>
+                <a:spcPct val="100000"/>
+              </a:lnSpc>
+              <a:spcBef>
+                <a:spcPts val="0"/>
+              </a:spcBef>
+              <a:spcAft>
+                <a:spcPts val="400"/>
+              </a:spcAft>
+            </a:pPr>
+            <a:r>
+              <a:rPr sz="1200" b="1" i="0">
+                <a:solidFill>
+                  <a:srgbClr val="6C7688"/>
+                </a:solidFill>
+                <a:latin typeface="Poppins"/>
+              </a:rPr>
+              <a:t>11</a:t>
+            </a:r>
+          </a:p>
+        </p:txBody>
+      </p:sp>
+      <p:sp>
+        <p:nvSpPr>
+          <p:cNvPr id="7" name="TextBox 6"/>
+          <p:cNvSpPr txBox="1"/>
+          <p:nvPr/>
+        </p:nvSpPr>
+        <p:spPr>
+          <a:xfrm>
+            <a:off x="749808" y="1417320"/>
+            <a:ext cx="4160520" cy="3200400"/>
+          </a:xfrm>
+          <a:prstGeom prst="rect">
+            <a:avLst/>
+          </a:prstGeom>
+          <a:noFill/>
+        </p:spPr>
+        <p:txBody>
+          <a:bodyPr wrap="square" lIns="0" tIns="0" rIns="0" bIns="0">
+            <a:spAutoFit/>
+          </a:bodyPr>
+          <a:lstStyle/>
+          <a:p>
+            <a:pPr>
+              <a:lnSpc>
+                <a:spcPct val="107000"/>
+              </a:lnSpc>
+              <a:spcBef>
+                <a:spcPts val="0"/>
+              </a:spcBef>
+              <a:spcAft>
+                <a:spcPts val="1100"/>
+              </a:spcAft>
+            </a:pPr>
+            <a:r>
+              <a:rPr sz="1150" b="1" i="0">
+                <a:solidFill>
+                  <a:srgbClr val="0E7C86"/>
+                </a:solidFill>
+                <a:latin typeface="Calibri"/>
+              </a:rPr>
+              <a:t>•  </a:t>
+            </a:r>
+            <a:r>
+              <a:rPr sz="1150" b="1" i="0">
+                <a:solidFill>
+                  <a:srgbClr val="17223B"/>
+                </a:solidFill>
+                <a:latin typeface="Calibri"/>
+              </a:rPr>
+              <a:t>Sistem se zaustavlja preko </a:t>
+            </a:r>
+            <a:r>
+              <a:rPr sz="1150" b="0" i="0">
+                <a:solidFill>
+                  <a:srgbClr val="3A4763"/>
+                </a:solidFill>
+                <a:latin typeface="Calibri"/>
+              </a:rPr>
+              <a:t>Guard Clause mehanizma: pritiskom na Stop ili usled greške automat prelazi u Shutdown.</a:t>
+            </a:r>
+          </a:p>
+          <a:p>
+            <a:pPr>
+              <a:lnSpc>
+                <a:spcPct val="107000"/>
+              </a:lnSpc>
+              <a:spcBef>
+                <a:spcPts val="0"/>
+              </a:spcBef>
+              <a:spcAft>
+                <a:spcPts val="1100"/>
+              </a:spcAft>
+            </a:pPr>
+            <a:r>
+              <a:rPr sz="1150" b="1" i="0">
+                <a:solidFill>
+                  <a:srgbClr val="0E7C86"/>
+                </a:solidFill>
+                <a:latin typeface="Calibri"/>
+              </a:rPr>
+              <a:t>•  </a:t>
+            </a:r>
+            <a:r>
+              <a:rPr sz="1150" b="1" i="0">
+                <a:solidFill>
+                  <a:srgbClr val="17223B"/>
+                </a:solidFill>
+                <a:latin typeface="Calibri"/>
+              </a:rPr>
+              <a:t>Petlja se prekida </a:t>
+            </a:r>
+            <a:r>
+              <a:rPr sz="1150" b="0" i="0">
+                <a:solidFill>
+                  <a:srgbClr val="3A4763"/>
+                </a:solidFill>
+                <a:latin typeface="Calibri"/>
+              </a:rPr>
+              <a:t>kontrolisano, bez naglog gašenja.</a:t>
+            </a:r>
+          </a:p>
+          <a:p>
+            <a:pPr>
+              <a:lnSpc>
+                <a:spcPct val="107000"/>
+              </a:lnSpc>
+              <a:spcBef>
+                <a:spcPts val="0"/>
+              </a:spcBef>
+              <a:spcAft>
+                <a:spcPts val="1100"/>
+              </a:spcAft>
+            </a:pPr>
+            <a:r>
+              <a:rPr sz="1150" b="1" i="0">
+                <a:solidFill>
+                  <a:srgbClr val="0E7C86"/>
+                </a:solidFill>
+                <a:latin typeface="Calibri"/>
+              </a:rPr>
+              <a:t>•  </a:t>
+            </a:r>
+            <a:r>
+              <a:rPr sz="1150" b="1" i="0">
+                <a:solidFill>
+                  <a:srgbClr val="17223B"/>
+                </a:solidFill>
+                <a:latin typeface="Calibri"/>
+              </a:rPr>
+              <a:t>Deljene promenljive ostaju </a:t>
+            </a:r>
+            <a:r>
+              <a:rPr sz="1150" b="0" i="0">
+                <a:solidFill>
+                  <a:srgbClr val="3A4763"/>
+                </a:solidFill>
+                <a:latin typeface="Calibri"/>
+              </a:rPr>
+              <a:t>konzistentne: pošto server pamti poslednju vrednost, Shutdown prvo postavi u = 0 i zaustavi kretanje, pa se tek onda petlja gasi, da na mreži ne ostanu zaostale (npr. u različito od nule) ili protivrečne vrednosti.</a:t>
+            </a:r>
+          </a:p>
+        </p:txBody>
+      </p:sp>
+      <p:sp>
+        <p:nvSpPr>
+          <p:cNvPr id="8" name="Rounded Rectangle 7"/>
+          <p:cNvSpPr/>
+          <p:nvPr/>
+        </p:nvSpPr>
+        <p:spPr>
+          <a:xfrm>
+            <a:off x="5120640" y="1417320"/>
+            <a:ext cx="3291840" cy="603504"/>
+          </a:xfrm>
+          <a:prstGeom prst="roundRect">
+            <a:avLst>
+              <a:gd name="adj" fmla="val 12000"/>
+            </a:avLst>
+          </a:prstGeom>
+          <a:solidFill>
+            <a:srgbClr val="FBE9E4"/>
+          </a:solidFill>
+          <a:ln>
+            <a:noFill/>
+          </a:ln>
+          <a:effectLst>
+            <a:outerShdw blurRad="90000" dist="38100" dir="5400000" rotWithShape="0">
+              <a:srgbClr val="9BA6B2">
+                <a:alpha val="38000"/>
+              </a:srgbClr>
+            </a:outerShdw>
+          </a:effectLst>
+        </p:spPr>
+        <p:style>
+          <a:lnRef idx="1">
+            <a:schemeClr val="accent1"/>
+          </a:lnRef>
+          <a:fillRef idx="3">
+            <a:schemeClr val="accent1"/>
+          </a:fillRef>
+          <a:effectRef idx="2">
+            <a:schemeClr val="accent1"/>
+          </a:effectRef>
+          <a:fontRef idx="minor">
+            <a:schemeClr val="lt1"/>
+          </a:fontRef>
+        </p:style>
+        <p:txBody>
+          <a:bodyPr rtlCol="0" anchor="ctr"/>
+          <a:lstStyle/>
+          <a:p>
+            <a:pPr algn="ctr"/>
+            <a:endParaRPr/>
+          </a:p>
+        </p:txBody>
+      </p:sp>
+      <p:sp>
+        <p:nvSpPr>
+          <p:cNvPr id="9" name="TextBox 8"/>
+          <p:cNvSpPr txBox="1"/>
+          <p:nvPr/>
+        </p:nvSpPr>
+        <p:spPr>
+          <a:xfrm>
+            <a:off x="5303520" y="1417320"/>
+            <a:ext cx="2926080" cy="603504"/>
+          </a:xfrm>
+          <a:prstGeom prst="rect">
+            <a:avLst/>
+          </a:prstGeom>
+          <a:noFill/>
+        </p:spPr>
+        <p:txBody>
+          <a:bodyPr wrap="square" lIns="0" tIns="0" rIns="0" bIns="0" anchor="ctr">
+            <a:spAutoFit/>
+          </a:bodyPr>
+          <a:lstStyle/>
+          <a:p>
+            <a:pPr algn="l">
+              <a:lnSpc>
+                <a:spcPct val="100000"/>
+              </a:lnSpc>
+              <a:spcBef>
+                <a:spcPts val="0"/>
+              </a:spcBef>
+              <a:spcAft>
+                <a:spcPts val="400"/>
+              </a:spcAft>
+            </a:pPr>
+            <a:r>
+              <a:rPr sz="1200" b="1" i="0">
+                <a:solidFill>
+                  <a:srgbClr val="CF5340"/>
+                </a:solidFill>
+                <a:latin typeface="Poppins"/>
+              </a:rPr>
+              <a:t>Stop  ILI  greška</a:t>
+            </a:r>
+          </a:p>
+        </p:txBody>
+      </p:sp>
+      <p:sp>
+        <p:nvSpPr>
+          <p:cNvPr id="10" name="Chevron 9"/>
+          <p:cNvSpPr/>
+          <p:nvPr/>
+        </p:nvSpPr>
+        <p:spPr>
+          <a:xfrm rot="5400000">
+            <a:off x="6620255" y="2029967"/>
+            <a:ext cx="292608" cy="201168"/>
+          </a:xfrm>
+          <a:prstGeom prst="chevron">
+            <a:avLst/>
+          </a:prstGeom>
+          <a:solidFill>
+            <a:srgbClr val="6C7688"/>
+          </a:solidFill>
+          <a:ln>
+            <a:noFill/>
+          </a:ln>
+          <a:effectLst/>
+        </p:spPr>
+        <p:style>
+          <a:lnRef idx="1">
+            <a:schemeClr val="accent1"/>
+          </a:lnRef>
+          <a:fillRef idx="3">
+            <a:schemeClr val="accent1"/>
+          </a:fillRef>
+          <a:effectRef idx="2">
+            <a:schemeClr val="accent1"/>
+          </a:effectRef>
+          <a:fontRef idx="minor">
+            <a:schemeClr val="lt1"/>
+          </a:fontRef>
+        </p:style>
+        <p:txBody>
+          <a:bodyPr rtlCol="0" anchor="ctr"/>
+          <a:lstStyle/>
+          <a:p>
+            <a:pPr algn="ctr"/>
+            <a:endParaRPr/>
+          </a:p>
+        </p:txBody>
+      </p:sp>
+      <p:sp>
+        <p:nvSpPr>
+          <p:cNvPr id="11" name="Rounded Rectangle 10"/>
+          <p:cNvSpPr/>
+          <p:nvPr/>
+        </p:nvSpPr>
+        <p:spPr>
+          <a:xfrm>
+            <a:off x="5120640" y="2240280"/>
+            <a:ext cx="3291840" cy="603504"/>
+          </a:xfrm>
+          <a:prstGeom prst="roundRect">
+            <a:avLst>
+              <a:gd name="adj" fmla="val 12000"/>
+            </a:avLst>
+          </a:prstGeom>
+          <a:solidFill>
+            <a:srgbClr val="F4F6F8"/>
+          </a:solidFill>
+          <a:ln>
+            <a:noFill/>
+          </a:ln>
+          <a:effectLst>
+            <a:outerShdw blurRad="90000" dist="38100" dir="5400000" rotWithShape="0">
+              <a:srgbClr val="9BA6B2">
+                <a:alpha val="38000"/>
+              </a:srgbClr>
+            </a:outerShdw>
+          </a:effectLst>
+        </p:spPr>
+        <p:style>
+          <a:lnRef idx="1">
+            <a:schemeClr val="accent1"/>
+          </a:lnRef>
+          <a:fillRef idx="3">
+            <a:schemeClr val="accent1"/>
+          </a:fillRef>
+          <a:effectRef idx="2">
+            <a:schemeClr val="accent1"/>
+          </a:effectRef>
+          <a:fontRef idx="minor">
+            <a:schemeClr val="lt1"/>
+          </a:fontRef>
+        </p:style>
+        <p:txBody>
+          <a:bodyPr rtlCol="0" anchor="ctr"/>
+          <a:lstStyle/>
+          <a:p>
+            <a:pPr algn="ctr"/>
+            <a:endParaRPr/>
+          </a:p>
+        </p:txBody>
+      </p:sp>
+      <p:sp>
+        <p:nvSpPr>
+          <p:cNvPr id="12" name="TextBox 11"/>
+          <p:cNvSpPr txBox="1"/>
+          <p:nvPr/>
+        </p:nvSpPr>
+        <p:spPr>
+          <a:xfrm>
+            <a:off x="5303520" y="2240280"/>
+            <a:ext cx="2926080" cy="603504"/>
+          </a:xfrm>
+          <a:prstGeom prst="rect">
+            <a:avLst/>
+          </a:prstGeom>
+          <a:noFill/>
+        </p:spPr>
+        <p:txBody>
+          <a:bodyPr wrap="square" lIns="0" tIns="0" rIns="0" bIns="0" anchor="ctr">
+            <a:spAutoFit/>
+          </a:bodyPr>
+          <a:lstStyle/>
+          <a:p>
+            <a:pPr algn="l">
+              <a:lnSpc>
+                <a:spcPct val="100000"/>
+              </a:lnSpc>
+              <a:spcBef>
+                <a:spcPts val="0"/>
+              </a:spcBef>
+              <a:spcAft>
+                <a:spcPts val="400"/>
+              </a:spcAft>
+            </a:pPr>
+            <a:r>
+              <a:rPr sz="1200" b="1" i="0">
+                <a:solidFill>
+                  <a:srgbClr val="17223B"/>
+                </a:solidFill>
+                <a:latin typeface="Poppins"/>
+              </a:rPr>
+              <a:t>Guard Clause hvata uslov</a:t>
+            </a:r>
+          </a:p>
+        </p:txBody>
+      </p:sp>
+      <p:sp>
+        <p:nvSpPr>
+          <p:cNvPr id="13" name="Chevron 12"/>
+          <p:cNvSpPr/>
+          <p:nvPr/>
+        </p:nvSpPr>
+        <p:spPr>
+          <a:xfrm rot="5400000">
+            <a:off x="6620255" y="2852928"/>
+            <a:ext cx="292608" cy="201168"/>
+          </a:xfrm>
+          <a:prstGeom prst="chevron">
+            <a:avLst/>
+          </a:prstGeom>
+          <a:solidFill>
+            <a:srgbClr val="6C7688"/>
+          </a:solidFill>
+          <a:ln>
+            <a:noFill/>
+          </a:ln>
+          <a:effectLst/>
+        </p:spPr>
+        <p:style>
+          <a:lnRef idx="1">
+            <a:schemeClr val="accent1"/>
+          </a:lnRef>
+          <a:fillRef idx="3">
+            <a:schemeClr val="accent1"/>
+          </a:fillRef>
+          <a:effectRef idx="2">
+            <a:schemeClr val="accent1"/>
+          </a:effectRef>
+          <a:fontRef idx="minor">
+            <a:schemeClr val="lt1"/>
+          </a:fontRef>
+        </p:style>
+        <p:txBody>
+          <a:bodyPr rtlCol="0" anchor="ctr"/>
+          <a:lstStyle/>
+          <a:p>
+            <a:pPr algn="ctr"/>
+            <a:endParaRPr/>
+          </a:p>
+        </p:txBody>
+      </p:sp>
+      <p:sp>
+        <p:nvSpPr>
+          <p:cNvPr id="14" name="Rounded Rectangle 13"/>
+          <p:cNvSpPr/>
+          <p:nvPr/>
+        </p:nvSpPr>
+        <p:spPr>
+          <a:xfrm>
+            <a:off x="5120640" y="3063240"/>
+            <a:ext cx="3291840" cy="603504"/>
+          </a:xfrm>
+          <a:prstGeom prst="roundRect">
+            <a:avLst>
+              <a:gd name="adj" fmla="val 12000"/>
+            </a:avLst>
+          </a:prstGeom>
+          <a:solidFill>
+            <a:srgbClr val="FBE9E4"/>
+          </a:solidFill>
+          <a:ln>
+            <a:noFill/>
+          </a:ln>
+          <a:effectLst>
+            <a:outerShdw blurRad="90000" dist="38100" dir="5400000" rotWithShape="0">
+              <a:srgbClr val="9BA6B2">
+                <a:alpha val="38000"/>
+              </a:srgbClr>
+            </a:outerShdw>
+          </a:effectLst>
+        </p:spPr>
+        <p:style>
+          <a:lnRef idx="1">
+            <a:schemeClr val="accent1"/>
+          </a:lnRef>
+          <a:fillRef idx="3">
+            <a:schemeClr val="accent1"/>
+          </a:fillRef>
+          <a:effectRef idx="2">
+            <a:schemeClr val="accent1"/>
+          </a:effectRef>
+          <a:fontRef idx="minor">
+            <a:schemeClr val="lt1"/>
+          </a:fontRef>
+        </p:style>
+        <p:txBody>
+          <a:bodyPr rtlCol="0" anchor="ctr"/>
+          <a:lstStyle/>
+          <a:p>
+            <a:pPr algn="ctr"/>
+            <a:endParaRPr/>
+          </a:p>
+        </p:txBody>
+      </p:sp>
+      <p:sp>
+        <p:nvSpPr>
+          <p:cNvPr id="15" name="TextBox 14"/>
+          <p:cNvSpPr txBox="1"/>
+          <p:nvPr/>
+        </p:nvSpPr>
+        <p:spPr>
+          <a:xfrm>
+            <a:off x="5303520" y="3063240"/>
+            <a:ext cx="2926080" cy="603504"/>
+          </a:xfrm>
+          <a:prstGeom prst="rect">
+            <a:avLst/>
+          </a:prstGeom>
+          <a:noFill/>
+        </p:spPr>
+        <p:txBody>
+          <a:bodyPr wrap="square" lIns="0" tIns="0" rIns="0" bIns="0" anchor="ctr">
+            <a:spAutoFit/>
+          </a:bodyPr>
+          <a:lstStyle/>
+          <a:p>
+            <a:pPr algn="l">
+              <a:lnSpc>
+                <a:spcPct val="100000"/>
+              </a:lnSpc>
+              <a:spcBef>
+                <a:spcPts val="0"/>
+              </a:spcBef>
+              <a:spcAft>
+                <a:spcPts val="400"/>
+              </a:spcAft>
+            </a:pPr>
+            <a:r>
+              <a:rPr sz="1200" b="1" i="0">
+                <a:solidFill>
+                  <a:srgbClr val="CF5340"/>
+                </a:solidFill>
+                <a:latin typeface="Poppins"/>
+              </a:rPr>
+              <a:t>Shutdown: u = 0, kretanje stoji</a:t>
+            </a:r>
+          </a:p>
+        </p:txBody>
+      </p:sp>
+      <p:sp>
+        <p:nvSpPr>
+          <p:cNvPr id="16" name="Chevron 15"/>
+          <p:cNvSpPr/>
+          <p:nvPr/>
+        </p:nvSpPr>
+        <p:spPr>
+          <a:xfrm rot="5400000">
+            <a:off x="6620255" y="3675887"/>
+            <a:ext cx="292608" cy="201168"/>
+          </a:xfrm>
+          <a:prstGeom prst="chevron">
+            <a:avLst/>
+          </a:prstGeom>
+          <a:solidFill>
+            <a:srgbClr val="6C7688"/>
+          </a:solidFill>
+          <a:ln>
+            <a:noFill/>
+          </a:ln>
+          <a:effectLst/>
+        </p:spPr>
+        <p:style>
+          <a:lnRef idx="1">
+            <a:schemeClr val="accent1"/>
+          </a:lnRef>
+          <a:fillRef idx="3">
+            <a:schemeClr val="accent1"/>
+          </a:fillRef>
+          <a:effectRef idx="2">
+            <a:schemeClr val="accent1"/>
+          </a:effectRef>
+          <a:fontRef idx="minor">
+            <a:schemeClr val="lt1"/>
+          </a:fontRef>
+        </p:style>
+        <p:txBody>
+          <a:bodyPr rtlCol="0" anchor="ctr"/>
+          <a:lstStyle/>
+          <a:p>
+            <a:pPr algn="ctr"/>
+            <a:endParaRPr/>
+          </a:p>
+        </p:txBody>
+      </p:sp>
+      <p:sp>
+        <p:nvSpPr>
+          <p:cNvPr id="17" name="Rounded Rectangle 16"/>
+          <p:cNvSpPr/>
+          <p:nvPr/>
+        </p:nvSpPr>
+        <p:spPr>
+          <a:xfrm>
+            <a:off x="5120640" y="3886200"/>
+            <a:ext cx="3291840" cy="603504"/>
+          </a:xfrm>
+          <a:prstGeom prst="roundRect">
+            <a:avLst>
+              <a:gd name="adj" fmla="val 12000"/>
+            </a:avLst>
+          </a:prstGeom>
+          <a:solidFill>
+            <a:srgbClr val="E6F3EC"/>
+          </a:solidFill>
+          <a:ln>
+            <a:noFill/>
+          </a:ln>
+          <a:effectLst>
+            <a:outerShdw blurRad="90000" dist="38100" dir="5400000" rotWithShape="0">
+              <a:srgbClr val="9BA6B2">
+                <a:alpha val="38000"/>
+              </a:srgbClr>
+            </a:outerShdw>
+          </a:effectLst>
+        </p:spPr>
+        <p:style>
+          <a:lnRef idx="1">
+            <a:schemeClr val="accent1"/>
+          </a:lnRef>
+          <a:fillRef idx="3">
+            <a:schemeClr val="accent1"/>
+          </a:fillRef>
+          <a:effectRef idx="2">
+            <a:schemeClr val="accent1"/>
+          </a:effectRef>
+          <a:fontRef idx="minor">
+            <a:schemeClr val="lt1"/>
+          </a:fontRef>
+        </p:style>
+        <p:txBody>
+          <a:bodyPr rtlCol="0" anchor="ctr"/>
+          <a:lstStyle/>
+          <a:p>
+            <a:pPr algn="ctr"/>
+            <a:endParaRPr/>
+          </a:p>
+        </p:txBody>
+      </p:sp>
+      <p:sp>
+        <p:nvSpPr>
+          <p:cNvPr id="18" name="TextBox 17"/>
+          <p:cNvSpPr txBox="1"/>
+          <p:nvPr/>
+        </p:nvSpPr>
+        <p:spPr>
+          <a:xfrm>
+            <a:off x="5303520" y="3886200"/>
+            <a:ext cx="2926080" cy="603504"/>
+          </a:xfrm>
+          <a:prstGeom prst="rect">
+            <a:avLst/>
+          </a:prstGeom>
+          <a:noFill/>
+        </p:spPr>
+        <p:txBody>
+          <a:bodyPr wrap="square" lIns="0" tIns="0" rIns="0" bIns="0" anchor="ctr">
+            <a:spAutoFit/>
+          </a:bodyPr>
+          <a:lstStyle/>
+          <a:p>
+            <a:pPr algn="l">
+              <a:lnSpc>
+                <a:spcPct val="100000"/>
+              </a:lnSpc>
+              <a:spcBef>
+                <a:spcPts val="0"/>
+              </a:spcBef>
+              <a:spcAft>
+                <a:spcPts val="400"/>
+              </a:spcAft>
+            </a:pPr>
+            <a:r>
+              <a:rPr sz="1200" b="1" i="0">
+                <a:solidFill>
+                  <a:srgbClr val="3F9E7C"/>
+                </a:solidFill>
+                <a:latin typeface="Poppins"/>
+              </a:rPr>
+              <a:t>Bezbedan, konzistentan izlaz</a:t>
+            </a:r>
+          </a:p>
+        </p:txBody>
+      </p:sp>
+    </p:spTree>
+  </p:cSld>
+  <p:clrMapOvr>
+    <a:masterClrMapping/>
+  </p:clrMapOvr>
+  <p:timing>
+    <p:tnLst>
+      <p:par>
+        <p:cTn id="1" dur="indefinite" restart="never" nodeType="tmRoot"/>
+      </p:par>
+    </p:tnLst>
+  </p:timing>
+</p:sld>
+</file>
+
+<file path=ppt/slides/slide14.xml><?xml version="1.0" encoding="utf-8"?>
+<p:sld xmlns:a="http://schemas.openxmlformats.org/drawingml/2006/main" xmlns:r="http://schemas.openxmlformats.org/officeDocument/2006/relationships" xmlns:p="http://schemas.openxmlformats.org/presentationml/2006/main">
+  <p:cSld>
+    <p:spTree>
+      <p:nvGrpSpPr>
+        <p:cNvPr id="1" name=""/>
+        <p:cNvGrpSpPr/>
+        <p:nvPr/>
+      </p:nvGrpSpPr>
+      <p:grpSpPr>
+        <a:xfrm>
+          <a:off x="0" y="0"/>
+          <a:ext cx="0" cy="0"/>
+          <a:chOff x="0" y="0"/>
+          <a:chExt cx="0" cy="0"/>
+        </a:xfrm>
+      </p:grpSpPr>
+      <p:sp>
+        <p:nvSpPr>
+          <p:cNvPr id="2" name="Rectangle 1"/>
+          <p:cNvSpPr/>
+          <p:nvPr/>
+        </p:nvSpPr>
+        <p:spPr>
+          <a:xfrm>
+            <a:off x="0" y="0"/>
+            <a:ext cx="9144000" cy="5143500"/>
+          </a:xfrm>
+          <a:prstGeom prst="rect">
+            <a:avLst/>
+          </a:prstGeom>
+          <a:solidFill>
+            <a:srgbClr val="17223B"/>
+          </a:solidFill>
+          <a:ln>
+            <a:noFill/>
+          </a:ln>
+          <a:effectLst/>
+        </p:spPr>
+        <p:style>
+          <a:lnRef idx="1">
+            <a:schemeClr val="accent1"/>
+          </a:lnRef>
+          <a:fillRef idx="3">
+            <a:schemeClr val="accent1"/>
+          </a:fillRef>
+          <a:effectRef idx="2">
+            <a:schemeClr val="accent1"/>
+          </a:effectRef>
+          <a:fontRef idx="minor">
+            <a:schemeClr val="lt1"/>
+          </a:fontRef>
+        </p:style>
+        <p:txBody>
+          <a:bodyPr rtlCol="0" anchor="ctr"/>
+          <a:lstStyle/>
+          <a:p>
+            <a:pPr algn="ctr"/>
+            <a:endParaRPr/>
+          </a:p>
+        </p:txBody>
+      </p:sp>
+      <p:sp>
+        <p:nvSpPr>
+          <p:cNvPr id="3" name="Rounded Rectangle 2"/>
+          <p:cNvSpPr/>
+          <p:nvPr/>
+        </p:nvSpPr>
+        <p:spPr>
+          <a:xfrm>
+            <a:off x="502920" y="502920"/>
+            <a:ext cx="128016" cy="457200"/>
+          </a:xfrm>
+          <a:prstGeom prst="roundRect">
+            <a:avLst>
+              <a:gd name="adj" fmla="val 35000"/>
+            </a:avLst>
+          </a:prstGeom>
+          <a:solidFill>
+            <a:srgbClr val="D9832F"/>
+          </a:solidFill>
+          <a:ln>
+            <a:noFill/>
+          </a:ln>
+          <a:effectLst/>
+        </p:spPr>
+        <p:style>
+          <a:lnRef idx="1">
+            <a:schemeClr val="accent1"/>
+          </a:lnRef>
+          <a:fillRef idx="3">
+            <a:schemeClr val="accent1"/>
+          </a:fillRef>
+          <a:effectRef idx="2">
+            <a:schemeClr val="accent1"/>
+          </a:effectRef>
+          <a:fontRef idx="minor">
+            <a:schemeClr val="lt1"/>
+          </a:fontRef>
+        </p:style>
+        <p:txBody>
+          <a:bodyPr rtlCol="0" anchor="ctr"/>
+          <a:lstStyle/>
+          <a:p>
+            <a:pPr algn="ctr"/>
+            <a:endParaRPr/>
+          </a:p>
+        </p:txBody>
+      </p:sp>
+      <p:sp>
+        <p:nvSpPr>
+          <p:cNvPr id="4" name="TextBox 3"/>
+          <p:cNvSpPr txBox="1"/>
+          <p:nvPr/>
+        </p:nvSpPr>
+        <p:spPr>
+          <a:xfrm>
+            <a:off x="749808" y="457200"/>
+            <a:ext cx="5486400" cy="274320"/>
+          </a:xfrm>
+          <a:prstGeom prst="rect">
+            <a:avLst/>
+          </a:prstGeom>
+          <a:noFill/>
+        </p:spPr>
+        <p:txBody>
+          <a:bodyPr wrap="square" lIns="0" tIns="0" rIns="0" bIns="0" anchor="t">
+            <a:spAutoFit/>
+          </a:bodyPr>
+          <a:lstStyle/>
+          <a:p>
+            <a:pPr algn="l">
+              <a:lnSpc>
+                <a:spcPct val="100000"/>
+              </a:lnSpc>
+              <a:spcBef>
+                <a:spcPts val="0"/>
+              </a:spcBef>
+              <a:spcAft>
+                <a:spcPts val="400"/>
+              </a:spcAft>
+            </a:pPr>
+            <a:r>
+              <a:rPr sz="1100" b="1" i="0">
+                <a:solidFill>
+                  <a:srgbClr val="D9832F"/>
+                </a:solidFill>
+                <a:latin typeface="Poppins"/>
+              </a:rPr>
+              <a:t>ZAKLJUČAK</a:t>
+            </a:r>
+          </a:p>
+        </p:txBody>
+      </p:sp>
+      <p:sp>
+        <p:nvSpPr>
+          <p:cNvPr id="5" name="TextBox 4"/>
+          <p:cNvSpPr txBox="1"/>
+          <p:nvPr/>
+        </p:nvSpPr>
+        <p:spPr>
+          <a:xfrm>
+            <a:off x="749808" y="713232"/>
+            <a:ext cx="7680960" cy="548640"/>
+          </a:xfrm>
+          <a:prstGeom prst="rect">
+            <a:avLst/>
+          </a:prstGeom>
+          <a:noFill/>
+        </p:spPr>
+        <p:txBody>
+          <a:bodyPr wrap="square" lIns="0" tIns="0" rIns="0" bIns="0" anchor="t">
+            <a:spAutoFit/>
+          </a:bodyPr>
+          <a:lstStyle/>
+          <a:p>
+            <a:pPr algn="l">
+              <a:lnSpc>
+                <a:spcPct val="100000"/>
+              </a:lnSpc>
+              <a:spcBef>
+                <a:spcPts val="0"/>
+              </a:spcBef>
+              <a:spcAft>
+                <a:spcPts val="400"/>
+              </a:spcAft>
+            </a:pPr>
+            <a:r>
               <a:rPr sz="2500" b="1" i="0">
                 <a:solidFill>
                   <a:srgbClr val="FFFFFF"/>
@@ -8652,6 +11856,13 @@
   <p:clrMapOvr>
     <a:masterClrMapping/>
   </p:clrMapOvr>
+  <p:timing>
+    <p:tnLst>
+      <p:par>
+        <p:cTn id="1" dur="indefinite" restart="never" nodeType="tmRoot"/>
+      </p:par>
+    </p:tnLst>
+  </p:timing>
 </p:sld>
 </file>
 
@@ -9786,6 +12997,13 @@
   <p:clrMapOvr>
     <a:masterClrMapping/>
   </p:clrMapOvr>
+  <p:timing>
+    <p:tnLst>
+      <p:par>
+        <p:cTn id="1" dur="indefinite" restart="never" nodeType="tmRoot"/>
+      </p:par>
+    </p:tnLst>
+  </p:timing>
 </p:sld>
 </file>
 
@@ -10711,6 +13929,13 @@
   <p:clrMapOvr>
     <a:masterClrMapping/>
   </p:clrMapOvr>
+  <p:timing>
+    <p:tnLst>
+      <p:par>
+        <p:cTn id="1" dur="indefinite" restart="never" nodeType="tmRoot"/>
+      </p:par>
+    </p:tnLst>
+  </p:timing>
 </p:sld>
 </file>
 
@@ -12219,6 +15444,13 @@
   <p:clrMapOvr>
     <a:masterClrMapping/>
   </p:clrMapOvr>
+  <p:timing>
+    <p:tnLst>
+      <p:par>
+        <p:cTn id="1" dur="indefinite" restart="never" nodeType="tmRoot"/>
+      </p:par>
+    </p:tnLst>
+  </p:timing>
 </p:sld>
 </file>
 
@@ -14560,6 +17792,13 @@
   <p:clrMapOvr>
     <a:masterClrMapping/>
   </p:clrMapOvr>
+  <p:timing>
+    <p:tnLst>
+      <p:par>
+        <p:cTn id="1" dur="indefinite" restart="never" nodeType="tmRoot"/>
+      </p:par>
+    </p:tnLst>
+  </p:timing>
 </p:sld>
 </file>
 
@@ -15924,6 +19163,13 @@
   <p:clrMapOvr>
     <a:masterClrMapping/>
   </p:clrMapOvr>
+  <p:timing>
+    <p:tnLst>
+      <p:par>
+        <p:cTn id="1" dur="indefinite" restart="never" nodeType="tmRoot"/>
+      </p:par>
+    </p:tnLst>
+  </p:timing>
 </p:sld>
 </file>
 
@@ -16970,6 +20216,13 @@
   <p:clrMapOvr>
     <a:masterClrMapping/>
   </p:clrMapOvr>
+  <p:timing>
+    <p:tnLst>
+      <p:par>
+        <p:cTn id="1" dur="indefinite" restart="never" nodeType="tmRoot"/>
+      </p:par>
+    </p:tnLst>
+  </p:timing>
 </p:sld>
 </file>
 
@@ -17251,13 +20504,229 @@
               </a:spcAft>
             </a:pPr>
             <a:r>
-              <a:rPr sz="1100" b="0" i="1">
-                <a:solidFill>
-                  <a:srgbClr val="3A4763"/>
-                </a:solidFill>
-                <a:latin typeface="Calibri"/>
-              </a:rPr>
-              <a:t>Lift prolazi kroz četiri stanja; Guard Clause može u svakom trenutku da presretne tok i povede sistem u Shutdown.</a:t>
+              <a:rPr sz="1100" b="0" i="1" dirty="0">
+                <a:solidFill>
+                  <a:srgbClr val="3A4763"/>
+                </a:solidFill>
+                <a:latin typeface="Calibri"/>
+              </a:rPr>
+              <a:t>Lift </a:t>
+            </a:r>
+            <a:r>
+              <a:rPr sz="1100" b="0" i="1" dirty="0" err="1">
+                <a:solidFill>
+                  <a:srgbClr val="3A4763"/>
+                </a:solidFill>
+                <a:latin typeface="Calibri"/>
+              </a:rPr>
+              <a:t>prolazi</a:t>
+            </a:r>
+            <a:r>
+              <a:rPr sz="1100" b="0" i="1" dirty="0">
+                <a:solidFill>
+                  <a:srgbClr val="3A4763"/>
+                </a:solidFill>
+                <a:latin typeface="Calibri"/>
+              </a:rPr>
+              <a:t> </a:t>
+            </a:r>
+            <a:r>
+              <a:rPr sz="1100" b="0" i="1" dirty="0" err="1">
+                <a:solidFill>
+                  <a:srgbClr val="3A4763"/>
+                </a:solidFill>
+                <a:latin typeface="Calibri"/>
+              </a:rPr>
+              <a:t>kroz</a:t>
+            </a:r>
+            <a:r>
+              <a:rPr sz="1100" b="0" i="1" dirty="0">
+                <a:solidFill>
+                  <a:srgbClr val="3A4763"/>
+                </a:solidFill>
+                <a:latin typeface="Calibri"/>
+              </a:rPr>
+              <a:t> </a:t>
+            </a:r>
+            <a:r>
+              <a:rPr sz="1100" b="0" i="1" dirty="0" err="1">
+                <a:solidFill>
+                  <a:srgbClr val="3A4763"/>
+                </a:solidFill>
+                <a:latin typeface="Calibri"/>
+              </a:rPr>
+              <a:t>četiri</a:t>
+            </a:r>
+            <a:r>
+              <a:rPr sz="1100" b="0" i="1" dirty="0">
+                <a:solidFill>
+                  <a:srgbClr val="3A4763"/>
+                </a:solidFill>
+                <a:latin typeface="Calibri"/>
+              </a:rPr>
+              <a:t> </a:t>
+            </a:r>
+            <a:r>
+              <a:rPr sz="1100" b="0" i="1" dirty="0" err="1">
+                <a:solidFill>
+                  <a:srgbClr val="3A4763"/>
+                </a:solidFill>
+                <a:latin typeface="Calibri"/>
+              </a:rPr>
+              <a:t>stanja</a:t>
+            </a:r>
+            <a:r>
+              <a:rPr sz="1100" b="0" i="1" dirty="0">
+                <a:solidFill>
+                  <a:srgbClr val="3A4763"/>
+                </a:solidFill>
+                <a:latin typeface="Calibri"/>
+              </a:rPr>
+              <a:t>; Guard Clause </a:t>
+            </a:r>
+            <a:r>
+              <a:rPr sz="1100" b="0" i="1" dirty="0" err="1">
+                <a:solidFill>
+                  <a:srgbClr val="3A4763"/>
+                </a:solidFill>
+                <a:latin typeface="Calibri"/>
+              </a:rPr>
+              <a:t>može</a:t>
+            </a:r>
+            <a:r>
+              <a:rPr sz="1100" b="0" i="1" dirty="0">
+                <a:solidFill>
+                  <a:srgbClr val="3A4763"/>
+                </a:solidFill>
+                <a:latin typeface="Calibri"/>
+              </a:rPr>
+              <a:t> u </a:t>
+            </a:r>
+            <a:r>
+              <a:rPr sz="1100" b="0" i="1" dirty="0" err="1">
+                <a:solidFill>
+                  <a:srgbClr val="3A4763"/>
+                </a:solidFill>
+                <a:latin typeface="Calibri"/>
+              </a:rPr>
+              <a:t>svakom</a:t>
+            </a:r>
+            <a:r>
+              <a:rPr sz="1100" b="0" i="1" dirty="0">
+                <a:solidFill>
+                  <a:srgbClr val="3A4763"/>
+                </a:solidFill>
+                <a:latin typeface="Calibri"/>
+              </a:rPr>
+              <a:t> </a:t>
+            </a:r>
+            <a:r>
+              <a:rPr sz="1100" b="0" i="1" dirty="0" err="1">
+                <a:solidFill>
+                  <a:srgbClr val="3A4763"/>
+                </a:solidFill>
+                <a:latin typeface="Calibri"/>
+              </a:rPr>
+              <a:t>trenutku</a:t>
+            </a:r>
+            <a:r>
+              <a:rPr sz="1100" b="0" i="1" dirty="0">
+                <a:solidFill>
+                  <a:srgbClr val="3A4763"/>
+                </a:solidFill>
+                <a:latin typeface="Calibri"/>
+              </a:rPr>
+              <a:t> da </a:t>
+            </a:r>
+            <a:r>
+              <a:rPr sz="1100" b="0" i="1" dirty="0" err="1">
+                <a:solidFill>
+                  <a:srgbClr val="3A4763"/>
+                </a:solidFill>
+                <a:latin typeface="Calibri"/>
+              </a:rPr>
+              <a:t>presretne</a:t>
+            </a:r>
+            <a:r>
+              <a:rPr sz="1100" b="0" i="1" dirty="0">
+                <a:solidFill>
+                  <a:srgbClr val="3A4763"/>
+                </a:solidFill>
+                <a:latin typeface="Calibri"/>
+              </a:rPr>
+              <a:t> </a:t>
+            </a:r>
+            <a:r>
+              <a:rPr sz="1100" b="0" i="1" dirty="0" err="1">
+                <a:solidFill>
+                  <a:srgbClr val="3A4763"/>
+                </a:solidFill>
+                <a:latin typeface="Calibri"/>
+              </a:rPr>
+              <a:t>tok</a:t>
+            </a:r>
+            <a:r>
+              <a:rPr sz="1100" b="0" i="1" dirty="0">
+                <a:solidFill>
+                  <a:srgbClr val="3A4763"/>
+                </a:solidFill>
+                <a:latin typeface="Calibri"/>
+              </a:rPr>
+              <a:t> </a:t>
+            </a:r>
+            <a:r>
+              <a:rPr sz="1100" b="0" i="1" dirty="0" err="1">
+                <a:solidFill>
+                  <a:srgbClr val="3A4763"/>
+                </a:solidFill>
+                <a:latin typeface="Calibri"/>
+              </a:rPr>
+              <a:t>i</a:t>
+            </a:r>
+            <a:r>
+              <a:rPr sz="1100" b="0" i="1" dirty="0">
+                <a:solidFill>
+                  <a:srgbClr val="3A4763"/>
+                </a:solidFill>
+                <a:latin typeface="Calibri"/>
+              </a:rPr>
+              <a:t> </a:t>
+            </a:r>
+            <a:r>
+              <a:rPr sz="1100" b="0" i="1" dirty="0" err="1">
+                <a:solidFill>
+                  <a:srgbClr val="3A4763"/>
+                </a:solidFill>
+                <a:latin typeface="Calibri"/>
+              </a:rPr>
+              <a:t>povede</a:t>
+            </a:r>
+            <a:r>
+              <a:rPr sz="1100" b="0" i="1" dirty="0">
+                <a:solidFill>
+                  <a:srgbClr val="3A4763"/>
+                </a:solidFill>
+                <a:latin typeface="Calibri"/>
+              </a:rPr>
+              <a:t> </a:t>
+            </a:r>
+            <a:r>
+              <a:rPr sz="1100" b="0" i="1" dirty="0" err="1">
+                <a:solidFill>
+                  <a:srgbClr val="3A4763"/>
+                </a:solidFill>
+                <a:latin typeface="Calibri"/>
+              </a:rPr>
+              <a:t>sistem</a:t>
+            </a:r>
+            <a:r>
+              <a:rPr sz="1100" b="0" i="1" dirty="0">
+                <a:solidFill>
+                  <a:srgbClr val="3A4763"/>
+                </a:solidFill>
+                <a:latin typeface="Calibri"/>
+              </a:rPr>
+              <a:t> u Shutdown.</a:t>
             </a:r>
           </a:p>
         </p:txBody>
@@ -18324,6 +21793,13 @@
   <p:clrMapOvr>
     <a:masterClrMapping/>
   </p:clrMapOvr>
+  <p:timing>
+    <p:tnLst>
+      <p:par>
+        <p:cTn id="1" dur="indefinite" restart="never" nodeType="tmRoot"/>
+      </p:par>
+    </p:tnLst>
+  </p:timing>
 </p:sld>
 </file>
 
@@ -18470,7 +21946,7 @@
               </a:spcAft>
             </a:pPr>
             <a:r>
-              <a:rPr sz="1050" b="1" i="0">
+              <a:rPr sz="1050" b="1" i="0" dirty="0">
                 <a:solidFill>
                   <a:srgbClr val="0E7C86"/>
                 </a:solidFill>
@@ -18579,8 +22055,8 @@
         </p:nvSpPr>
         <p:spPr>
           <a:xfrm>
-            <a:off x="749808" y="1371600"/>
-            <a:ext cx="4160520" cy="3291840"/>
+            <a:off x="953998" y="1054359"/>
+            <a:ext cx="7429356" cy="4271939"/>
           </a:xfrm>
           <a:prstGeom prst="rect">
             <a:avLst/>
@@ -18592,6 +22068,1767 @@
             <a:spAutoFit/>
           </a:bodyPr>
           <a:lstStyle/>
+          <a:p>
+            <a:pPr>
+              <a:spcBef>
+                <a:spcPts val="0"/>
+              </a:spcBef>
+              <a:spcAft>
+                <a:spcPts val="700"/>
+              </a:spcAft>
+            </a:pPr>
+            <a:r>
+              <a:rPr lang="en-US" sz="1600" b="1" dirty="0" smtClean="0">
+                <a:solidFill>
+                  <a:srgbClr val="3A4763"/>
+                </a:solidFill>
+                <a:latin typeface="+mj-lt"/>
+              </a:rPr>
+              <a:t>•  </a:t>
+            </a:r>
+            <a:r>
+              <a:rPr lang="en-US" sz="1600" b="1" dirty="0" err="1">
+                <a:solidFill>
+                  <a:srgbClr val="3A4763"/>
+                </a:solidFill>
+                <a:latin typeface="+mj-lt"/>
+              </a:rPr>
+              <a:t>Struktura</a:t>
+            </a:r>
+            <a:endParaRPr lang="en-US" sz="1600" b="1" dirty="0">
+              <a:solidFill>
+                <a:srgbClr val="3A4763"/>
+              </a:solidFill>
+              <a:latin typeface="+mj-lt"/>
+            </a:endParaRPr>
+          </a:p>
+          <a:p>
+            <a:pPr marL="628650" lvl="1" indent="-171450">
+              <a:spcAft>
+                <a:spcPts val="700"/>
+              </a:spcAft>
+              <a:buFont typeface="Wingdings" panose="05000000000000000000" pitchFamily="2" charset="2"/>
+              <a:buChar char="§"/>
+            </a:pPr>
+            <a:r>
+              <a:rPr lang="en-US" sz="1100" dirty="0" err="1">
+                <a:solidFill>
+                  <a:srgbClr val="3A4763"/>
+                </a:solidFill>
+                <a:latin typeface="+mj-lt"/>
+              </a:rPr>
+              <a:t>Jedna</a:t>
+            </a:r>
+            <a:r>
+              <a:rPr lang="en-US" sz="1100" dirty="0">
+                <a:solidFill>
+                  <a:srgbClr val="3A4763"/>
+                </a:solidFill>
+                <a:latin typeface="+mj-lt"/>
+              </a:rPr>
+              <a:t> While </a:t>
+            </a:r>
+            <a:r>
+              <a:rPr lang="en-US" sz="1100" dirty="0" err="1">
+                <a:solidFill>
+                  <a:srgbClr val="3A4763"/>
+                </a:solidFill>
+                <a:latin typeface="+mj-lt"/>
+              </a:rPr>
+              <a:t>petlja</a:t>
+            </a:r>
+            <a:r>
+              <a:rPr lang="en-US" sz="1100" dirty="0">
+                <a:solidFill>
+                  <a:srgbClr val="3A4763"/>
+                </a:solidFill>
+                <a:latin typeface="+mj-lt"/>
+              </a:rPr>
+              <a:t>; </a:t>
+            </a:r>
+            <a:r>
+              <a:rPr lang="en-US" sz="1100" dirty="0" err="1">
+                <a:solidFill>
+                  <a:srgbClr val="3A4763"/>
+                </a:solidFill>
+                <a:latin typeface="+mj-lt"/>
+              </a:rPr>
+              <a:t>kroz</a:t>
+            </a:r>
+            <a:r>
+              <a:rPr lang="en-US" sz="1100" dirty="0">
+                <a:solidFill>
+                  <a:srgbClr val="3A4763"/>
+                </a:solidFill>
+                <a:latin typeface="+mj-lt"/>
+              </a:rPr>
+              <a:t> shift-</a:t>
+            </a:r>
+            <a:r>
+              <a:rPr lang="en-US" sz="1100" dirty="0" err="1">
+                <a:solidFill>
+                  <a:srgbClr val="3A4763"/>
+                </a:solidFill>
+                <a:latin typeface="+mj-lt"/>
+              </a:rPr>
+              <a:t>registre</a:t>
+            </a:r>
+            <a:r>
+              <a:rPr lang="en-US" sz="1100" dirty="0">
+                <a:solidFill>
+                  <a:srgbClr val="3A4763"/>
+                </a:solidFill>
+                <a:latin typeface="+mj-lt"/>
+              </a:rPr>
+              <a:t> se </a:t>
+            </a:r>
+            <a:r>
+              <a:rPr lang="en-US" sz="1100" dirty="0" err="1">
+                <a:solidFill>
+                  <a:srgbClr val="3A4763"/>
+                </a:solidFill>
+                <a:latin typeface="+mj-lt"/>
+              </a:rPr>
+              <a:t>kroz</a:t>
+            </a:r>
+            <a:r>
+              <a:rPr lang="en-US" sz="1100" dirty="0">
+                <a:solidFill>
+                  <a:srgbClr val="3A4763"/>
+                </a:solidFill>
+                <a:latin typeface="+mj-lt"/>
+              </a:rPr>
+              <a:t> </a:t>
+            </a:r>
+            <a:r>
+              <a:rPr lang="en-US" sz="1100" dirty="0" err="1">
+                <a:solidFill>
+                  <a:srgbClr val="3A4763"/>
+                </a:solidFill>
+                <a:latin typeface="+mj-lt"/>
+              </a:rPr>
+              <a:t>iteracije</a:t>
+            </a:r>
+            <a:r>
+              <a:rPr lang="en-US" sz="1100" dirty="0">
+                <a:solidFill>
+                  <a:srgbClr val="3A4763"/>
+                </a:solidFill>
+                <a:latin typeface="+mj-lt"/>
+              </a:rPr>
+              <a:t> nose: </a:t>
+            </a:r>
+            <a:r>
+              <a:rPr lang="en-US" sz="1100" dirty="0" err="1">
+                <a:solidFill>
+                  <a:srgbClr val="3A4763"/>
+                </a:solidFill>
+                <a:latin typeface="+mj-lt"/>
+              </a:rPr>
+              <a:t>trenutno</a:t>
+            </a:r>
+            <a:r>
+              <a:rPr lang="en-US" sz="1100" dirty="0">
+                <a:solidFill>
+                  <a:srgbClr val="3A4763"/>
+                </a:solidFill>
+                <a:latin typeface="+mj-lt"/>
+              </a:rPr>
+              <a:t> </a:t>
+            </a:r>
+            <a:r>
+              <a:rPr lang="en-US" sz="1100" dirty="0" err="1">
+                <a:solidFill>
+                  <a:srgbClr val="3A4763"/>
+                </a:solidFill>
+                <a:latin typeface="+mj-lt"/>
+              </a:rPr>
+              <a:t>stanje</a:t>
+            </a:r>
+            <a:r>
+              <a:rPr lang="en-US" sz="1100" dirty="0">
+                <a:solidFill>
+                  <a:srgbClr val="3A4763"/>
+                </a:solidFill>
+                <a:latin typeface="+mj-lt"/>
+              </a:rPr>
+              <a:t>, </a:t>
+            </a:r>
+            <a:r>
+              <a:rPr lang="en-US" sz="1100" dirty="0" err="1">
+                <a:solidFill>
+                  <a:srgbClr val="3A4763"/>
+                </a:solidFill>
+                <a:latin typeface="+mj-lt"/>
+              </a:rPr>
+              <a:t>integralna</a:t>
+            </a:r>
+            <a:r>
+              <a:rPr lang="en-US" sz="1100" dirty="0">
+                <a:solidFill>
+                  <a:srgbClr val="3A4763"/>
+                </a:solidFill>
+                <a:latin typeface="+mj-lt"/>
+              </a:rPr>
+              <a:t> </a:t>
+            </a:r>
+            <a:r>
+              <a:rPr lang="en-US" sz="1100" dirty="0" err="1">
+                <a:solidFill>
+                  <a:srgbClr val="3A4763"/>
+                </a:solidFill>
+                <a:latin typeface="+mj-lt"/>
+              </a:rPr>
+              <a:t>suma</a:t>
+            </a:r>
+            <a:r>
+              <a:rPr lang="en-US" sz="1100" dirty="0">
+                <a:solidFill>
+                  <a:srgbClr val="3A4763"/>
+                </a:solidFill>
+                <a:latin typeface="+mj-lt"/>
+              </a:rPr>
+              <a:t> </a:t>
+            </a:r>
+            <a:r>
+              <a:rPr lang="en-US" sz="1100" dirty="0" err="1">
+                <a:solidFill>
+                  <a:srgbClr val="3A4763"/>
+                </a:solidFill>
+                <a:latin typeface="+mj-lt"/>
+              </a:rPr>
+              <a:t>regulatora</a:t>
+            </a:r>
+            <a:endParaRPr lang="en-US" sz="1100" dirty="0">
+              <a:solidFill>
+                <a:srgbClr val="3A4763"/>
+              </a:solidFill>
+              <a:latin typeface="+mj-lt"/>
+            </a:endParaRPr>
+          </a:p>
+          <a:p>
+            <a:pPr marL="628650" lvl="1" indent="-171450">
+              <a:spcAft>
+                <a:spcPts val="700"/>
+              </a:spcAft>
+              <a:buFont typeface="Wingdings" panose="05000000000000000000" pitchFamily="2" charset="2"/>
+              <a:buChar char="§"/>
+            </a:pPr>
+            <a:r>
+              <a:rPr lang="en-US" sz="1100" dirty="0">
+                <a:solidFill>
+                  <a:srgbClr val="3A4763"/>
+                </a:solidFill>
+                <a:latin typeface="+mj-lt"/>
+              </a:rPr>
+              <a:t>U HIL </a:t>
+            </a:r>
+            <a:r>
+              <a:rPr lang="en-US" sz="1100" dirty="0" err="1">
+                <a:solidFill>
+                  <a:srgbClr val="3A4763"/>
+                </a:solidFill>
+                <a:latin typeface="+mj-lt"/>
+              </a:rPr>
+              <a:t>verziji</a:t>
+            </a:r>
+            <a:r>
+              <a:rPr lang="en-US" sz="1100" dirty="0">
+                <a:solidFill>
+                  <a:srgbClr val="3A4763"/>
+                </a:solidFill>
+                <a:latin typeface="+mj-lt"/>
+              </a:rPr>
+              <a:t> </a:t>
+            </a:r>
+            <a:r>
+              <a:rPr lang="en-US" sz="1100" dirty="0" err="1">
+                <a:solidFill>
+                  <a:srgbClr val="3A4763"/>
+                </a:solidFill>
+                <a:latin typeface="+mj-lt"/>
+              </a:rPr>
+              <a:t>poziciju</a:t>
+            </a:r>
+            <a:r>
+              <a:rPr lang="en-US" sz="1100" dirty="0">
+                <a:solidFill>
+                  <a:srgbClr val="3A4763"/>
+                </a:solidFill>
+                <a:latin typeface="+mj-lt"/>
+              </a:rPr>
+              <a:t> x automat ne </a:t>
+            </a:r>
+            <a:r>
+              <a:rPr lang="en-US" sz="1100" dirty="0" err="1">
+                <a:solidFill>
+                  <a:srgbClr val="3A4763"/>
+                </a:solidFill>
+                <a:latin typeface="+mj-lt"/>
+              </a:rPr>
+              <a:t>pamti</a:t>
+            </a:r>
+            <a:r>
+              <a:rPr lang="en-US" sz="1100" dirty="0">
+                <a:solidFill>
+                  <a:srgbClr val="3A4763"/>
+                </a:solidFill>
+                <a:latin typeface="+mj-lt"/>
+              </a:rPr>
+              <a:t> </a:t>
+            </a:r>
+            <a:r>
+              <a:rPr lang="en-US" sz="1100" dirty="0" err="1">
+                <a:solidFill>
+                  <a:srgbClr val="3A4763"/>
+                </a:solidFill>
+                <a:latin typeface="+mj-lt"/>
+              </a:rPr>
+              <a:t>lokalno</a:t>
+            </a:r>
+            <a:r>
+              <a:rPr lang="en-US" sz="1100" dirty="0">
+                <a:solidFill>
+                  <a:srgbClr val="3A4763"/>
+                </a:solidFill>
+                <a:latin typeface="+mj-lt"/>
+              </a:rPr>
+              <a:t> — </a:t>
+            </a:r>
+            <a:r>
+              <a:rPr lang="en-US" sz="1100" dirty="0" err="1">
+                <a:solidFill>
+                  <a:srgbClr val="3A4763"/>
+                </a:solidFill>
+                <a:latin typeface="+mj-lt"/>
+              </a:rPr>
+              <a:t>čita</a:t>
+            </a:r>
+            <a:r>
+              <a:rPr lang="en-US" sz="1100" dirty="0">
+                <a:solidFill>
+                  <a:srgbClr val="3A4763"/>
+                </a:solidFill>
+                <a:latin typeface="+mj-lt"/>
+              </a:rPr>
+              <a:t> je </a:t>
+            </a:r>
+            <a:r>
+              <a:rPr lang="en-US" sz="1100" dirty="0" err="1">
+                <a:solidFill>
+                  <a:srgbClr val="3A4763"/>
+                </a:solidFill>
+                <a:latin typeface="+mj-lt"/>
+              </a:rPr>
+              <a:t>sa</a:t>
+            </a:r>
+            <a:r>
+              <a:rPr lang="en-US" sz="1100" dirty="0">
+                <a:solidFill>
+                  <a:srgbClr val="3A4763"/>
+                </a:solidFill>
+                <a:latin typeface="+mj-lt"/>
+              </a:rPr>
+              <a:t> </a:t>
+            </a:r>
+            <a:r>
+              <a:rPr lang="en-US" sz="1100" dirty="0" err="1">
+                <a:solidFill>
+                  <a:srgbClr val="3A4763"/>
+                </a:solidFill>
+                <a:latin typeface="+mj-lt"/>
+              </a:rPr>
+              <a:t>mreže</a:t>
+            </a:r>
+            <a:r>
+              <a:rPr lang="en-US" sz="1100" dirty="0">
+                <a:solidFill>
+                  <a:srgbClr val="3A4763"/>
+                </a:solidFill>
+                <a:latin typeface="+mj-lt"/>
+              </a:rPr>
+              <a:t> (</a:t>
+            </a:r>
+            <a:r>
+              <a:rPr lang="en-US" sz="1100" dirty="0" err="1">
+                <a:solidFill>
+                  <a:srgbClr val="3A4763"/>
+                </a:solidFill>
+                <a:latin typeface="+mj-lt"/>
+              </a:rPr>
+              <a:t>održava</a:t>
+            </a:r>
+            <a:r>
+              <a:rPr lang="en-US" sz="1100" dirty="0">
+                <a:solidFill>
+                  <a:srgbClr val="3A4763"/>
+                </a:solidFill>
+                <a:latin typeface="+mj-lt"/>
+              </a:rPr>
+              <a:t> je model, </a:t>
+            </a:r>
+            <a:r>
+              <a:rPr lang="en-US" sz="1100" dirty="0" err="1">
+                <a:solidFill>
+                  <a:srgbClr val="3A4763"/>
+                </a:solidFill>
+                <a:latin typeface="+mj-lt"/>
+              </a:rPr>
+              <a:t>na</a:t>
+            </a:r>
+            <a:r>
+              <a:rPr lang="en-US" sz="1100" dirty="0">
+                <a:solidFill>
+                  <a:srgbClr val="3A4763"/>
+                </a:solidFill>
+                <a:latin typeface="+mj-lt"/>
+              </a:rPr>
+              <a:t> </a:t>
+            </a:r>
+            <a:r>
+              <a:rPr lang="en-US" sz="1100" dirty="0" err="1">
+                <a:solidFill>
+                  <a:srgbClr val="3A4763"/>
+                </a:solidFill>
+                <a:latin typeface="+mj-lt"/>
+              </a:rPr>
+              <a:t>drugom</a:t>
+            </a:r>
+            <a:r>
+              <a:rPr lang="en-US" sz="1100" dirty="0">
+                <a:solidFill>
+                  <a:srgbClr val="3A4763"/>
+                </a:solidFill>
+                <a:latin typeface="+mj-lt"/>
+              </a:rPr>
+              <a:t> </a:t>
+            </a:r>
+            <a:r>
+              <a:rPr lang="en-US" sz="1100" dirty="0" err="1">
+                <a:solidFill>
+                  <a:srgbClr val="3A4763"/>
+                </a:solidFill>
+                <a:latin typeface="+mj-lt"/>
+              </a:rPr>
+              <a:t>kontroleru</a:t>
+            </a:r>
+            <a:r>
+              <a:rPr lang="en-US" sz="1100" dirty="0" smtClean="0">
+                <a:solidFill>
+                  <a:srgbClr val="3A4763"/>
+                </a:solidFill>
+                <a:latin typeface="+mj-lt"/>
+              </a:rPr>
+              <a:t>)</a:t>
+            </a:r>
+            <a:endParaRPr lang="en-US" sz="1050" dirty="0">
+              <a:solidFill>
+                <a:srgbClr val="3A4763"/>
+              </a:solidFill>
+              <a:latin typeface="+mj-lt"/>
+            </a:endParaRPr>
+          </a:p>
+          <a:p>
+            <a:pPr>
+              <a:spcBef>
+                <a:spcPts val="0"/>
+              </a:spcBef>
+              <a:spcAft>
+                <a:spcPts val="700"/>
+              </a:spcAft>
+            </a:pPr>
+            <a:r>
+              <a:rPr lang="en-US" sz="1600" b="1" dirty="0">
+                <a:solidFill>
+                  <a:srgbClr val="3A4763"/>
+                </a:solidFill>
+                <a:latin typeface="+mj-lt"/>
+              </a:rPr>
+              <a:t>• </a:t>
+            </a:r>
+            <a:r>
+              <a:rPr lang="en-US" sz="1600" b="1" dirty="0" err="1">
+                <a:solidFill>
+                  <a:srgbClr val="3A4763"/>
+                </a:solidFill>
+                <a:latin typeface="+mj-lt"/>
+              </a:rPr>
+              <a:t>Tok</a:t>
+            </a:r>
+            <a:r>
+              <a:rPr lang="en-US" sz="1600" b="1" dirty="0">
+                <a:solidFill>
+                  <a:srgbClr val="3A4763"/>
+                </a:solidFill>
+                <a:latin typeface="+mj-lt"/>
+              </a:rPr>
+              <a:t> </a:t>
+            </a:r>
+            <a:r>
+              <a:rPr lang="en-US" sz="1600" b="1" dirty="0" err="1">
+                <a:solidFill>
+                  <a:srgbClr val="3A4763"/>
+                </a:solidFill>
+                <a:latin typeface="+mj-lt"/>
+              </a:rPr>
+              <a:t>jedne</a:t>
+            </a:r>
+            <a:r>
+              <a:rPr lang="en-US" sz="1600" b="1" dirty="0">
+                <a:solidFill>
+                  <a:srgbClr val="3A4763"/>
+                </a:solidFill>
+                <a:latin typeface="+mj-lt"/>
+              </a:rPr>
+              <a:t> </a:t>
+            </a:r>
+            <a:r>
+              <a:rPr lang="en-US" sz="1600" b="1" dirty="0" err="1">
+                <a:solidFill>
+                  <a:srgbClr val="3A4763"/>
+                </a:solidFill>
+                <a:latin typeface="+mj-lt"/>
+              </a:rPr>
+              <a:t>iteracije</a:t>
+            </a:r>
+            <a:endParaRPr lang="en-US" sz="1600" b="1" dirty="0">
+              <a:solidFill>
+                <a:srgbClr val="3A4763"/>
+              </a:solidFill>
+              <a:latin typeface="+mj-lt"/>
+            </a:endParaRPr>
+          </a:p>
+          <a:p>
+            <a:pPr marL="628650" lvl="1" indent="-171450">
+              <a:spcAft>
+                <a:spcPts val="700"/>
+              </a:spcAft>
+              <a:buFont typeface="Wingdings" panose="05000000000000000000" pitchFamily="2" charset="2"/>
+              <a:buChar char="§"/>
+            </a:pPr>
+            <a:r>
+              <a:rPr lang="en-US" sz="1100" dirty="0" err="1">
+                <a:solidFill>
+                  <a:srgbClr val="3A4763"/>
+                </a:solidFill>
+                <a:latin typeface="+mj-lt"/>
+              </a:rPr>
+              <a:t>Pročita</a:t>
+            </a:r>
+            <a:r>
+              <a:rPr lang="en-US" sz="1100" dirty="0">
+                <a:solidFill>
+                  <a:srgbClr val="3A4763"/>
+                </a:solidFill>
+                <a:latin typeface="+mj-lt"/>
+              </a:rPr>
+              <a:t> se </a:t>
+            </a:r>
+            <a:r>
+              <a:rPr lang="en-US" sz="1100" dirty="0" err="1">
+                <a:solidFill>
+                  <a:srgbClr val="3A4763"/>
+                </a:solidFill>
+                <a:latin typeface="+mj-lt"/>
+              </a:rPr>
+              <a:t>trenutno</a:t>
+            </a:r>
+            <a:r>
+              <a:rPr lang="en-US" sz="1100" dirty="0">
+                <a:solidFill>
+                  <a:srgbClr val="3A4763"/>
+                </a:solidFill>
+                <a:latin typeface="+mj-lt"/>
+              </a:rPr>
+              <a:t> </a:t>
+            </a:r>
+            <a:r>
+              <a:rPr lang="en-US" sz="1100" dirty="0" err="1">
+                <a:solidFill>
+                  <a:srgbClr val="3A4763"/>
+                </a:solidFill>
+                <a:latin typeface="+mj-lt"/>
+              </a:rPr>
+              <a:t>stanje</a:t>
+            </a:r>
+            <a:r>
+              <a:rPr lang="en-US" sz="1100" dirty="0">
+                <a:solidFill>
+                  <a:srgbClr val="3A4763"/>
+                </a:solidFill>
+                <a:latin typeface="+mj-lt"/>
+              </a:rPr>
+              <a:t> (</a:t>
+            </a:r>
+            <a:r>
+              <a:rPr lang="en-US" sz="1100" dirty="0" err="1">
+                <a:solidFill>
+                  <a:srgbClr val="3A4763"/>
+                </a:solidFill>
+                <a:latin typeface="+mj-lt"/>
+              </a:rPr>
+              <a:t>sa</a:t>
+            </a:r>
+            <a:r>
+              <a:rPr lang="en-US" sz="1100" dirty="0">
+                <a:solidFill>
+                  <a:srgbClr val="3A4763"/>
+                </a:solidFill>
+                <a:latin typeface="+mj-lt"/>
+              </a:rPr>
+              <a:t> shift-</a:t>
+            </a:r>
+            <a:r>
+              <a:rPr lang="en-US" sz="1100" dirty="0" err="1">
+                <a:solidFill>
+                  <a:srgbClr val="3A4763"/>
+                </a:solidFill>
+                <a:latin typeface="+mj-lt"/>
+              </a:rPr>
+              <a:t>registra</a:t>
+            </a:r>
+            <a:r>
+              <a:rPr lang="en-US" sz="1100" dirty="0">
+                <a:solidFill>
+                  <a:srgbClr val="3A4763"/>
+                </a:solidFill>
+                <a:latin typeface="+mj-lt"/>
+              </a:rPr>
+              <a:t>) </a:t>
+            </a:r>
+            <a:r>
+              <a:rPr lang="en-US" sz="1100" dirty="0" err="1">
+                <a:solidFill>
+                  <a:srgbClr val="3A4763"/>
+                </a:solidFill>
+                <a:latin typeface="+mj-lt"/>
+              </a:rPr>
+              <a:t>i</a:t>
+            </a:r>
+            <a:r>
+              <a:rPr lang="en-US" sz="1100" dirty="0">
+                <a:solidFill>
+                  <a:srgbClr val="3A4763"/>
+                </a:solidFill>
+                <a:latin typeface="+mj-lt"/>
+              </a:rPr>
+              <a:t> </a:t>
+            </a:r>
+            <a:r>
+              <a:rPr lang="en-US" sz="1100" dirty="0" err="1">
+                <a:solidFill>
+                  <a:srgbClr val="3A4763"/>
+                </a:solidFill>
+                <a:latin typeface="+mj-lt"/>
+              </a:rPr>
+              <a:t>pozicija</a:t>
+            </a:r>
+            <a:r>
+              <a:rPr lang="en-US" sz="1100" dirty="0">
+                <a:solidFill>
+                  <a:srgbClr val="3A4763"/>
+                </a:solidFill>
+                <a:latin typeface="+mj-lt"/>
+              </a:rPr>
+              <a:t> x (</a:t>
+            </a:r>
+            <a:r>
+              <a:rPr lang="en-US" sz="1100" dirty="0" err="1">
+                <a:solidFill>
+                  <a:srgbClr val="3A4763"/>
+                </a:solidFill>
+                <a:latin typeface="+mj-lt"/>
+              </a:rPr>
+              <a:t>sa</a:t>
+            </a:r>
+            <a:r>
+              <a:rPr lang="en-US" sz="1100" dirty="0">
+                <a:solidFill>
+                  <a:srgbClr val="3A4763"/>
+                </a:solidFill>
+                <a:latin typeface="+mj-lt"/>
+              </a:rPr>
+              <a:t> </a:t>
+            </a:r>
+            <a:r>
+              <a:rPr lang="en-US" sz="1100" dirty="0" err="1">
+                <a:solidFill>
+                  <a:srgbClr val="3A4763"/>
+                </a:solidFill>
+                <a:latin typeface="+mj-lt"/>
+              </a:rPr>
+              <a:t>mreže</a:t>
+            </a:r>
+            <a:r>
+              <a:rPr lang="en-US" sz="1100" dirty="0">
+                <a:solidFill>
+                  <a:srgbClr val="3A4763"/>
+                </a:solidFill>
+                <a:latin typeface="+mj-lt"/>
+              </a:rPr>
+              <a:t>)</a:t>
+            </a:r>
+          </a:p>
+          <a:p>
+            <a:pPr marL="628650" lvl="1" indent="-171450">
+              <a:spcAft>
+                <a:spcPts val="700"/>
+              </a:spcAft>
+              <a:buFont typeface="Wingdings" panose="05000000000000000000" pitchFamily="2" charset="2"/>
+              <a:buChar char="§"/>
+            </a:pPr>
+            <a:r>
+              <a:rPr lang="en-US" sz="1100" dirty="0">
+                <a:solidFill>
+                  <a:srgbClr val="3A4763"/>
+                </a:solidFill>
+                <a:latin typeface="+mj-lt"/>
+              </a:rPr>
+              <a:t>Guard Clause </a:t>
+            </a:r>
+            <a:r>
+              <a:rPr lang="en-US" sz="1100" dirty="0" err="1">
+                <a:solidFill>
+                  <a:srgbClr val="3A4763"/>
+                </a:solidFill>
+                <a:latin typeface="+mj-lt"/>
+              </a:rPr>
+              <a:t>proverava</a:t>
+            </a:r>
+            <a:r>
+              <a:rPr lang="en-US" sz="1100" dirty="0">
+                <a:solidFill>
+                  <a:srgbClr val="3A4763"/>
+                </a:solidFill>
+                <a:latin typeface="+mj-lt"/>
+              </a:rPr>
+              <a:t> </a:t>
+            </a:r>
+            <a:r>
+              <a:rPr lang="en-US" sz="1100" dirty="0" err="1">
+                <a:solidFill>
+                  <a:srgbClr val="3A4763"/>
+                </a:solidFill>
+                <a:latin typeface="+mj-lt"/>
+              </a:rPr>
+              <a:t>uslov</a:t>
+            </a:r>
+            <a:r>
+              <a:rPr lang="en-US" sz="1100" dirty="0">
+                <a:solidFill>
+                  <a:srgbClr val="3A4763"/>
+                </a:solidFill>
+                <a:latin typeface="+mj-lt"/>
+              </a:rPr>
+              <a:t>: Stop </a:t>
+            </a:r>
+            <a:r>
+              <a:rPr lang="en-US" sz="1100" dirty="0" err="1">
+                <a:solidFill>
+                  <a:srgbClr val="3A4763"/>
+                </a:solidFill>
+                <a:latin typeface="+mj-lt"/>
+              </a:rPr>
+              <a:t>pritisnut</a:t>
+            </a:r>
+            <a:r>
+              <a:rPr lang="en-US" sz="1100" dirty="0">
+                <a:solidFill>
+                  <a:srgbClr val="3A4763"/>
+                </a:solidFill>
+                <a:latin typeface="+mj-lt"/>
+              </a:rPr>
+              <a:t> ILI </a:t>
+            </a:r>
+            <a:r>
+              <a:rPr lang="en-US" sz="1100" dirty="0" err="1">
+                <a:solidFill>
+                  <a:srgbClr val="3A4763"/>
+                </a:solidFill>
+                <a:latin typeface="+mj-lt"/>
+              </a:rPr>
+              <a:t>greška</a:t>
+            </a:r>
+            <a:r>
+              <a:rPr lang="en-US" sz="1100" dirty="0">
+                <a:solidFill>
+                  <a:srgbClr val="3A4763"/>
+                </a:solidFill>
+                <a:latin typeface="+mj-lt"/>
+              </a:rPr>
+              <a:t> </a:t>
+            </a:r>
+            <a:r>
+              <a:rPr lang="en-US" sz="1100" dirty="0" err="1">
+                <a:solidFill>
+                  <a:srgbClr val="3A4763"/>
+                </a:solidFill>
+                <a:latin typeface="+mj-lt"/>
+              </a:rPr>
+              <a:t>prisutna</a:t>
+            </a:r>
+            <a:endParaRPr lang="en-US" sz="1100" dirty="0">
+              <a:solidFill>
+                <a:srgbClr val="3A4763"/>
+              </a:solidFill>
+              <a:latin typeface="+mj-lt"/>
+            </a:endParaRPr>
+          </a:p>
+          <a:p>
+            <a:pPr marL="628650" lvl="1" indent="-171450">
+              <a:spcAft>
+                <a:spcPts val="700"/>
+              </a:spcAft>
+              <a:buFont typeface="Wingdings" panose="05000000000000000000" pitchFamily="2" charset="2"/>
+              <a:buChar char="§"/>
+            </a:pPr>
+            <a:r>
+              <a:rPr lang="en-US" sz="1100" dirty="0" err="1">
+                <a:solidFill>
+                  <a:srgbClr val="3A4763"/>
+                </a:solidFill>
+                <a:latin typeface="+mj-lt"/>
+              </a:rPr>
+              <a:t>Ako</a:t>
+            </a:r>
+            <a:r>
+              <a:rPr lang="en-US" sz="1100" dirty="0">
+                <a:solidFill>
+                  <a:srgbClr val="3A4763"/>
+                </a:solidFill>
+                <a:latin typeface="+mj-lt"/>
+              </a:rPr>
+              <a:t> je </a:t>
+            </a:r>
+            <a:r>
+              <a:rPr lang="en-US" sz="1100" dirty="0" err="1">
+                <a:solidFill>
+                  <a:srgbClr val="3A4763"/>
+                </a:solidFill>
+                <a:latin typeface="+mj-lt"/>
+              </a:rPr>
+              <a:t>uslov</a:t>
+            </a:r>
+            <a:r>
+              <a:rPr lang="en-US" sz="1100" dirty="0">
+                <a:solidFill>
+                  <a:srgbClr val="3A4763"/>
+                </a:solidFill>
+                <a:latin typeface="+mj-lt"/>
+              </a:rPr>
+              <a:t> </a:t>
+            </a:r>
+            <a:r>
+              <a:rPr lang="en-US" sz="1100" dirty="0" err="1">
+                <a:solidFill>
+                  <a:srgbClr val="3A4763"/>
+                </a:solidFill>
+                <a:latin typeface="+mj-lt"/>
+              </a:rPr>
+              <a:t>ispunjen</a:t>
+            </a:r>
+            <a:r>
+              <a:rPr lang="en-US" sz="1100" dirty="0">
+                <a:solidFill>
+                  <a:srgbClr val="3A4763"/>
+                </a:solidFill>
+                <a:latin typeface="+mj-lt"/>
+              </a:rPr>
+              <a:t> → </a:t>
+            </a:r>
+            <a:r>
+              <a:rPr lang="en-US" sz="1100" dirty="0" err="1">
+                <a:solidFill>
+                  <a:srgbClr val="3A4763"/>
+                </a:solidFill>
+                <a:latin typeface="+mj-lt"/>
+              </a:rPr>
+              <a:t>sledeće</a:t>
+            </a:r>
+            <a:r>
+              <a:rPr lang="en-US" sz="1100" dirty="0">
+                <a:solidFill>
+                  <a:srgbClr val="3A4763"/>
+                </a:solidFill>
+                <a:latin typeface="+mj-lt"/>
+              </a:rPr>
+              <a:t> </a:t>
+            </a:r>
+            <a:r>
+              <a:rPr lang="en-US" sz="1100" dirty="0" err="1">
+                <a:solidFill>
+                  <a:srgbClr val="3A4763"/>
+                </a:solidFill>
+                <a:latin typeface="+mj-lt"/>
+              </a:rPr>
+              <a:t>stanje</a:t>
+            </a:r>
+            <a:r>
+              <a:rPr lang="en-US" sz="1100" dirty="0">
+                <a:solidFill>
+                  <a:srgbClr val="3A4763"/>
+                </a:solidFill>
+                <a:latin typeface="+mj-lt"/>
+              </a:rPr>
+              <a:t> se </a:t>
+            </a:r>
+            <a:r>
+              <a:rPr lang="en-US" sz="1100" dirty="0" err="1">
+                <a:solidFill>
+                  <a:srgbClr val="3A4763"/>
+                </a:solidFill>
+                <a:latin typeface="+mj-lt"/>
+              </a:rPr>
+              <a:t>prisilno</a:t>
+            </a:r>
+            <a:r>
+              <a:rPr lang="en-US" sz="1100" dirty="0">
+                <a:solidFill>
+                  <a:srgbClr val="3A4763"/>
+                </a:solidFill>
+                <a:latin typeface="+mj-lt"/>
+              </a:rPr>
+              <a:t> </a:t>
+            </a:r>
+            <a:r>
+              <a:rPr lang="en-US" sz="1100" dirty="0" err="1">
+                <a:solidFill>
+                  <a:srgbClr val="3A4763"/>
+                </a:solidFill>
+                <a:latin typeface="+mj-lt"/>
+              </a:rPr>
+              <a:t>postavlja</a:t>
+            </a:r>
+            <a:r>
+              <a:rPr lang="en-US" sz="1100" dirty="0">
+                <a:solidFill>
+                  <a:srgbClr val="3A4763"/>
+                </a:solidFill>
+                <a:latin typeface="+mj-lt"/>
+              </a:rPr>
+              <a:t> </a:t>
+            </a:r>
+            <a:r>
+              <a:rPr lang="en-US" sz="1100" dirty="0" err="1">
+                <a:solidFill>
+                  <a:srgbClr val="3A4763"/>
+                </a:solidFill>
+                <a:latin typeface="+mj-lt"/>
+              </a:rPr>
+              <a:t>na</a:t>
+            </a:r>
+            <a:r>
+              <a:rPr lang="en-US" sz="1100" dirty="0">
+                <a:solidFill>
+                  <a:srgbClr val="3A4763"/>
+                </a:solidFill>
+                <a:latin typeface="+mj-lt"/>
+              </a:rPr>
+              <a:t> Shutdown, </a:t>
+            </a:r>
+            <a:r>
+              <a:rPr lang="en-US" sz="1100" dirty="0" err="1">
+                <a:solidFill>
+                  <a:srgbClr val="3A4763"/>
+                </a:solidFill>
+                <a:latin typeface="+mj-lt"/>
+              </a:rPr>
+              <a:t>zaobilazeći</a:t>
+            </a:r>
+            <a:r>
+              <a:rPr lang="en-US" sz="1100" dirty="0">
+                <a:solidFill>
+                  <a:srgbClr val="3A4763"/>
+                </a:solidFill>
+                <a:latin typeface="+mj-lt"/>
+              </a:rPr>
+              <a:t> </a:t>
+            </a:r>
+            <a:r>
+              <a:rPr lang="en-US" sz="1100" dirty="0" err="1">
+                <a:solidFill>
+                  <a:srgbClr val="3A4763"/>
+                </a:solidFill>
+                <a:latin typeface="+mj-lt"/>
+              </a:rPr>
+              <a:t>dalju</a:t>
+            </a:r>
+            <a:r>
+              <a:rPr lang="en-US" sz="1100" dirty="0">
+                <a:solidFill>
+                  <a:srgbClr val="3A4763"/>
+                </a:solidFill>
+                <a:latin typeface="+mj-lt"/>
+              </a:rPr>
+              <a:t> </a:t>
+            </a:r>
+            <a:r>
+              <a:rPr lang="en-US" sz="1100" dirty="0" err="1">
+                <a:solidFill>
+                  <a:srgbClr val="3A4763"/>
+                </a:solidFill>
+                <a:latin typeface="+mj-lt"/>
+              </a:rPr>
+              <a:t>logiku</a:t>
+            </a:r>
+            <a:endParaRPr lang="en-US" sz="1100" dirty="0">
+              <a:solidFill>
+                <a:srgbClr val="3A4763"/>
+              </a:solidFill>
+              <a:latin typeface="+mj-lt"/>
+            </a:endParaRPr>
+          </a:p>
+          <a:p>
+            <a:pPr marL="628650" lvl="1" indent="-171450">
+              <a:spcAft>
+                <a:spcPts val="700"/>
+              </a:spcAft>
+              <a:buFont typeface="Wingdings" panose="05000000000000000000" pitchFamily="2" charset="2"/>
+              <a:buChar char="§"/>
+            </a:pPr>
+            <a:r>
+              <a:rPr lang="en-US" sz="1100" dirty="0" err="1">
+                <a:solidFill>
+                  <a:srgbClr val="3A4763"/>
+                </a:solidFill>
+                <a:latin typeface="+mj-lt"/>
+              </a:rPr>
+              <a:t>Ako</a:t>
+            </a:r>
+            <a:r>
+              <a:rPr lang="en-US" sz="1100" dirty="0">
+                <a:solidFill>
+                  <a:srgbClr val="3A4763"/>
+                </a:solidFill>
+                <a:latin typeface="+mj-lt"/>
+              </a:rPr>
+              <a:t> </a:t>
+            </a:r>
+            <a:r>
+              <a:rPr lang="en-US" sz="1100" dirty="0" err="1">
+                <a:solidFill>
+                  <a:srgbClr val="3A4763"/>
+                </a:solidFill>
+                <a:latin typeface="+mj-lt"/>
+              </a:rPr>
+              <a:t>uslov</a:t>
+            </a:r>
+            <a:r>
+              <a:rPr lang="en-US" sz="1100" dirty="0">
+                <a:solidFill>
+                  <a:srgbClr val="3A4763"/>
+                </a:solidFill>
+                <a:latin typeface="+mj-lt"/>
+              </a:rPr>
+              <a:t> </a:t>
+            </a:r>
+            <a:r>
+              <a:rPr lang="en-US" sz="1100" dirty="0" err="1">
+                <a:solidFill>
+                  <a:srgbClr val="3A4763"/>
+                </a:solidFill>
+                <a:latin typeface="+mj-lt"/>
+              </a:rPr>
+              <a:t>nije</a:t>
+            </a:r>
+            <a:r>
+              <a:rPr lang="en-US" sz="1100" dirty="0">
+                <a:solidFill>
+                  <a:srgbClr val="3A4763"/>
+                </a:solidFill>
+                <a:latin typeface="+mj-lt"/>
+              </a:rPr>
+              <a:t> </a:t>
+            </a:r>
+            <a:r>
+              <a:rPr lang="en-US" sz="1100" dirty="0" err="1">
+                <a:solidFill>
+                  <a:srgbClr val="3A4763"/>
+                </a:solidFill>
+                <a:latin typeface="+mj-lt"/>
+              </a:rPr>
+              <a:t>ispunjen</a:t>
+            </a:r>
+            <a:r>
+              <a:rPr lang="en-US" sz="1100" dirty="0">
+                <a:solidFill>
+                  <a:srgbClr val="3A4763"/>
+                </a:solidFill>
+                <a:latin typeface="+mj-lt"/>
+              </a:rPr>
+              <a:t> → </a:t>
+            </a:r>
+            <a:r>
+              <a:rPr lang="en-US" sz="1100" dirty="0" err="1">
+                <a:solidFill>
+                  <a:srgbClr val="3A4763"/>
+                </a:solidFill>
+                <a:latin typeface="+mj-lt"/>
+              </a:rPr>
+              <a:t>glavna</a:t>
+            </a:r>
+            <a:r>
+              <a:rPr lang="en-US" sz="1100" dirty="0">
+                <a:solidFill>
+                  <a:srgbClr val="3A4763"/>
+                </a:solidFill>
+                <a:latin typeface="+mj-lt"/>
+              </a:rPr>
+              <a:t> Case </a:t>
+            </a:r>
+            <a:r>
+              <a:rPr lang="en-US" sz="1100" dirty="0" err="1">
+                <a:solidFill>
+                  <a:srgbClr val="3A4763"/>
+                </a:solidFill>
+                <a:latin typeface="+mj-lt"/>
+              </a:rPr>
+              <a:t>struktura</a:t>
+            </a:r>
+            <a:r>
+              <a:rPr lang="en-US" sz="1100" dirty="0">
+                <a:solidFill>
+                  <a:srgbClr val="3A4763"/>
+                </a:solidFill>
+                <a:latin typeface="+mj-lt"/>
+              </a:rPr>
+              <a:t> </a:t>
+            </a:r>
+            <a:r>
+              <a:rPr lang="en-US" sz="1100" dirty="0" err="1">
+                <a:solidFill>
+                  <a:srgbClr val="3A4763"/>
+                </a:solidFill>
+                <a:latin typeface="+mj-lt"/>
+              </a:rPr>
+              <a:t>izvršava</a:t>
+            </a:r>
+            <a:r>
+              <a:rPr lang="en-US" sz="1100" dirty="0">
+                <a:solidFill>
+                  <a:srgbClr val="3A4763"/>
+                </a:solidFill>
+                <a:latin typeface="+mj-lt"/>
+              </a:rPr>
+              <a:t> </a:t>
+            </a:r>
+            <a:r>
+              <a:rPr lang="en-US" sz="1100" dirty="0" err="1">
+                <a:solidFill>
+                  <a:srgbClr val="3A4763"/>
+                </a:solidFill>
+                <a:latin typeface="+mj-lt"/>
+              </a:rPr>
+              <a:t>logiku</a:t>
+            </a:r>
+            <a:r>
+              <a:rPr lang="en-US" sz="1100" dirty="0">
+                <a:solidFill>
+                  <a:srgbClr val="3A4763"/>
+                </a:solidFill>
+                <a:latin typeface="+mj-lt"/>
+              </a:rPr>
+              <a:t> </a:t>
+            </a:r>
+            <a:r>
+              <a:rPr lang="en-US" sz="1100" dirty="0" err="1">
+                <a:solidFill>
+                  <a:srgbClr val="3A4763"/>
+                </a:solidFill>
+                <a:latin typeface="+mj-lt"/>
+              </a:rPr>
+              <a:t>odgovarajućeg</a:t>
+            </a:r>
+            <a:r>
+              <a:rPr lang="en-US" sz="1100" dirty="0">
+                <a:solidFill>
+                  <a:srgbClr val="3A4763"/>
+                </a:solidFill>
+                <a:latin typeface="+mj-lt"/>
+              </a:rPr>
+              <a:t> </a:t>
+            </a:r>
+            <a:r>
+              <a:rPr lang="en-US" sz="1100" dirty="0" err="1">
+                <a:solidFill>
+                  <a:srgbClr val="3A4763"/>
+                </a:solidFill>
+                <a:latin typeface="+mj-lt"/>
+              </a:rPr>
+              <a:t>stanja</a:t>
+            </a:r>
+            <a:r>
+              <a:rPr lang="en-US" sz="1100" dirty="0">
+                <a:solidFill>
+                  <a:srgbClr val="3A4763"/>
+                </a:solidFill>
+                <a:latin typeface="+mj-lt"/>
+              </a:rPr>
+              <a:t>: </a:t>
+            </a:r>
+          </a:p>
+          <a:p>
+            <a:pPr marL="628650" lvl="1" indent="-171450">
+              <a:spcAft>
+                <a:spcPts val="700"/>
+              </a:spcAft>
+              <a:buFont typeface="Wingdings" panose="05000000000000000000" pitchFamily="2" charset="2"/>
+              <a:buChar char="§"/>
+            </a:pPr>
+            <a:r>
+              <a:rPr lang="en-US" sz="1100" dirty="0" err="1">
+                <a:solidFill>
+                  <a:srgbClr val="3A4763"/>
+                </a:solidFill>
+                <a:latin typeface="+mj-lt"/>
+              </a:rPr>
+              <a:t>računa</a:t>
+            </a:r>
+            <a:r>
+              <a:rPr lang="en-US" sz="1100" dirty="0">
+                <a:solidFill>
+                  <a:srgbClr val="3A4763"/>
+                </a:solidFill>
+                <a:latin typeface="+mj-lt"/>
+              </a:rPr>
+              <a:t> </a:t>
+            </a:r>
+            <a:r>
+              <a:rPr lang="en-US" sz="1100" dirty="0" err="1">
+                <a:solidFill>
+                  <a:srgbClr val="3A4763"/>
+                </a:solidFill>
+                <a:latin typeface="+mj-lt"/>
+              </a:rPr>
+              <a:t>upravljački</a:t>
+            </a:r>
+            <a:r>
+              <a:rPr lang="en-US" sz="1100" dirty="0">
+                <a:solidFill>
+                  <a:srgbClr val="3A4763"/>
+                </a:solidFill>
+                <a:latin typeface="+mj-lt"/>
+              </a:rPr>
+              <a:t> signal u (PI regulator)</a:t>
+            </a:r>
+          </a:p>
+          <a:p>
+            <a:pPr marL="628650" lvl="1" indent="-171450">
+              <a:spcAft>
+                <a:spcPts val="700"/>
+              </a:spcAft>
+              <a:buFont typeface="Wingdings" panose="05000000000000000000" pitchFamily="2" charset="2"/>
+              <a:buChar char="§"/>
+            </a:pPr>
+            <a:r>
+              <a:rPr lang="en-US" sz="1100" dirty="0" err="1">
+                <a:solidFill>
+                  <a:srgbClr val="3A4763"/>
+                </a:solidFill>
+                <a:latin typeface="+mj-lt"/>
+              </a:rPr>
+              <a:t>proverava</a:t>
+            </a:r>
+            <a:r>
+              <a:rPr lang="en-US" sz="1100" dirty="0">
+                <a:solidFill>
+                  <a:srgbClr val="3A4763"/>
+                </a:solidFill>
+                <a:latin typeface="+mj-lt"/>
+              </a:rPr>
+              <a:t> </a:t>
+            </a:r>
+            <a:r>
+              <a:rPr lang="en-US" sz="1100" dirty="0" err="1">
+                <a:solidFill>
+                  <a:srgbClr val="3A4763"/>
+                </a:solidFill>
+                <a:latin typeface="+mj-lt"/>
+              </a:rPr>
+              <a:t>uslov</a:t>
+            </a:r>
+            <a:r>
+              <a:rPr lang="en-US" sz="1100" dirty="0">
+                <a:solidFill>
+                  <a:srgbClr val="3A4763"/>
+                </a:solidFill>
+                <a:latin typeface="+mj-lt"/>
+              </a:rPr>
+              <a:t> </a:t>
+            </a:r>
+            <a:r>
+              <a:rPr lang="en-US" sz="1100" dirty="0" err="1">
+                <a:solidFill>
+                  <a:srgbClr val="3A4763"/>
+                </a:solidFill>
+                <a:latin typeface="+mj-lt"/>
+              </a:rPr>
+              <a:t>prelaska</a:t>
+            </a:r>
+            <a:r>
+              <a:rPr lang="en-US" sz="1100" dirty="0">
+                <a:solidFill>
+                  <a:srgbClr val="3A4763"/>
+                </a:solidFill>
+                <a:latin typeface="+mj-lt"/>
+              </a:rPr>
+              <a:t> </a:t>
+            </a:r>
+            <a:r>
+              <a:rPr lang="en-US" sz="1100" dirty="0" err="1">
+                <a:solidFill>
+                  <a:srgbClr val="3A4763"/>
+                </a:solidFill>
+                <a:latin typeface="+mj-lt"/>
+              </a:rPr>
+              <a:t>i</a:t>
+            </a:r>
+            <a:r>
+              <a:rPr lang="en-US" sz="1100" dirty="0">
+                <a:solidFill>
+                  <a:srgbClr val="3A4763"/>
+                </a:solidFill>
+                <a:latin typeface="+mj-lt"/>
+              </a:rPr>
+              <a:t> </a:t>
+            </a:r>
+            <a:r>
+              <a:rPr lang="en-US" sz="1100" dirty="0" err="1">
+                <a:solidFill>
+                  <a:srgbClr val="3A4763"/>
+                </a:solidFill>
+                <a:latin typeface="+mj-lt"/>
+              </a:rPr>
+              <a:t>predlaže</a:t>
+            </a:r>
+            <a:r>
+              <a:rPr lang="en-US" sz="1100" dirty="0">
+                <a:solidFill>
+                  <a:srgbClr val="3A4763"/>
+                </a:solidFill>
+                <a:latin typeface="+mj-lt"/>
+              </a:rPr>
+              <a:t> </a:t>
+            </a:r>
+            <a:r>
+              <a:rPr lang="en-US" sz="1100" dirty="0" err="1">
+                <a:solidFill>
+                  <a:srgbClr val="3A4763"/>
+                </a:solidFill>
+                <a:latin typeface="+mj-lt"/>
+              </a:rPr>
+              <a:t>sledeće</a:t>
+            </a:r>
+            <a:r>
+              <a:rPr lang="en-US" sz="1100" dirty="0">
+                <a:solidFill>
+                  <a:srgbClr val="3A4763"/>
+                </a:solidFill>
+                <a:latin typeface="+mj-lt"/>
+              </a:rPr>
+              <a:t> </a:t>
+            </a:r>
+            <a:r>
+              <a:rPr lang="en-US" sz="1100" dirty="0" err="1">
+                <a:solidFill>
+                  <a:srgbClr val="3A4763"/>
+                </a:solidFill>
+                <a:latin typeface="+mj-lt"/>
+              </a:rPr>
+              <a:t>stanje</a:t>
+            </a:r>
+            <a:endParaRPr lang="en-US" sz="1100" dirty="0">
+              <a:solidFill>
+                <a:srgbClr val="3A4763"/>
+              </a:solidFill>
+              <a:latin typeface="+mj-lt"/>
+            </a:endParaRPr>
+          </a:p>
+          <a:p>
+            <a:pPr marL="628650" lvl="1" indent="-171450">
+              <a:spcAft>
+                <a:spcPts val="700"/>
+              </a:spcAft>
+              <a:buFont typeface="Wingdings" panose="05000000000000000000" pitchFamily="2" charset="2"/>
+              <a:buChar char="§"/>
+            </a:pPr>
+            <a:r>
+              <a:rPr lang="en-US" sz="1100" dirty="0" err="1">
+                <a:solidFill>
+                  <a:srgbClr val="3A4763"/>
+                </a:solidFill>
+                <a:latin typeface="+mj-lt"/>
+              </a:rPr>
+              <a:t>Izabrano</a:t>
+            </a:r>
+            <a:r>
+              <a:rPr lang="en-US" sz="1100" dirty="0">
+                <a:solidFill>
+                  <a:srgbClr val="3A4763"/>
+                </a:solidFill>
+                <a:latin typeface="+mj-lt"/>
+              </a:rPr>
+              <a:t> </a:t>
+            </a:r>
+            <a:r>
+              <a:rPr lang="en-US" sz="1100" dirty="0" err="1">
+                <a:solidFill>
+                  <a:srgbClr val="3A4763"/>
+                </a:solidFill>
+                <a:latin typeface="+mj-lt"/>
+              </a:rPr>
+              <a:t>stanje</a:t>
+            </a:r>
+            <a:r>
+              <a:rPr lang="en-US" sz="1100" dirty="0">
+                <a:solidFill>
+                  <a:srgbClr val="3A4763"/>
+                </a:solidFill>
+                <a:latin typeface="+mj-lt"/>
+              </a:rPr>
+              <a:t> se </a:t>
+            </a:r>
+            <a:r>
+              <a:rPr lang="en-US" sz="1100" dirty="0" err="1">
+                <a:solidFill>
+                  <a:srgbClr val="3A4763"/>
+                </a:solidFill>
+                <a:latin typeface="+mj-lt"/>
+              </a:rPr>
+              <a:t>upisuje</a:t>
+            </a:r>
+            <a:r>
+              <a:rPr lang="en-US" sz="1100" dirty="0">
+                <a:solidFill>
+                  <a:srgbClr val="3A4763"/>
+                </a:solidFill>
+                <a:latin typeface="+mj-lt"/>
+              </a:rPr>
+              <a:t> u shift-</a:t>
+            </a:r>
+            <a:r>
+              <a:rPr lang="en-US" sz="1100" dirty="0" err="1">
+                <a:solidFill>
+                  <a:srgbClr val="3A4763"/>
+                </a:solidFill>
+                <a:latin typeface="+mj-lt"/>
+              </a:rPr>
+              <a:t>registar</a:t>
+            </a:r>
+            <a:r>
+              <a:rPr lang="en-US" sz="1100" dirty="0">
+                <a:solidFill>
+                  <a:srgbClr val="3A4763"/>
+                </a:solidFill>
+                <a:latin typeface="+mj-lt"/>
+              </a:rPr>
+              <a:t> → </a:t>
+            </a:r>
+            <a:r>
+              <a:rPr lang="en-US" sz="1100" dirty="0" err="1">
+                <a:solidFill>
+                  <a:srgbClr val="3A4763"/>
+                </a:solidFill>
+                <a:latin typeface="+mj-lt"/>
+              </a:rPr>
+              <a:t>koristi</a:t>
+            </a:r>
+            <a:r>
+              <a:rPr lang="en-US" sz="1100" dirty="0">
+                <a:solidFill>
+                  <a:srgbClr val="3A4763"/>
+                </a:solidFill>
+                <a:latin typeface="+mj-lt"/>
+              </a:rPr>
+              <a:t> se u </a:t>
+            </a:r>
+            <a:r>
+              <a:rPr lang="en-US" sz="1100" dirty="0" err="1">
+                <a:solidFill>
+                  <a:srgbClr val="3A4763"/>
+                </a:solidFill>
+                <a:latin typeface="+mj-lt"/>
+              </a:rPr>
+              <a:t>narednoj</a:t>
+            </a:r>
+            <a:r>
+              <a:rPr lang="en-US" sz="1100" dirty="0">
+                <a:solidFill>
+                  <a:srgbClr val="3A4763"/>
+                </a:solidFill>
+                <a:latin typeface="+mj-lt"/>
+              </a:rPr>
+              <a:t> </a:t>
+            </a:r>
+            <a:r>
+              <a:rPr lang="en-US" sz="1100" dirty="0" err="1">
+                <a:solidFill>
+                  <a:srgbClr val="3A4763"/>
+                </a:solidFill>
+                <a:latin typeface="+mj-lt"/>
+              </a:rPr>
+              <a:t>iteraciji</a:t>
+            </a:r>
+            <a:r>
+              <a:rPr lang="en-US" sz="1100" dirty="0">
+                <a:solidFill>
+                  <a:srgbClr val="3A4763"/>
+                </a:solidFill>
+                <a:latin typeface="+mj-lt"/>
+              </a:rPr>
+              <a:t> </a:t>
+            </a:r>
+            <a:r>
+              <a:rPr lang="en-US" sz="1100" dirty="0" err="1" smtClean="0">
+                <a:solidFill>
+                  <a:srgbClr val="3A4763"/>
+                </a:solidFill>
+                <a:latin typeface="+mj-lt"/>
+              </a:rPr>
+              <a:t>petlje</a:t>
+            </a:r>
+            <a:endParaRPr lang="en-US" sz="1100" dirty="0">
+              <a:solidFill>
+                <a:srgbClr val="3A4763"/>
+              </a:solidFill>
+              <a:latin typeface="+mj-lt"/>
+            </a:endParaRPr>
+          </a:p>
+          <a:p>
+            <a:pPr>
+              <a:spcBef>
+                <a:spcPts val="0"/>
+              </a:spcBef>
+              <a:spcAft>
+                <a:spcPts val="700"/>
+              </a:spcAft>
+            </a:pPr>
+            <a:r>
+              <a:rPr lang="en-US" sz="1600" b="1" dirty="0">
+                <a:solidFill>
+                  <a:srgbClr val="3A4763"/>
+                </a:solidFill>
+                <a:latin typeface="+mj-lt"/>
+              </a:rPr>
+              <a:t>• </a:t>
+            </a:r>
+            <a:r>
+              <a:rPr lang="en-US" sz="1600" b="1" dirty="0" err="1">
+                <a:solidFill>
+                  <a:srgbClr val="3A4763"/>
+                </a:solidFill>
+                <a:latin typeface="+mj-lt"/>
+              </a:rPr>
+              <a:t>Stanja</a:t>
+            </a:r>
+            <a:r>
+              <a:rPr lang="en-US" sz="1600" b="1" dirty="0">
+                <a:solidFill>
+                  <a:srgbClr val="3A4763"/>
+                </a:solidFill>
+                <a:latin typeface="+mj-lt"/>
+              </a:rPr>
+              <a:t> automata</a:t>
+            </a:r>
+          </a:p>
+          <a:p>
+            <a:pPr marL="628650" lvl="1" indent="-171450">
+              <a:spcAft>
+                <a:spcPts val="700"/>
+              </a:spcAft>
+              <a:buFont typeface="Wingdings" panose="05000000000000000000" pitchFamily="2" charset="2"/>
+              <a:buChar char="§"/>
+            </a:pPr>
+            <a:r>
+              <a:rPr lang="en-US" sz="1100" dirty="0">
+                <a:solidFill>
+                  <a:srgbClr val="3A4763"/>
+                </a:solidFill>
+                <a:latin typeface="+mj-lt"/>
+              </a:rPr>
+              <a:t>Idle → Moving → </a:t>
+            </a:r>
+            <a:r>
+              <a:rPr lang="en-US" sz="1100" dirty="0" err="1">
+                <a:solidFill>
+                  <a:srgbClr val="3A4763"/>
+                </a:solidFill>
+                <a:latin typeface="+mj-lt"/>
+              </a:rPr>
+              <a:t>DoorOpen</a:t>
+            </a:r>
+            <a:r>
+              <a:rPr lang="en-US" sz="1100" dirty="0">
+                <a:solidFill>
+                  <a:srgbClr val="3A4763"/>
+                </a:solidFill>
+                <a:latin typeface="+mj-lt"/>
+              </a:rPr>
+              <a:t> → Idle (</a:t>
+            </a:r>
+            <a:r>
+              <a:rPr lang="en-US" sz="1100" dirty="0" err="1">
+                <a:solidFill>
+                  <a:srgbClr val="3A4763"/>
+                </a:solidFill>
+                <a:latin typeface="+mj-lt"/>
+              </a:rPr>
+              <a:t>normalan</a:t>
+            </a:r>
+            <a:r>
+              <a:rPr lang="en-US" sz="1100" dirty="0">
+                <a:solidFill>
+                  <a:srgbClr val="3A4763"/>
+                </a:solidFill>
+                <a:latin typeface="+mj-lt"/>
+              </a:rPr>
+              <a:t> </a:t>
+            </a:r>
+            <a:r>
+              <a:rPr lang="en-US" sz="1100" dirty="0" err="1">
+                <a:solidFill>
+                  <a:srgbClr val="3A4763"/>
+                </a:solidFill>
+                <a:latin typeface="+mj-lt"/>
+              </a:rPr>
+              <a:t>ciklus</a:t>
+            </a:r>
+            <a:r>
+              <a:rPr lang="en-US" sz="1100" dirty="0">
+                <a:solidFill>
+                  <a:srgbClr val="3A4763"/>
+                </a:solidFill>
+                <a:latin typeface="+mj-lt"/>
+              </a:rPr>
+              <a:t>)</a:t>
+            </a:r>
+          </a:p>
+          <a:p>
+            <a:pPr marL="628650" lvl="1" indent="-171450">
+              <a:spcAft>
+                <a:spcPts val="700"/>
+              </a:spcAft>
+              <a:buFont typeface="Wingdings" panose="05000000000000000000" pitchFamily="2" charset="2"/>
+              <a:buChar char="§"/>
+            </a:pPr>
+            <a:r>
+              <a:rPr lang="en-US" sz="1100" dirty="0">
+                <a:solidFill>
+                  <a:srgbClr val="3A4763"/>
+                </a:solidFill>
+                <a:latin typeface="+mj-lt"/>
+              </a:rPr>
+              <a:t>Shutdown — </a:t>
+            </a:r>
+            <a:r>
+              <a:rPr lang="en-US" sz="1100" dirty="0" err="1">
+                <a:solidFill>
+                  <a:srgbClr val="3A4763"/>
+                </a:solidFill>
+                <a:latin typeface="+mj-lt"/>
+              </a:rPr>
+              <a:t>dostupno</a:t>
+            </a:r>
+            <a:r>
+              <a:rPr lang="en-US" sz="1100" dirty="0">
+                <a:solidFill>
+                  <a:srgbClr val="3A4763"/>
+                </a:solidFill>
+                <a:latin typeface="+mj-lt"/>
+              </a:rPr>
+              <a:t> </a:t>
+            </a:r>
+            <a:r>
+              <a:rPr lang="en-US" sz="1100" dirty="0" err="1">
+                <a:solidFill>
+                  <a:srgbClr val="3A4763"/>
+                </a:solidFill>
+                <a:latin typeface="+mj-lt"/>
+              </a:rPr>
+              <a:t>iz</a:t>
+            </a:r>
+            <a:r>
+              <a:rPr lang="en-US" sz="1100" dirty="0">
+                <a:solidFill>
+                  <a:srgbClr val="3A4763"/>
+                </a:solidFill>
+                <a:latin typeface="+mj-lt"/>
+              </a:rPr>
+              <a:t> </a:t>
+            </a:r>
+            <a:r>
+              <a:rPr lang="en-US" sz="1100" dirty="0" err="1">
+                <a:solidFill>
+                  <a:srgbClr val="3A4763"/>
+                </a:solidFill>
+                <a:latin typeface="+mj-lt"/>
+              </a:rPr>
+              <a:t>bilo</a:t>
+            </a:r>
+            <a:r>
+              <a:rPr lang="en-US" sz="1100" dirty="0">
+                <a:solidFill>
+                  <a:srgbClr val="3A4763"/>
+                </a:solidFill>
+                <a:latin typeface="+mj-lt"/>
+              </a:rPr>
+              <a:t> </a:t>
+            </a:r>
+            <a:r>
+              <a:rPr lang="en-US" sz="1100" dirty="0" err="1">
+                <a:solidFill>
+                  <a:srgbClr val="3A4763"/>
+                </a:solidFill>
+                <a:latin typeface="+mj-lt"/>
+              </a:rPr>
+              <a:t>kog</a:t>
+            </a:r>
+            <a:r>
+              <a:rPr lang="en-US" sz="1100" dirty="0">
+                <a:solidFill>
+                  <a:srgbClr val="3A4763"/>
+                </a:solidFill>
+                <a:latin typeface="+mj-lt"/>
+              </a:rPr>
+              <a:t> </a:t>
+            </a:r>
+            <a:r>
+              <a:rPr lang="en-US" sz="1100" dirty="0" err="1">
+                <a:solidFill>
+                  <a:srgbClr val="3A4763"/>
+                </a:solidFill>
+                <a:latin typeface="+mj-lt"/>
+              </a:rPr>
+              <a:t>stanja</a:t>
+            </a:r>
+            <a:r>
+              <a:rPr lang="en-US" sz="1100" dirty="0">
+                <a:solidFill>
+                  <a:srgbClr val="3A4763"/>
+                </a:solidFill>
+                <a:latin typeface="+mj-lt"/>
+              </a:rPr>
+              <a:t> </a:t>
+            </a:r>
+            <a:r>
+              <a:rPr lang="en-US" sz="1100" dirty="0" err="1">
+                <a:solidFill>
+                  <a:srgbClr val="3A4763"/>
+                </a:solidFill>
+                <a:latin typeface="+mj-lt"/>
+              </a:rPr>
+              <a:t>preko</a:t>
+            </a:r>
+            <a:r>
+              <a:rPr lang="en-US" sz="1100" dirty="0">
+                <a:solidFill>
+                  <a:srgbClr val="3A4763"/>
+                </a:solidFill>
+                <a:latin typeface="+mj-lt"/>
+              </a:rPr>
+              <a:t> Guard Clause-a</a:t>
+            </a:r>
+          </a:p>
           <a:p>
             <a:pPr>
               <a:lnSpc>
@@ -18604,24 +23841,12 @@
                 <a:spcPts val="700"/>
               </a:spcAft>
             </a:pPr>
-            <a:r>
-              <a:rPr sz="1050" b="1" i="0">
-                <a:solidFill>
-                  <a:srgbClr val="0E7C86"/>
-                </a:solidFill>
-                <a:latin typeface="Calibri"/>
-              </a:rPr>
-              <a:t>•  </a:t>
-            </a:r>
-            <a:r>
-              <a:rPr sz="1050" b="0" i="0">
-                <a:solidFill>
-                  <a:srgbClr val="3A4763"/>
-                </a:solidFill>
-                <a:latin typeface="Calibri"/>
-              </a:rPr>
-              <a:t>Jedna While petlja: kroz shift-registre se nose trenutno stanje i integralna suma regulatora.</a:t>
-            </a:r>
+            <a:endParaRPr lang="en-US" sz="1100" dirty="0">
+              <a:solidFill>
+                <a:srgbClr val="3A4763"/>
+              </a:solidFill>
+              <a:latin typeface="+mj-lt"/>
+            </a:endParaRPr>
           </a:p>
           <a:p>
             <a:pPr>
@@ -18635,443 +23860,51 @@
                 <a:spcPts val="700"/>
               </a:spcAft>
             </a:pPr>
-            <a:r>
-              <a:rPr sz="1050" b="1" i="0">
-                <a:solidFill>
-                  <a:srgbClr val="0E7C86"/>
-                </a:solidFill>
-                <a:latin typeface="Calibri"/>
-              </a:rPr>
-              <a:t>•  </a:t>
-            </a:r>
-            <a:r>
-              <a:rPr sz="1050" b="1" i="0">
-                <a:solidFill>
-                  <a:srgbClr val="17223B"/>
-                </a:solidFill>
-                <a:latin typeface="Calibri"/>
-              </a:rPr>
-              <a:t>U HIL verziji </a:t>
-            </a:r>
-            <a:r>
-              <a:rPr sz="1050" b="0" i="0">
-                <a:solidFill>
-                  <a:srgbClr val="3A4763"/>
-                </a:solidFill>
-                <a:latin typeface="Calibri"/>
-              </a:rPr>
-              <a:t>poziciju x automat ne pamti lokalno, već je čita sa mreže (održava je model).</a:t>
-            </a:r>
-          </a:p>
-          <a:p>
-            <a:pPr>
-              <a:lnSpc>
-                <a:spcPct val="105000"/>
-              </a:lnSpc>
-              <a:spcBef>
-                <a:spcPts val="0"/>
-              </a:spcBef>
-              <a:spcAft>
-                <a:spcPts val="700"/>
-              </a:spcAft>
-            </a:pPr>
-            <a:r>
-              <a:rPr sz="1050" b="1" i="0">
-                <a:solidFill>
-                  <a:srgbClr val="0E7C86"/>
-                </a:solidFill>
-                <a:latin typeface="Calibri"/>
-              </a:rPr>
-              <a:t>•  </a:t>
-            </a:r>
-            <a:r>
-              <a:rPr sz="1050" b="1" i="0">
-                <a:solidFill>
-                  <a:srgbClr val="17223B"/>
-                </a:solidFill>
-                <a:latin typeface="Calibri"/>
-              </a:rPr>
-              <a:t>Svaka iteracija: </a:t>
-            </a:r>
-            <a:r>
-              <a:rPr sz="1050" b="0" i="0">
-                <a:solidFill>
-                  <a:srgbClr val="3A4763"/>
-                </a:solidFill>
-                <a:latin typeface="Calibri"/>
-              </a:rPr>
-              <a:t>pročita stanje, pa glavna Case struktura izvrši logiku tog stanja (računa upravljanje u i predlaže sledeće stanje).</a:t>
-            </a:r>
-          </a:p>
-          <a:p>
-            <a:pPr>
-              <a:lnSpc>
-                <a:spcPct val="105000"/>
-              </a:lnSpc>
-              <a:spcBef>
-                <a:spcPts val="0"/>
-              </a:spcBef>
-              <a:spcAft>
-                <a:spcPts val="700"/>
-              </a:spcAft>
-            </a:pPr>
-            <a:r>
-              <a:rPr sz="1050" b="1" i="0">
-                <a:solidFill>
-                  <a:srgbClr val="0E7C86"/>
-                </a:solidFill>
-                <a:latin typeface="Calibri"/>
-              </a:rPr>
-              <a:t>•  </a:t>
-            </a:r>
-            <a:r>
-              <a:rPr sz="1050" b="0" i="0">
-                <a:solidFill>
-                  <a:srgbClr val="3A4763"/>
-                </a:solidFill>
-                <a:latin typeface="Calibri"/>
-              </a:rPr>
-              <a:t>Guard Clause presreće predlog: ako je Stop ili greška, sledeće stanje se prisilno menja u Shutdown.</a:t>
-            </a:r>
-          </a:p>
-          <a:p>
-            <a:pPr>
-              <a:lnSpc>
-                <a:spcPct val="105000"/>
-              </a:lnSpc>
-              <a:spcBef>
-                <a:spcPts val="0"/>
-              </a:spcBef>
-              <a:spcAft>
-                <a:spcPts val="700"/>
-              </a:spcAft>
-            </a:pPr>
-            <a:r>
-              <a:rPr sz="1050" b="1" i="0">
-                <a:solidFill>
-                  <a:srgbClr val="0E7C86"/>
-                </a:solidFill>
-                <a:latin typeface="Calibri"/>
-              </a:rPr>
-              <a:t>•  </a:t>
-            </a:r>
-            <a:r>
-              <a:rPr sz="1050" b="1" i="0">
-                <a:solidFill>
-                  <a:srgbClr val="17223B"/>
-                </a:solidFill>
-                <a:latin typeface="Calibri"/>
-              </a:rPr>
-              <a:t>Izabrano stanje se </a:t>
-            </a:r>
-            <a:r>
-              <a:rPr sz="1050" b="0" i="0">
-                <a:solidFill>
-                  <a:srgbClr val="3A4763"/>
-                </a:solidFill>
-                <a:latin typeface="Calibri"/>
-              </a:rPr>
-              <a:t>upiše u shift-registar za narednu iteraciju petlje.</a:t>
-            </a:r>
-          </a:p>
-        </p:txBody>
-      </p:sp>
-      <p:sp>
-        <p:nvSpPr>
-          <p:cNvPr id="8" name="Rounded Rectangle 7"/>
-          <p:cNvSpPr/>
-          <p:nvPr/>
-        </p:nvSpPr>
-        <p:spPr>
-          <a:xfrm>
-            <a:off x="5074920" y="1371600"/>
-            <a:ext cx="3337560" cy="3154680"/>
-          </a:xfrm>
-          <a:prstGeom prst="roundRect">
-            <a:avLst>
-              <a:gd name="adj" fmla="val 4000"/>
-            </a:avLst>
-          </a:prstGeom>
-          <a:solidFill>
-            <a:srgbClr val="F4F6F8"/>
-          </a:solidFill>
-          <a:ln w="16510">
-            <a:solidFill>
-              <a:srgbClr val="D9DFE5"/>
-            </a:solidFill>
-          </a:ln>
-          <a:effectLst/>
-        </p:spPr>
-        <p:style>
-          <a:lnRef idx="1">
-            <a:schemeClr val="accent1"/>
-          </a:lnRef>
-          <a:fillRef idx="3">
-            <a:schemeClr val="accent1"/>
-          </a:fillRef>
-          <a:effectRef idx="2">
-            <a:schemeClr val="accent1"/>
-          </a:effectRef>
-          <a:fontRef idx="minor">
-            <a:schemeClr val="lt1"/>
-          </a:fontRef>
-        </p:style>
-        <p:txBody>
-          <a:bodyPr rtlCol="0" anchor="ctr"/>
-          <a:lstStyle/>
-          <a:p>
-            <a:pPr algn="ctr"/>
-            <a:endParaRPr/>
-          </a:p>
-        </p:txBody>
-      </p:sp>
-      <p:sp>
-        <p:nvSpPr>
-          <p:cNvPr id="9" name="Rounded Rectangle 8"/>
-          <p:cNvSpPr/>
-          <p:nvPr/>
-        </p:nvSpPr>
-        <p:spPr>
-          <a:xfrm>
-            <a:off x="6240780" y="2002536"/>
-            <a:ext cx="1005840" cy="749808"/>
-          </a:xfrm>
-          <a:prstGeom prst="roundRect">
-            <a:avLst>
-              <a:gd name="adj" fmla="val 8000"/>
-            </a:avLst>
-          </a:prstGeom>
-          <a:solidFill>
-            <a:srgbClr val="DCE3EA"/>
-          </a:solidFill>
-          <a:ln w="15240">
-            <a:solidFill>
-              <a:srgbClr val="6C7688"/>
-            </a:solidFill>
-          </a:ln>
-          <a:effectLst/>
-        </p:spPr>
-        <p:style>
-          <a:lnRef idx="1">
-            <a:schemeClr val="accent1"/>
-          </a:lnRef>
-          <a:fillRef idx="3">
-            <a:schemeClr val="accent1"/>
-          </a:fillRef>
-          <a:effectRef idx="2">
-            <a:schemeClr val="accent1"/>
-          </a:effectRef>
-          <a:fontRef idx="minor">
-            <a:schemeClr val="lt1"/>
-          </a:fontRef>
-        </p:style>
-        <p:txBody>
-          <a:bodyPr rtlCol="0" anchor="ctr"/>
-          <a:lstStyle/>
-          <a:p>
-            <a:pPr algn="ctr"/>
-            <a:endParaRPr/>
-          </a:p>
-        </p:txBody>
-      </p:sp>
-      <p:sp>
-        <p:nvSpPr>
-          <p:cNvPr id="10" name="Oval 9"/>
-          <p:cNvSpPr/>
-          <p:nvPr/>
-        </p:nvSpPr>
-        <p:spPr>
-          <a:xfrm>
-            <a:off x="6496812" y="2148840"/>
-            <a:ext cx="201168" cy="201168"/>
-          </a:xfrm>
-          <a:prstGeom prst="ellipse">
-            <a:avLst/>
-          </a:prstGeom>
-          <a:solidFill>
-            <a:srgbClr val="D9832F"/>
-          </a:solidFill>
-          <a:ln>
-            <a:noFill/>
-          </a:ln>
-          <a:effectLst/>
-        </p:spPr>
-        <p:style>
-          <a:lnRef idx="1">
-            <a:schemeClr val="accent1"/>
-          </a:lnRef>
-          <a:fillRef idx="3">
-            <a:schemeClr val="accent1"/>
-          </a:fillRef>
-          <a:effectRef idx="2">
-            <a:schemeClr val="accent1"/>
-          </a:effectRef>
-          <a:fontRef idx="minor">
-            <a:schemeClr val="lt1"/>
-          </a:fontRef>
-        </p:style>
-        <p:txBody>
-          <a:bodyPr rtlCol="0" anchor="ctr"/>
-          <a:lstStyle/>
-          <a:p>
-            <a:pPr algn="ctr"/>
-            <a:endParaRPr/>
-          </a:p>
-        </p:txBody>
-      </p:sp>
-      <p:sp>
-        <p:nvSpPr>
-          <p:cNvPr id="11" name="Isosceles Triangle 10"/>
-          <p:cNvSpPr/>
-          <p:nvPr/>
-        </p:nvSpPr>
-        <p:spPr>
-          <a:xfrm>
-            <a:off x="6579108" y="2331720"/>
-            <a:ext cx="640080" cy="365760"/>
-          </a:xfrm>
-          <a:prstGeom prst="triangle">
-            <a:avLst/>
-          </a:prstGeom>
-          <a:solidFill>
-            <a:srgbClr val="0E7C86"/>
-          </a:solidFill>
-          <a:ln>
-            <a:noFill/>
-          </a:ln>
-          <a:effectLst/>
-        </p:spPr>
-        <p:style>
-          <a:lnRef idx="1">
-            <a:schemeClr val="accent1"/>
-          </a:lnRef>
-          <a:fillRef idx="3">
-            <a:schemeClr val="accent1"/>
-          </a:fillRef>
-          <a:effectRef idx="2">
-            <a:schemeClr val="accent1"/>
-          </a:effectRef>
-          <a:fontRef idx="minor">
-            <a:schemeClr val="lt1"/>
-          </a:fontRef>
-        </p:style>
-        <p:txBody>
-          <a:bodyPr rtlCol="0" anchor="ctr"/>
-          <a:lstStyle/>
-          <a:p>
-            <a:pPr algn="ctr"/>
-            <a:endParaRPr/>
-          </a:p>
-        </p:txBody>
-      </p:sp>
-      <p:sp>
-        <p:nvSpPr>
-          <p:cNvPr id="12" name="TextBox 11"/>
-          <p:cNvSpPr txBox="1"/>
-          <p:nvPr/>
-        </p:nvSpPr>
-        <p:spPr>
-          <a:xfrm>
-            <a:off x="5257800" y="3264408"/>
-            <a:ext cx="2971800" cy="1198778"/>
+            <a:endParaRPr lang="sr-Latn-RS" sz="1100" b="0" i="0" dirty="0" smtClean="0">
+              <a:solidFill>
+                <a:srgbClr val="3A4763"/>
+              </a:solidFill>
+              <a:latin typeface="+mj-lt"/>
+            </a:endParaRPr>
+          </a:p>
+        </p:txBody>
+      </p:sp>
+      <p:sp>
+        <p:nvSpPr>
+          <p:cNvPr id="13" name="AutoShape 2" descr="blob:https://web.whatsapp.com/b1d9635d-070f-480c-bdce-554c2893f55d"/>
+          <p:cNvSpPr>
+            <a:spLocks noChangeAspect="1" noChangeArrowheads="1"/>
+          </p:cNvSpPr>
+          <p:nvPr/>
+        </p:nvSpPr>
+        <p:spPr bwMode="auto">
+          <a:xfrm>
+            <a:off x="155575" y="-144463"/>
+            <a:ext cx="304800" cy="304801"/>
           </a:xfrm>
           <a:prstGeom prst="rect">
             <a:avLst/>
           </a:prstGeom>
           <a:noFill/>
-        </p:spPr>
-        <p:txBody>
-          <a:bodyPr wrap="square" lIns="0" tIns="0" rIns="0" bIns="0" anchor="t">
-            <a:spAutoFit/>
+          <a:extLst>
+            <a:ext uri="{909E8E84-426E-40DD-AFC4-6F175D3DCCD1}">
+              <a14:hiddenFill xmlns:a14="http://schemas.microsoft.com/office/drawing/2010/main">
+                <a:solidFill>
+                  <a:srgbClr val="FFFFFF"/>
+                </a:solidFill>
+              </a14:hiddenFill>
+            </a:ext>
+          </a:extLst>
+        </p:spPr>
+        <p:txBody>
+          <a:bodyPr vert="horz" wrap="square" lIns="91440" tIns="45720" rIns="91440" bIns="45720" numCol="1" anchor="t" anchorCtr="0" compatLnSpc="1">
+            <a:prstTxWarp prst="textNoShape">
+              <a:avLst/>
+            </a:prstTxWarp>
           </a:bodyPr>
           <a:lstStyle/>
           <a:p>
-            <a:pPr algn="ctr">
-              <a:lnSpc>
-                <a:spcPct val="100000"/>
-              </a:lnSpc>
-              <a:spcBef>
-                <a:spcPts val="0"/>
-              </a:spcBef>
-              <a:spcAft>
-                <a:spcPts val="200"/>
-              </a:spcAft>
-            </a:pPr>
-            <a:r>
-              <a:rPr sz="1200" b="1" i="0">
-                <a:solidFill>
-                  <a:srgbClr val="17223B"/>
-                </a:solidFill>
-                <a:latin typeface="Poppins"/>
-              </a:rPr>
-              <a:t>Ovde ubaci: Slika 4</a:t>
-            </a:r>
-          </a:p>
-          <a:p>
-            <a:pPr algn="ctr">
-              <a:lnSpc>
-                <a:spcPct val="100000"/>
-              </a:lnSpc>
-              <a:spcBef>
-                <a:spcPts val="0"/>
-              </a:spcBef>
-              <a:spcAft>
-                <a:spcPts val="200"/>
-              </a:spcAft>
-            </a:pPr>
-            <a:r>
-              <a:rPr sz="950" b="0" i="0">
-                <a:solidFill>
-                  <a:srgbClr val="6C7688"/>
-                </a:solidFill>
-                <a:latin typeface="Calibri"/>
-              </a:rPr>
-              <a:t>Glavna Case struktura (Moving)</a:t>
-            </a:r>
-          </a:p>
-          <a:p>
-            <a:pPr algn="ctr">
-              <a:lnSpc>
-                <a:spcPct val="100000"/>
-              </a:lnSpc>
-              <a:spcBef>
-                <a:spcPts val="0"/>
-              </a:spcBef>
-              <a:spcAft>
-                <a:spcPts val="200"/>
-              </a:spcAft>
-            </a:pPr>
-            <a:r>
-              <a:rPr sz="950" b="0" i="0">
-                <a:solidFill>
-                  <a:srgbClr val="6C7688"/>
-                </a:solidFill>
-                <a:latin typeface="Calibri"/>
-              </a:rPr>
-              <a:t>i Guard Clause u</a:t>
-            </a:r>
-          </a:p>
-          <a:p>
-            <a:pPr algn="ctr">
-              <a:lnSpc>
-                <a:spcPct val="100000"/>
-              </a:lnSpc>
-              <a:spcBef>
-                <a:spcPts val="0"/>
-              </a:spcBef>
-              <a:spcAft>
-                <a:spcPts val="200"/>
-              </a:spcAft>
-            </a:pPr>
-            <a:r>
-              <a:rPr sz="950" b="0" i="0">
-                <a:solidFill>
-                  <a:srgbClr val="6C7688"/>
-                </a:solidFill>
-                <a:latin typeface="Calibri"/>
-              </a:rPr>
-              <a:t>Automat_Lift_sbRIO.vi</a:t>
-            </a:r>
+            <a:endParaRPr lang="en-US"/>
           </a:p>
         </p:txBody>
       </p:sp>
@@ -19080,6 +23913,13 @@
   <p:clrMapOvr>
     <a:masterClrMapping/>
   </p:clrMapOvr>
+  <p:timing>
+    <p:tnLst>
+      <p:par>
+        <p:cTn id="1" dur="indefinite" restart="never" nodeType="tmRoot"/>
+      </p:par>
+    </p:tnLst>
+  </p:timing>
 </p:sld>
 </file>
 
@@ -19692,7 +24532,7 @@
   <a:extraClrSchemeLst/>
   <a:extLst>
     <a:ext uri="{05A4C25C-085E-4340-85A3-A5531E510DB2}">
-      <thm15:themeFamily xmlns:thm15="http://schemas.microsoft.com/office/thememl/2012/main" name="Office Theme" id="{62F939B6-93AF-4DB8-9C6B-D6C7DFDC589F}" vid="{4A3C46E8-61CC-4603-A589-7422A47A8E4A}"/>
+      <thm15:themeFamily xmlns:thm15="http://schemas.microsoft.com/office/thememl/2012/main" xmlns="" name="Office Theme" id="{62F939B6-93AF-4DB8-9C6B-D6C7DFDC589F}" vid="{4A3C46E8-61CC-4603-A589-7422A47A8E4A}"/>
     </a:ext>
   </a:extLst>
 </a:theme>

--- a/Prezentacija_SIL_HIL_Lift.pptx
+++ b/Prezentacija_SIL_HIL_Lift.pptx
@@ -122,7 +122,7 @@
   </p:defaultTextStyle>
   <p:extLst>
     <p:ext uri="{EFAFB233-063F-42B5-8137-9DF3F51BA10A}">
-      <p15:sldGuideLst xmlns:p15="http://schemas.microsoft.com/office/powerpoint/2012/main" xmlns="">
+      <p15:sldGuideLst xmlns="" xmlns:p15="http://schemas.microsoft.com/office/powerpoint/2012/main">
         <p15:guide id="1" orient="horz" pos="2160">
           <p15:clr>
             <a:srgbClr val="A4A3A4"/>
@@ -9471,16 +9471,25 @@
               <a:t> </a:t>
             </a:r>
             <a:r>
-              <a:rPr sz="1100" b="0" i="0" dirty="0" err="1">
-                <a:solidFill>
-                  <a:srgbClr val="3A4763"/>
-                </a:solidFill>
-                <a:latin typeface="Calibri"/>
-              </a:rPr>
-              <a:t>klika</a:t>
-            </a:r>
-            <a:r>
-              <a:rPr sz="1100" b="0" i="0" dirty="0">
+              <a:rPr sz="1100" b="0" i="0" dirty="0" err="1" smtClean="0">
+                <a:solidFill>
+                  <a:srgbClr val="3A4763"/>
+                </a:solidFill>
+                <a:latin typeface="Calibri"/>
+              </a:rPr>
+              <a:t>klik</a:t>
+            </a:r>
+            <a:r>
+              <a:rPr lang="sr-Latn-RS" sz="1100" dirty="0" smtClean="0">
+                <a:solidFill>
+                  <a:srgbClr val="3A4763"/>
+                </a:solidFill>
+                <a:latin typeface="Calibri"/>
+              </a:rPr>
+              <a:t>će na neko dugme</a:t>
+            </a:r>
+            <a:r>
+              <a:rPr sz="1100" b="0" i="0" dirty="0" smtClean="0">
                 <a:solidFill>
                   <a:srgbClr val="3A4763"/>
                 </a:solidFill>
@@ -9488,6 +9497,12 @@
               </a:rPr>
               <a:t>.</a:t>
             </a:r>
+            <a:endParaRPr sz="1100" b="0" i="0" dirty="0">
+              <a:solidFill>
+                <a:srgbClr val="3A4763"/>
+              </a:solidFill>
+              <a:latin typeface="Calibri"/>
+            </a:endParaRPr>
           </a:p>
         </p:txBody>
       </p:sp>
@@ -24532,7 +24547,7 @@
   <a:extraClrSchemeLst/>
   <a:extLst>
     <a:ext uri="{05A4C25C-085E-4340-85A3-A5531E510DB2}">
-      <thm15:themeFamily xmlns:thm15="http://schemas.microsoft.com/office/thememl/2012/main" xmlns="" name="Office Theme" id="{62F939B6-93AF-4DB8-9C6B-D6C7DFDC589F}" vid="{4A3C46E8-61CC-4603-A589-7422A47A8E4A}"/>
+      <thm15:themeFamily xmlns="" xmlns:thm15="http://schemas.microsoft.com/office/thememl/2012/main" name="Office Theme" id="{62F939B6-93AF-4DB8-9C6B-D6C7DFDC589F}" vid="{4A3C46E8-61CC-4603-A589-7422A47A8E4A}"/>
     </a:ext>
   </a:extLst>
 </a:theme>
